--- a/docs/sales-reform-toolkit/meetings/点検会議_キーチャート_初回20260804.pptx
+++ b/docs/sales-reform-toolkit/meetings/点検会議_キーチャート_初回20260804.pptx
@@ -3189,7 +3189,7 @@
                 <a:ea typeface="Yu Gothic"/>
                 <a:cs typeface="Yu Gothic"/>
               </a:rPr>
-              <a:t>本日の承認事項（3件）</a:t>
+              <a:t>業績の報告 — 今期目標の構造</a:t>
             </a:r>
           </a:p>
         </p:txBody>
@@ -3274,7 +3274,7 @@
                 <a:ea typeface="Yu Gothic"/>
                 <a:cs typeface="Yu Gothic"/>
               </a:rPr>
-              <a:t>各件は論点1枚（問い・選択肢・推奨）を添付。7/31のSTO取りまとめで最終確定します</a:t>
+              <a:t>報告：永竹社長。目標は「ベース＋アップサイド」の二段構え。この場で毎月、予実を振り返ります</a:t>
             </a:r>
           </a:p>
         </p:txBody>
@@ -3288,7 +3288,7 @@
         <p:spPr>
           <a:xfrm>
             <a:off x="502920" y="1920240"/>
-            <a:ext cx="11183112" cy="1389888"/>
+            <a:ext cx="3602736" cy="1517904"/>
           </a:xfrm>
           <a:prstGeom prst="roundRect">
             <a:avLst>
@@ -3329,101 +3329,14 @@
       </p:sp>
       <p:sp>
         <p:nvSpPr>
-          <p:cNvPr id="7" name="Rounded Rectangle 6"/>
-          <p:cNvSpPr/>
-          <p:nvPr/>
-        </p:nvSpPr>
-        <p:spPr>
-          <a:xfrm>
-            <a:off x="777240" y="2249424"/>
-            <a:ext cx="566928" cy="566928"/>
-          </a:xfrm>
-          <a:prstGeom prst="roundRect">
-            <a:avLst>
-              <a:gd name="adj" fmla="val 10000"/>
-            </a:avLst>
-          </a:prstGeom>
-          <a:solidFill>
-            <a:srgbClr val="2563EB"/>
-          </a:solidFill>
-          <a:ln>
-            <a:noFill/>
-          </a:ln>
-          <a:effectLst/>
-        </p:spPr>
-        <p:style>
-          <a:lnRef idx="1">
-            <a:schemeClr val="accent1"/>
-          </a:lnRef>
-          <a:fillRef idx="3">
-            <a:schemeClr val="accent1"/>
-          </a:fillRef>
-          <a:effectRef idx="2">
-            <a:schemeClr val="accent1"/>
-          </a:effectRef>
-          <a:fontRef idx="minor">
-            <a:schemeClr val="lt1"/>
-          </a:fontRef>
-        </p:style>
-        <p:txBody>
-          <a:bodyPr rtlCol="0" anchor="ctr"/>
-          <a:lstStyle/>
-          <a:p>
-            <a:pPr algn="ctr"/>
-          </a:p>
-        </p:txBody>
-      </p:sp>
-      <p:sp>
-        <p:nvSpPr>
-          <p:cNvPr id="8" name="TextBox 7"/>
+          <p:cNvPr id="7" name="TextBox 6"/>
           <p:cNvSpPr txBox="1"/>
           <p:nvPr/>
         </p:nvSpPr>
         <p:spPr>
           <a:xfrm>
-            <a:off x="777240" y="2322576"/>
-            <a:ext cx="566928" cy="457200"/>
-          </a:xfrm>
-          <a:prstGeom prst="rect">
-            <a:avLst/>
-          </a:prstGeom>
-          <a:noFill/>
-        </p:spPr>
-        <p:txBody>
-          <a:bodyPr wrap="square" lIns="0" rIns="0" tIns="0" bIns="0">
-            <a:spAutoFit/>
-          </a:bodyPr>
-          <a:lstStyle/>
-          <a:p>
-            <a:pPr algn="ctr">
-              <a:spcAft>
-                <a:spcPts val="400"/>
-              </a:spcAft>
-            </a:pPr>
-            <a:r>
-              <a:rPr sz="2000" b="1" i="0">
-                <a:solidFill>
-                  <a:srgbClr val="FFFFFF"/>
-                </a:solidFill>
-                <a:latin typeface="Yu Gothic"/>
-                <a:ea typeface="Yu Gothic"/>
-                <a:cs typeface="Yu Gothic"/>
-              </a:rPr>
-              <a:t>1</a:t>
-            </a:r>
-          </a:p>
-        </p:txBody>
-      </p:sp>
-      <p:sp>
-        <p:nvSpPr>
-          <p:cNvPr id="9" name="TextBox 8"/>
-          <p:cNvSpPr txBox="1"/>
-          <p:nvPr/>
-        </p:nvSpPr>
-        <p:spPr>
-          <a:xfrm>
-            <a:off x="1600200" y="2084832"/>
-            <a:ext cx="9875520" cy="365760"/>
+            <a:off x="777240" y="2103120"/>
+            <a:ext cx="3108960" cy="274320"/>
           </a:xfrm>
           <a:prstGeom prst="rect">
             <a:avLst/>
@@ -3442,29 +3355,29 @@
               </a:spcAft>
             </a:pPr>
             <a:r>
-              <a:rPr sz="1500" b="1" i="0">
-                <a:solidFill>
-                  <a:srgbClr val="1B1B26"/>
+              <a:rPr sz="1100" b="1" i="0">
+                <a:solidFill>
+                  <a:srgbClr val="6B7280"/>
                 </a:solidFill>
                 <a:latin typeface="Yu Gothic"/>
                 <a:ea typeface="Yu Gothic"/>
                 <a:cs typeface="Yu Gothic"/>
               </a:rPr>
-              <a:t>顧客ランク統合の基本方針</a:t>
-            </a:r>
-          </a:p>
-        </p:txBody>
-      </p:sp>
-      <p:sp>
-        <p:nvSpPr>
-          <p:cNvPr id="10" name="TextBox 9"/>
+              <a:t>ベース</a:t>
+            </a:r>
+          </a:p>
+        </p:txBody>
+      </p:sp>
+      <p:sp>
+        <p:nvSpPr>
+          <p:cNvPr id="8" name="TextBox 7"/>
           <p:cNvSpPr txBox="1"/>
           <p:nvPr/>
         </p:nvSpPr>
         <p:spPr>
           <a:xfrm>
-            <a:off x="1600200" y="2450592"/>
-            <a:ext cx="9875520" cy="292608"/>
+            <a:off x="777240" y="2395728"/>
+            <a:ext cx="3108960" cy="603504"/>
           </a:xfrm>
           <a:prstGeom prst="rect">
             <a:avLst/>
@@ -3483,29 +3396,29 @@
               </a:spcAft>
             </a:pPr>
             <a:r>
-              <a:rPr sz="1050" b="1" i="0">
-                <a:solidFill>
-                  <a:srgbClr val="2563EB"/>
+              <a:rPr sz="3000" b="1" i="0">
+                <a:solidFill>
+                  <a:srgbClr val="1B1B26"/>
                 </a:solidFill>
                 <a:latin typeface="Yu Gothic"/>
                 <a:ea typeface="Yu Gothic"/>
                 <a:cs typeface="Yu Gothic"/>
               </a:rPr>
-              <a:t>ライセンス営業改革（南谷さん）</a:t>
-            </a:r>
-          </a:p>
-        </p:txBody>
-      </p:sp>
-      <p:sp>
-        <p:nvSpPr>
-          <p:cNvPr id="11" name="TextBox 10"/>
+              <a:t>25億</a:t>
+            </a:r>
+          </a:p>
+        </p:txBody>
+      </p:sp>
+      <p:sp>
+        <p:nvSpPr>
+          <p:cNvPr id="9" name="TextBox 8"/>
           <p:cNvSpPr txBox="1"/>
           <p:nvPr/>
         </p:nvSpPr>
         <p:spPr>
           <a:xfrm>
-            <a:off x="1600200" y="2761488"/>
-            <a:ext cx="9692640" cy="457200"/>
+            <a:off x="777240" y="3035808"/>
+            <a:ext cx="3108960" cy="310896"/>
           </a:xfrm>
           <a:prstGeom prst="rect">
             <a:avLst/>
@@ -3524,29 +3437,29 @@
               </a:spcAft>
             </a:pPr>
             <a:r>
-              <a:rPr sz="1100" b="0" i="0">
-                <a:solidFill>
-                  <a:srgbClr val="1B1B26"/>
+              <a:rPr sz="950" b="0" i="0">
+                <a:solidFill>
+                  <a:srgbClr val="6B7280"/>
                 </a:solidFill>
                 <a:latin typeface="Yu Gothic"/>
                 <a:ea typeface="Yu Gothic"/>
                 <a:cs typeface="Yu Gothic"/>
               </a:rPr>
-              <a:t>決めていただきたいこと：5軸（取引実績・成長性・IP適合・CRM/D2C・海外）の重みと、S/A/B/Cの線引きの考え方</a:t>
-            </a:r>
-          </a:p>
-        </p:txBody>
-      </p:sp>
-      <p:sp>
-        <p:nvSpPr>
-          <p:cNvPr id="12" name="Rounded Rectangle 11"/>
+              <a:t>既存事業の営業利益計画</a:t>
+            </a:r>
+          </a:p>
+        </p:txBody>
+      </p:sp>
+      <p:sp>
+        <p:nvSpPr>
+          <p:cNvPr id="10" name="Rounded Rectangle 9"/>
           <p:cNvSpPr/>
           <p:nvPr/>
         </p:nvSpPr>
         <p:spPr>
           <a:xfrm>
-            <a:off x="502920" y="3456432"/>
-            <a:ext cx="11183112" cy="1389888"/>
+            <a:off x="4297680" y="1920240"/>
+            <a:ext cx="3602736" cy="1517904"/>
           </a:xfrm>
           <a:prstGeom prst="roundRect">
             <a:avLst>
@@ -3587,101 +3500,14 @@
       </p:sp>
       <p:sp>
         <p:nvSpPr>
-          <p:cNvPr id="13" name="Rounded Rectangle 12"/>
-          <p:cNvSpPr/>
-          <p:nvPr/>
-        </p:nvSpPr>
-        <p:spPr>
-          <a:xfrm>
-            <a:off x="777240" y="3785616"/>
-            <a:ext cx="566928" cy="566928"/>
-          </a:xfrm>
-          <a:prstGeom prst="roundRect">
-            <a:avLst>
-              <a:gd name="adj" fmla="val 10000"/>
-            </a:avLst>
-          </a:prstGeom>
-          <a:solidFill>
-            <a:srgbClr val="2563EB"/>
-          </a:solidFill>
-          <a:ln>
-            <a:noFill/>
-          </a:ln>
-          <a:effectLst/>
-        </p:spPr>
-        <p:style>
-          <a:lnRef idx="1">
-            <a:schemeClr val="accent1"/>
-          </a:lnRef>
-          <a:fillRef idx="3">
-            <a:schemeClr val="accent1"/>
-          </a:fillRef>
-          <a:effectRef idx="2">
-            <a:schemeClr val="accent1"/>
-          </a:effectRef>
-          <a:fontRef idx="minor">
-            <a:schemeClr val="lt1"/>
-          </a:fontRef>
-        </p:style>
-        <p:txBody>
-          <a:bodyPr rtlCol="0" anchor="ctr"/>
-          <a:lstStyle/>
-          <a:p>
-            <a:pPr algn="ctr"/>
-          </a:p>
-        </p:txBody>
-      </p:sp>
-      <p:sp>
-        <p:nvSpPr>
-          <p:cNvPr id="14" name="TextBox 13"/>
+          <p:cNvPr id="11" name="TextBox 10"/>
           <p:cNvSpPr txBox="1"/>
           <p:nvPr/>
         </p:nvSpPr>
         <p:spPr>
           <a:xfrm>
-            <a:off x="777240" y="3858768"/>
-            <a:ext cx="566928" cy="457200"/>
-          </a:xfrm>
-          <a:prstGeom prst="rect">
-            <a:avLst/>
-          </a:prstGeom>
-          <a:noFill/>
-        </p:spPr>
-        <p:txBody>
-          <a:bodyPr wrap="square" lIns="0" rIns="0" tIns="0" bIns="0">
-            <a:spAutoFit/>
-          </a:bodyPr>
-          <a:lstStyle/>
-          <a:p>
-            <a:pPr algn="ctr">
-              <a:spcAft>
-                <a:spcPts val="400"/>
-              </a:spcAft>
-            </a:pPr>
-            <a:r>
-              <a:rPr sz="2000" b="1" i="0">
-                <a:solidFill>
-                  <a:srgbClr val="FFFFFF"/>
-                </a:solidFill>
-                <a:latin typeface="Yu Gothic"/>
-                <a:ea typeface="Yu Gothic"/>
-                <a:cs typeface="Yu Gothic"/>
-              </a:rPr>
-              <a:t>2</a:t>
-            </a:r>
-          </a:p>
-        </p:txBody>
-      </p:sp>
-      <p:sp>
-        <p:nvSpPr>
-          <p:cNvPr id="15" name="TextBox 14"/>
-          <p:cNvSpPr txBox="1"/>
-          <p:nvPr/>
-        </p:nvSpPr>
-        <p:spPr>
-          <a:xfrm>
-            <a:off x="1600200" y="3621024"/>
-            <a:ext cx="9875520" cy="365760"/>
+            <a:off x="4572000" y="2103120"/>
+            <a:ext cx="3108960" cy="274320"/>
           </a:xfrm>
           <a:prstGeom prst="rect">
             <a:avLst/>
@@ -3700,29 +3526,29 @@
               </a:spcAft>
             </a:pPr>
             <a:r>
-              <a:rPr sz="1500" b="1" i="0">
-                <a:solidFill>
-                  <a:srgbClr val="1B1B26"/>
+              <a:rPr sz="1100" b="1" i="0">
+                <a:solidFill>
+                  <a:srgbClr val="6B7280"/>
                 </a:solidFill>
                 <a:latin typeface="Yu Gothic"/>
                 <a:ea typeface="Yu Gothic"/>
                 <a:cs typeface="Yu Gothic"/>
               </a:rPr>
-              <a:t>接点づくりのゴール指標と、データ統合の投資方針</a:t>
-            </a:r>
-          </a:p>
-        </p:txBody>
-      </p:sp>
-      <p:sp>
-        <p:nvSpPr>
-          <p:cNvPr id="16" name="TextBox 15"/>
+              <a:t>アップサイド</a:t>
+            </a:r>
+          </a:p>
+        </p:txBody>
+      </p:sp>
+      <p:sp>
+        <p:nvSpPr>
+          <p:cNvPr id="12" name="TextBox 11"/>
           <p:cNvSpPr txBox="1"/>
           <p:nvPr/>
         </p:nvSpPr>
         <p:spPr>
           <a:xfrm>
-            <a:off x="1600200" y="3986784"/>
-            <a:ext cx="9875520" cy="292608"/>
+            <a:off x="4572000" y="2395728"/>
+            <a:ext cx="3108960" cy="603504"/>
           </a:xfrm>
           <a:prstGeom prst="rect">
             <a:avLst/>
@@ -3741,7 +3567,7 @@
               </a:spcAft>
             </a:pPr>
             <a:r>
-              <a:rPr sz="1050" b="1" i="0">
+              <a:rPr sz="3000" b="1" i="0">
                 <a:solidFill>
                   <a:srgbClr val="2563EB"/>
                 </a:solidFill>
@@ -3749,21 +3575,21 @@
                 <a:ea typeface="Yu Gothic"/>
                 <a:cs typeface="Yu Gothic"/>
               </a:rPr>
-              <a:t>接点づくり（黒澤さん）</a:t>
-            </a:r>
-          </a:p>
-        </p:txBody>
-      </p:sp>
-      <p:sp>
-        <p:nvSpPr>
-          <p:cNvPr id="17" name="TextBox 16"/>
+              <a:t>＋15億</a:t>
+            </a:r>
+          </a:p>
+        </p:txBody>
+      </p:sp>
+      <p:sp>
+        <p:nvSpPr>
+          <p:cNvPr id="13" name="TextBox 12"/>
           <p:cNvSpPr txBox="1"/>
           <p:nvPr/>
         </p:nvSpPr>
         <p:spPr>
           <a:xfrm>
-            <a:off x="1600200" y="4297680"/>
-            <a:ext cx="9692640" cy="457200"/>
+            <a:off x="4572000" y="3035808"/>
+            <a:ext cx="3108960" cy="310896"/>
           </a:xfrm>
           <a:prstGeom prst="rect">
             <a:avLst/>
@@ -3782,29 +3608,29 @@
               </a:spcAft>
             </a:pPr>
             <a:r>
-              <a:rPr sz="1100" b="0" i="0">
-                <a:solidFill>
-                  <a:srgbClr val="1B1B26"/>
+              <a:rPr sz="950" b="0" i="0">
+                <a:solidFill>
+                  <a:srgbClr val="6B7280"/>
                 </a:solidFill>
                 <a:latin typeface="Yu Gothic"/>
                 <a:ea typeface="Yu Gothic"/>
                 <a:cs typeface="Yu Gothic"/>
               </a:rPr>
-              <a:t>決めていただきたいこと：KGI「IDでつながり続けるファン数」の指標体系と、実験→実証→投資の段階案</a:t>
-            </a:r>
-          </a:p>
-        </p:txBody>
-      </p:sp>
-      <p:sp>
-        <p:nvSpPr>
-          <p:cNvPr id="18" name="Rounded Rectangle 17"/>
+              <a:t>ライセンス＋5億・商品＋5億・中国＋5億</a:t>
+            </a:r>
+          </a:p>
+        </p:txBody>
+      </p:sp>
+      <p:sp>
+        <p:nvSpPr>
+          <p:cNvPr id="14" name="Rounded Rectangle 13"/>
           <p:cNvSpPr/>
           <p:nvPr/>
         </p:nvSpPr>
         <p:spPr>
           <a:xfrm>
-            <a:off x="502920" y="4992624"/>
-            <a:ext cx="11183112" cy="1389888"/>
+            <a:off x="8092440" y="1920240"/>
+            <a:ext cx="3602736" cy="1517904"/>
           </a:xfrm>
           <a:prstGeom prst="roundRect">
             <a:avLst>
@@ -3845,14 +3671,178 @@
       </p:sp>
       <p:sp>
         <p:nvSpPr>
+          <p:cNvPr id="15" name="TextBox 14"/>
+          <p:cNvSpPr txBox="1"/>
+          <p:nvPr/>
+        </p:nvSpPr>
+        <p:spPr>
+          <a:xfrm>
+            <a:off x="8366760" y="2103120"/>
+            <a:ext cx="3108960" cy="274320"/>
+          </a:xfrm>
+          <a:prstGeom prst="rect">
+            <a:avLst/>
+          </a:prstGeom>
+          <a:noFill/>
+        </p:spPr>
+        <p:txBody>
+          <a:bodyPr wrap="square" lIns="0" rIns="0" tIns="0" bIns="0">
+            <a:spAutoFit/>
+          </a:bodyPr>
+          <a:lstStyle/>
+          <a:p>
+            <a:pPr algn="l">
+              <a:spcAft>
+                <a:spcPts val="400"/>
+              </a:spcAft>
+            </a:pPr>
+            <a:r>
+              <a:rPr sz="1100" b="1" i="0">
+                <a:solidFill>
+                  <a:srgbClr val="6B7280"/>
+                </a:solidFill>
+                <a:latin typeface="Yu Gothic"/>
+                <a:ea typeface="Yu Gothic"/>
+                <a:cs typeface="Yu Gothic"/>
+              </a:rPr>
+              <a:t>今期目標（対外）</a:t>
+            </a:r>
+          </a:p>
+        </p:txBody>
+      </p:sp>
+      <p:sp>
+        <p:nvSpPr>
+          <p:cNvPr id="16" name="TextBox 15"/>
+          <p:cNvSpPr txBox="1"/>
+          <p:nvPr/>
+        </p:nvSpPr>
+        <p:spPr>
+          <a:xfrm>
+            <a:off x="8366760" y="2395728"/>
+            <a:ext cx="3108960" cy="603504"/>
+          </a:xfrm>
+          <a:prstGeom prst="rect">
+            <a:avLst/>
+          </a:prstGeom>
+          <a:noFill/>
+        </p:spPr>
+        <p:txBody>
+          <a:bodyPr wrap="square" lIns="0" rIns="0" tIns="0" bIns="0">
+            <a:spAutoFit/>
+          </a:bodyPr>
+          <a:lstStyle/>
+          <a:p>
+            <a:pPr algn="l">
+              <a:spcAft>
+                <a:spcPts val="400"/>
+              </a:spcAft>
+            </a:pPr>
+            <a:r>
+              <a:rPr sz="3000" b="1" i="0">
+                <a:solidFill>
+                  <a:srgbClr val="1B1B26"/>
+                </a:solidFill>
+                <a:latin typeface="Yu Gothic"/>
+                <a:ea typeface="Yu Gothic"/>
+                <a:cs typeface="Yu Gothic"/>
+              </a:rPr>
+              <a:t>40億</a:t>
+            </a:r>
+          </a:p>
+        </p:txBody>
+      </p:sp>
+      <p:sp>
+        <p:nvSpPr>
+          <p:cNvPr id="17" name="TextBox 16"/>
+          <p:cNvSpPr txBox="1"/>
+          <p:nvPr/>
+        </p:nvSpPr>
+        <p:spPr>
+          <a:xfrm>
+            <a:off x="8366760" y="3035808"/>
+            <a:ext cx="3108960" cy="310896"/>
+          </a:xfrm>
+          <a:prstGeom prst="rect">
+            <a:avLst/>
+          </a:prstGeom>
+          <a:noFill/>
+        </p:spPr>
+        <p:txBody>
+          <a:bodyPr wrap="square" lIns="0" rIns="0" tIns="0" bIns="0">
+            <a:spAutoFit/>
+          </a:bodyPr>
+          <a:lstStyle/>
+          <a:p>
+            <a:pPr algn="l">
+              <a:spcAft>
+                <a:spcPts val="400"/>
+              </a:spcAft>
+            </a:pPr>
+            <a:r>
+              <a:rPr sz="950" b="0" i="0">
+                <a:solidFill>
+                  <a:srgbClr val="6B7280"/>
+                </a:solidFill>
+                <a:latin typeface="Yu Gothic"/>
+                <a:ea typeface="Yu Gothic"/>
+                <a:cs typeface="Yu Gothic"/>
+              </a:rPr>
+              <a:t>対外発表のミニマムライン</a:t>
+            </a:r>
+          </a:p>
+        </p:txBody>
+      </p:sp>
+      <p:sp>
+        <p:nvSpPr>
+          <p:cNvPr id="18" name="TextBox 17"/>
+          <p:cNvSpPr txBox="1"/>
+          <p:nvPr/>
+        </p:nvSpPr>
+        <p:spPr>
+          <a:xfrm>
+            <a:off x="502920" y="3712463"/>
+            <a:ext cx="8229600" cy="292608"/>
+          </a:xfrm>
+          <a:prstGeom prst="rect">
+            <a:avLst/>
+          </a:prstGeom>
+          <a:noFill/>
+        </p:spPr>
+        <p:txBody>
+          <a:bodyPr wrap="square" lIns="0" rIns="0" tIns="0" bIns="0">
+            <a:spAutoFit/>
+          </a:bodyPr>
+          <a:lstStyle/>
+          <a:p>
+            <a:pPr algn="l">
+              <a:spcAft>
+                <a:spcPts val="400"/>
+              </a:spcAft>
+            </a:pPr>
+            <a:r>
+              <a:rPr sz="1200" b="1" i="0">
+                <a:solidFill>
+                  <a:srgbClr val="1B1B26"/>
+                </a:solidFill>
+                <a:latin typeface="Yu Gothic"/>
+                <a:ea typeface="Yu Gothic"/>
+                <a:cs typeface="Yu Gothic"/>
+              </a:rPr>
+              <a:t>アップサイド＋15億の内訳（実行部隊への割付）</a:t>
+            </a:r>
+          </a:p>
+        </p:txBody>
+      </p:sp>
+      <p:sp>
+        <p:nvSpPr>
           <p:cNvPr id="19" name="Rounded Rectangle 18"/>
           <p:cNvSpPr/>
           <p:nvPr/>
         </p:nvSpPr>
         <p:spPr>
           <a:xfrm>
-            <a:off x="777240" y="5321808"/>
-            <a:ext cx="566928" cy="566928"/>
+            <a:off x="502920" y="4078224"/>
+            <a:ext cx="3602736" cy="932688"/>
           </a:xfrm>
           <a:prstGeom prst="roundRect">
             <a:avLst>
@@ -3860,7 +3850,7 @@
             </a:avLst>
           </a:prstGeom>
           <a:solidFill>
-            <a:srgbClr val="2563EB"/>
+            <a:srgbClr val="EAF1FE"/>
           </a:solidFill>
           <a:ln>
             <a:noFill/>
@@ -3897,8 +3887,8 @@
         </p:nvSpPr>
         <p:spPr>
           <a:xfrm>
-            <a:off x="777240" y="5394960"/>
-            <a:ext cx="566928" cy="457200"/>
+            <a:off x="777240" y="4224528"/>
+            <a:ext cx="3108960" cy="640080"/>
           </a:xfrm>
           <a:prstGeom prst="rect">
             <a:avLst/>
@@ -3911,35 +3901,370 @@
           </a:bodyPr>
           <a:lstStyle/>
           <a:p>
-            <a:pPr algn="ctr">
+            <a:pPr algn="l">
               <a:spcAft>
-                <a:spcPts val="400"/>
+                <a:spcPts val="200"/>
               </a:spcAft>
             </a:pPr>
             <a:r>
-              <a:rPr sz="2000" b="1" i="0">
-                <a:solidFill>
-                  <a:srgbClr val="FFFFFF"/>
+              <a:rPr sz="1600" b="1" i="0">
+                <a:solidFill>
+                  <a:srgbClr val="1E40AF"/>
                 </a:solidFill>
                 <a:latin typeface="Yu Gothic"/>
                 <a:ea typeface="Yu Gothic"/>
                 <a:cs typeface="Yu Gothic"/>
               </a:rPr>
-              <a:t>3</a:t>
-            </a:r>
-          </a:p>
-        </p:txBody>
-      </p:sp>
-      <p:sp>
-        <p:nvSpPr>
-          <p:cNvPr id="21" name="TextBox 20"/>
+              <a:t>ライセンス　＋5億</a:t>
+            </a:r>
+          </a:p>
+          <a:p>
+            <a:pPr algn="l">
+              <a:spcAft>
+                <a:spcPts val="0"/>
+              </a:spcAft>
+            </a:pPr>
+            <a:r>
+              <a:rPr sz="950" b="0" i="0">
+                <a:solidFill>
+                  <a:srgbClr val="6B7280"/>
+                </a:solidFill>
+                <a:latin typeface="Yu Gothic"/>
+                <a:ea typeface="Yu Gothic"/>
+                <a:cs typeface="Yu Gothic"/>
+              </a:rPr>
+              <a:t>実行部隊：営業事業本部</a:t>
+            </a:r>
+          </a:p>
+        </p:txBody>
+      </p:sp>
+      <p:sp>
+        <p:nvSpPr>
+          <p:cNvPr id="21" name="Rounded Rectangle 20"/>
+          <p:cNvSpPr/>
+          <p:nvPr/>
+        </p:nvSpPr>
+        <p:spPr>
+          <a:xfrm>
+            <a:off x="4297680" y="4078224"/>
+            <a:ext cx="3602736" cy="932688"/>
+          </a:xfrm>
+          <a:prstGeom prst="roundRect">
+            <a:avLst>
+              <a:gd name="adj" fmla="val 10000"/>
+            </a:avLst>
+          </a:prstGeom>
+          <a:solidFill>
+            <a:srgbClr val="EAF1FE"/>
+          </a:solidFill>
+          <a:ln>
+            <a:noFill/>
+          </a:ln>
+          <a:effectLst/>
+        </p:spPr>
+        <p:style>
+          <a:lnRef idx="1">
+            <a:schemeClr val="accent1"/>
+          </a:lnRef>
+          <a:fillRef idx="3">
+            <a:schemeClr val="accent1"/>
+          </a:fillRef>
+          <a:effectRef idx="2">
+            <a:schemeClr val="accent1"/>
+          </a:effectRef>
+          <a:fontRef idx="minor">
+            <a:schemeClr val="lt1"/>
+          </a:fontRef>
+        </p:style>
+        <p:txBody>
+          <a:bodyPr rtlCol="0" anchor="ctr"/>
+          <a:lstStyle/>
+          <a:p>
+            <a:pPr algn="ctr"/>
+          </a:p>
+        </p:txBody>
+      </p:sp>
+      <p:sp>
+        <p:nvSpPr>
+          <p:cNvPr id="22" name="TextBox 21"/>
           <p:cNvSpPr txBox="1"/>
           <p:nvPr/>
         </p:nvSpPr>
         <p:spPr>
           <a:xfrm>
-            <a:off x="1600200" y="5157216"/>
-            <a:ext cx="9875520" cy="365760"/>
+            <a:off x="4572000" y="4224528"/>
+            <a:ext cx="3108960" cy="640080"/>
+          </a:xfrm>
+          <a:prstGeom prst="rect">
+            <a:avLst/>
+          </a:prstGeom>
+          <a:noFill/>
+        </p:spPr>
+        <p:txBody>
+          <a:bodyPr wrap="square" lIns="0" rIns="0" tIns="0" bIns="0">
+            <a:spAutoFit/>
+          </a:bodyPr>
+          <a:lstStyle/>
+          <a:p>
+            <a:pPr algn="l">
+              <a:spcAft>
+                <a:spcPts val="200"/>
+              </a:spcAft>
+            </a:pPr>
+            <a:r>
+              <a:rPr sz="1600" b="1" i="0">
+                <a:solidFill>
+                  <a:srgbClr val="1E40AF"/>
+                </a:solidFill>
+                <a:latin typeface="Yu Gothic"/>
+                <a:ea typeface="Yu Gothic"/>
+                <a:cs typeface="Yu Gothic"/>
+              </a:rPr>
+              <a:t>商品　＋5億</a:t>
+            </a:r>
+          </a:p>
+          <a:p>
+            <a:pPr algn="l">
+              <a:spcAft>
+                <a:spcPts val="0"/>
+              </a:spcAft>
+            </a:pPr>
+            <a:r>
+              <a:rPr sz="950" b="0" i="0">
+                <a:solidFill>
+                  <a:srgbClr val="6B7280"/>
+                </a:solidFill>
+                <a:latin typeface="Yu Gothic"/>
+                <a:ea typeface="Yu Gothic"/>
+                <a:cs typeface="Yu Gothic"/>
+              </a:rPr>
+              <a:t>実行部隊：商品開発事業本部</a:t>
+            </a:r>
+          </a:p>
+        </p:txBody>
+      </p:sp>
+      <p:sp>
+        <p:nvSpPr>
+          <p:cNvPr id="23" name="Rounded Rectangle 22"/>
+          <p:cNvSpPr/>
+          <p:nvPr/>
+        </p:nvSpPr>
+        <p:spPr>
+          <a:xfrm>
+            <a:off x="8092440" y="4078224"/>
+            <a:ext cx="3602736" cy="932688"/>
+          </a:xfrm>
+          <a:prstGeom prst="roundRect">
+            <a:avLst>
+              <a:gd name="adj" fmla="val 10000"/>
+            </a:avLst>
+          </a:prstGeom>
+          <a:solidFill>
+            <a:srgbClr val="EAF1FE"/>
+          </a:solidFill>
+          <a:ln>
+            <a:noFill/>
+          </a:ln>
+          <a:effectLst/>
+        </p:spPr>
+        <p:style>
+          <a:lnRef idx="1">
+            <a:schemeClr val="accent1"/>
+          </a:lnRef>
+          <a:fillRef idx="3">
+            <a:schemeClr val="accent1"/>
+          </a:fillRef>
+          <a:effectRef idx="2">
+            <a:schemeClr val="accent1"/>
+          </a:effectRef>
+          <a:fontRef idx="minor">
+            <a:schemeClr val="lt1"/>
+          </a:fontRef>
+        </p:style>
+        <p:txBody>
+          <a:bodyPr rtlCol="0" anchor="ctr"/>
+          <a:lstStyle/>
+          <a:p>
+            <a:pPr algn="ctr"/>
+          </a:p>
+        </p:txBody>
+      </p:sp>
+      <p:sp>
+        <p:nvSpPr>
+          <p:cNvPr id="24" name="TextBox 23"/>
+          <p:cNvSpPr txBox="1"/>
+          <p:nvPr/>
+        </p:nvSpPr>
+        <p:spPr>
+          <a:xfrm>
+            <a:off x="8366760" y="4224528"/>
+            <a:ext cx="3108960" cy="640080"/>
+          </a:xfrm>
+          <a:prstGeom prst="rect">
+            <a:avLst/>
+          </a:prstGeom>
+          <a:noFill/>
+        </p:spPr>
+        <p:txBody>
+          <a:bodyPr wrap="square" lIns="0" rIns="0" tIns="0" bIns="0">
+            <a:spAutoFit/>
+          </a:bodyPr>
+          <a:lstStyle/>
+          <a:p>
+            <a:pPr algn="l">
+              <a:spcAft>
+                <a:spcPts val="200"/>
+              </a:spcAft>
+            </a:pPr>
+            <a:r>
+              <a:rPr sz="1600" b="1" i="0">
+                <a:solidFill>
+                  <a:srgbClr val="1E40AF"/>
+                </a:solidFill>
+                <a:latin typeface="Yu Gothic"/>
+                <a:ea typeface="Yu Gothic"/>
+                <a:cs typeface="Yu Gothic"/>
+              </a:rPr>
+              <a:t>中国　＋5億</a:t>
+            </a:r>
+          </a:p>
+          <a:p>
+            <a:pPr algn="l">
+              <a:spcAft>
+                <a:spcPts val="0"/>
+              </a:spcAft>
+            </a:pPr>
+            <a:r>
+              <a:rPr sz="950" b="0" i="0">
+                <a:solidFill>
+                  <a:srgbClr val="6B7280"/>
+                </a:solidFill>
+                <a:latin typeface="Yu Gothic"/>
+                <a:ea typeface="Yu Gothic"/>
+                <a:cs typeface="Yu Gothic"/>
+              </a:rPr>
+              <a:t>実行部隊：中国事業</a:t>
+            </a:r>
+          </a:p>
+        </p:txBody>
+      </p:sp>
+      <p:sp>
+        <p:nvSpPr>
+          <p:cNvPr id="25" name="Rounded Rectangle 24"/>
+          <p:cNvSpPr/>
+          <p:nvPr/>
+        </p:nvSpPr>
+        <p:spPr>
+          <a:xfrm>
+            <a:off x="502920" y="5358384"/>
+            <a:ext cx="11183112" cy="859536"/>
+          </a:xfrm>
+          <a:prstGeom prst="roundRect">
+            <a:avLst>
+              <a:gd name="adj" fmla="val 10000"/>
+            </a:avLst>
+          </a:prstGeom>
+          <a:solidFill>
+            <a:srgbClr val="F6F8FB"/>
+          </a:solidFill>
+          <a:ln w="9525">
+            <a:solidFill>
+              <a:srgbClr val="E5E7EB"/>
+            </a:solidFill>
+          </a:ln>
+          <a:effectLst/>
+        </p:spPr>
+        <p:style>
+          <a:lnRef idx="1">
+            <a:schemeClr val="accent1"/>
+          </a:lnRef>
+          <a:fillRef idx="3">
+            <a:schemeClr val="accent1"/>
+          </a:fillRef>
+          <a:effectRef idx="2">
+            <a:schemeClr val="accent1"/>
+          </a:effectRef>
+          <a:fontRef idx="minor">
+            <a:schemeClr val="lt1"/>
+          </a:fontRef>
+        </p:style>
+        <p:txBody>
+          <a:bodyPr rtlCol="0" anchor="ctr"/>
+          <a:lstStyle/>
+          <a:p>
+            <a:pPr algn="ctr"/>
+          </a:p>
+        </p:txBody>
+      </p:sp>
+      <p:sp>
+        <p:nvSpPr>
+          <p:cNvPr id="26" name="TextBox 25"/>
+          <p:cNvSpPr txBox="1"/>
+          <p:nvPr/>
+        </p:nvSpPr>
+        <p:spPr>
+          <a:xfrm>
+            <a:off x="777240" y="5486400"/>
+            <a:ext cx="10607040" cy="640080"/>
+          </a:xfrm>
+          <a:prstGeom prst="rect">
+            <a:avLst/>
+          </a:prstGeom>
+          <a:noFill/>
+        </p:spPr>
+        <p:txBody>
+          <a:bodyPr wrap="square" lIns="0" rIns="0" tIns="0" bIns="0">
+            <a:spAutoFit/>
+          </a:bodyPr>
+          <a:lstStyle/>
+          <a:p>
+            <a:pPr algn="l">
+              <a:spcAft>
+                <a:spcPts val="200"/>
+              </a:spcAft>
+            </a:pPr>
+            <a:r>
+              <a:rPr sz="1150" b="1" i="0">
+                <a:solidFill>
+                  <a:srgbClr val="1B1B26"/>
+                </a:solidFill>
+                <a:latin typeface="Yu Gothic"/>
+                <a:ea typeface="Yu Gothic"/>
+                <a:cs typeface="Yu Gothic"/>
+              </a:rPr>
+              <a:t>社内の目標ベースではアップサイド＋20億をミニマムとして運営します（各部の出来・不出来の凸凹を吸収するため）</a:t>
+            </a:r>
+          </a:p>
+          <a:p>
+            <a:pPr algn="l">
+              <a:spcAft>
+                <a:spcPts val="0"/>
+              </a:spcAft>
+            </a:pPr>
+            <a:r>
+              <a:rPr sz="1000" b="0" i="0">
+                <a:solidFill>
+                  <a:srgbClr val="6B7280"/>
+                </a:solidFill>
+                <a:latin typeface="Yu Gothic"/>
+                <a:ea typeface="Yu Gothic"/>
+                <a:cs typeface="Yu Gothic"/>
+              </a:rPr>
+              <a:t>事業本部別の落とし込み（配分案）と現状見込みの整理は8月中に確定します（担当：小沢）</a:t>
+            </a:r>
+          </a:p>
+        </p:txBody>
+      </p:sp>
+      <p:sp>
+        <p:nvSpPr>
+          <p:cNvPr id="27" name="TextBox 26"/>
+          <p:cNvSpPr txBox="1"/>
+          <p:nvPr/>
+        </p:nvSpPr>
+        <p:spPr>
+          <a:xfrm>
+            <a:off x="502920" y="6547104"/>
+            <a:ext cx="9144000" cy="256032"/>
           </a:xfrm>
           <a:prstGeom prst="rect">
             <a:avLst/>
@@ -3958,129 +4283,6 @@
               </a:spcAft>
             </a:pPr>
             <a:r>
-              <a:rPr sz="1500" b="1" i="0">
-                <a:solidFill>
-                  <a:srgbClr val="1B1B26"/>
-                </a:solidFill>
-                <a:latin typeface="Yu Gothic"/>
-                <a:ea typeface="Yu Gothic"/>
-                <a:cs typeface="Yu Gothic"/>
-              </a:rPr>
-              <a:t>成果目標＋5億円のスコープと、5億ブリッジの枠組み</a:t>
-            </a:r>
-          </a:p>
-        </p:txBody>
-      </p:sp>
-      <p:sp>
-        <p:nvSpPr>
-          <p:cNvPr id="22" name="TextBox 21"/>
-          <p:cNvSpPr txBox="1"/>
-          <p:nvPr/>
-        </p:nvSpPr>
-        <p:spPr>
-          <a:xfrm>
-            <a:off x="1600200" y="5522976"/>
-            <a:ext cx="9875520" cy="292608"/>
-          </a:xfrm>
-          <a:prstGeom prst="rect">
-            <a:avLst/>
-          </a:prstGeom>
-          <a:noFill/>
-        </p:spPr>
-        <p:txBody>
-          <a:bodyPr wrap="square" lIns="0" rIns="0" tIns="0" bIns="0">
-            <a:spAutoFit/>
-          </a:bodyPr>
-          <a:lstStyle/>
-          <a:p>
-            <a:pPr algn="l">
-              <a:spcAft>
-                <a:spcPts val="400"/>
-              </a:spcAft>
-            </a:pPr>
-            <a:r>
-              <a:rPr sz="1050" b="1" i="0">
-                <a:solidFill>
-                  <a:srgbClr val="2563EB"/>
-                </a:solidFill>
-                <a:latin typeface="Yu Gothic"/>
-                <a:ea typeface="Yu Gothic"/>
-                <a:cs typeface="Yu Gothic"/>
-              </a:rPr>
-              <a:t>STO（新谷）</a:t>
-            </a:r>
-          </a:p>
-        </p:txBody>
-      </p:sp>
-      <p:sp>
-        <p:nvSpPr>
-          <p:cNvPr id="23" name="TextBox 22"/>
-          <p:cNvSpPr txBox="1"/>
-          <p:nvPr/>
-        </p:nvSpPr>
-        <p:spPr>
-          <a:xfrm>
-            <a:off x="1600200" y="5833872"/>
-            <a:ext cx="9692640" cy="457200"/>
-          </a:xfrm>
-          <a:prstGeom prst="rect">
-            <a:avLst/>
-          </a:prstGeom>
-          <a:noFill/>
-        </p:spPr>
-        <p:txBody>
-          <a:bodyPr wrap="square" lIns="0" rIns="0" tIns="0" bIns="0">
-            <a:spAutoFit/>
-          </a:bodyPr>
-          <a:lstStyle/>
-          <a:p>
-            <a:pPr algn="l">
-              <a:spcAft>
-                <a:spcPts val="400"/>
-              </a:spcAft>
-            </a:pPr>
-            <a:r>
-              <a:rPr sz="1100" b="0" i="0">
-                <a:solidFill>
-                  <a:srgbClr val="1B1B26"/>
-                </a:solidFill>
-                <a:latin typeface="Yu Gothic"/>
-                <a:ea typeface="Yu Gothic"/>
-                <a:cs typeface="Yu Gothic"/>
-              </a:rPr>
-              <a:t>決めていただきたいこと：対象範囲（営業事業本部）の確認と、レバー別ブリッジで追う枠組み</a:t>
-            </a:r>
-          </a:p>
-        </p:txBody>
-      </p:sp>
-      <p:sp>
-        <p:nvSpPr>
-          <p:cNvPr id="24" name="TextBox 23"/>
-          <p:cNvSpPr txBox="1"/>
-          <p:nvPr/>
-        </p:nvSpPr>
-        <p:spPr>
-          <a:xfrm>
-            <a:off x="502920" y="6547104"/>
-            <a:ext cx="9144000" cy="256032"/>
-          </a:xfrm>
-          <a:prstGeom prst="rect">
-            <a:avLst/>
-          </a:prstGeom>
-          <a:noFill/>
-        </p:spPr>
-        <p:txBody>
-          <a:bodyPr wrap="square" lIns="0" rIns="0" tIns="0" bIns="0">
-            <a:spAutoFit/>
-          </a:bodyPr>
-          <a:lstStyle/>
-          <a:p>
-            <a:pPr algn="l">
-              <a:spcAft>
-                <a:spcPts val="400"/>
-              </a:spcAft>
-            </a:pPr>
-            <a:r>
               <a:rPr sz="750" b="0" i="0">
                 <a:solidFill>
                   <a:srgbClr val="6B7280"/>
@@ -4096,7 +4298,7 @@
       </p:sp>
       <p:sp>
         <p:nvSpPr>
-          <p:cNvPr id="25" name="TextBox 24"/>
+          <p:cNvPr id="28" name="TextBox 27"/>
           <p:cNvSpPr txBox="1"/>
           <p:nvPr/>
         </p:nvSpPr>
@@ -4250,7 +4452,7 @@
                 <a:ea typeface="Yu Gothic"/>
                 <a:cs typeface="Yu Gothic"/>
               </a:rPr>
-              <a:t>業績の報告 — 予算比と通期見込み</a:t>
+              <a:t>分科会からの報告 — 90日後のゴールと初回の要点</a:t>
             </a:r>
           </a:p>
         </p:txBody>
@@ -4335,7 +4537,7 @@
                 <a:ea typeface="Yu Gothic"/>
                 <a:cs typeface="Yu Gothic"/>
               </a:rPr>
-              <a:t>報告：永竹社長／数字は8/1時点に更新（作成：STO・検証：柳沼さん）</a:t>
+              <a:t>各リーダー10分。冒頭に「90日後に達成したい状態（定量）」→ 決議・報告・承認の順で報告します</a:t>
             </a:r>
           </a:p>
         </p:txBody>
@@ -4348,8 +4550,8 @@
         </p:nvSpPr>
         <p:spPr>
           <a:xfrm>
-            <a:off x="502920" y="1920240"/>
-            <a:ext cx="3602736" cy="1572768"/>
+            <a:off x="502920" y="1975104"/>
+            <a:ext cx="11183112" cy="1335024"/>
           </a:xfrm>
           <a:prstGeom prst="roundRect">
             <a:avLst>
@@ -4397,7 +4599,66 @@
         <p:spPr>
           <a:xfrm>
             <a:off x="777240" y="2121408"/>
-            <a:ext cx="3108960" cy="274320"/>
+            <a:ext cx="2926080" cy="566928"/>
+          </a:xfrm>
+          <a:prstGeom prst="rect">
+            <a:avLst/>
+          </a:prstGeom>
+          <a:noFill/>
+        </p:spPr>
+        <p:txBody>
+          <a:bodyPr wrap="square" lIns="0" rIns="0" tIns="0" bIns="0">
+            <a:spAutoFit/>
+          </a:bodyPr>
+          <a:lstStyle/>
+          <a:p>
+            <a:pPr algn="l">
+              <a:spcAft>
+                <a:spcPts val="0"/>
+              </a:spcAft>
+            </a:pPr>
+            <a:r>
+              <a:rPr sz="1300" b="1" i="0">
+                <a:solidFill>
+                  <a:srgbClr val="1B1B26"/>
+                </a:solidFill>
+                <a:latin typeface="Yu Gothic"/>
+                <a:ea typeface="Yu Gothic"/>
+                <a:cs typeface="Yu Gothic"/>
+              </a:rPr>
+              <a:t>ライセンス営業改革</a:t>
+            </a:r>
+          </a:p>
+          <a:p>
+            <a:pPr algn="l">
+              <a:spcAft>
+                <a:spcPts val="0"/>
+              </a:spcAft>
+            </a:pPr>
+            <a:r>
+              <a:rPr sz="1000" b="1" i="0">
+                <a:solidFill>
+                  <a:srgbClr val="2563EB"/>
+                </a:solidFill>
+                <a:latin typeface="Yu Gothic"/>
+                <a:ea typeface="Yu Gothic"/>
+                <a:cs typeface="Yu Gothic"/>
+              </a:rPr>
+              <a:t>リーダー：南谷さん</a:t>
+            </a:r>
+          </a:p>
+        </p:txBody>
+      </p:sp>
+      <p:sp>
+        <p:nvSpPr>
+          <p:cNvPr id="8" name="TextBox 7"/>
+          <p:cNvSpPr txBox="1"/>
+          <p:nvPr/>
+        </p:nvSpPr>
+        <p:spPr>
+          <a:xfrm>
+            <a:off x="3886200" y="2103120"/>
+            <a:ext cx="7589520" cy="329184"/>
           </a:xfrm>
           <a:prstGeom prst="rect">
             <a:avLst/>
@@ -4416,29 +4677,73 @@
               </a:spcAft>
             </a:pPr>
             <a:r>
-              <a:rPr sz="1100" b="1" i="0">
-                <a:solidFill>
-                  <a:srgbClr val="6B7280"/>
+              <a:rPr sz="1150" b="1" i="0">
+                <a:solidFill>
+                  <a:srgbClr val="1E40AF"/>
                 </a:solidFill>
                 <a:latin typeface="Yu Gothic"/>
                 <a:ea typeface="Yu Gothic"/>
                 <a:cs typeface="Yu Gothic"/>
               </a:rPr>
-              <a:t>66期 予算</a:t>
-            </a:r>
-          </a:p>
-        </p:txBody>
-      </p:sp>
-      <p:sp>
-        <p:nvSpPr>
-          <p:cNvPr id="8" name="TextBox 7"/>
+              <a:t>90日後のゴール（定量）：リーダーから冒頭に提示</a:t>
+            </a:r>
+          </a:p>
+        </p:txBody>
+      </p:sp>
+      <p:sp>
+        <p:nvSpPr>
+          <p:cNvPr id="9" name="Rectangle 8"/>
+          <p:cNvSpPr/>
+          <p:nvPr/>
+        </p:nvSpPr>
+        <p:spPr>
+          <a:xfrm>
+            <a:off x="3886200" y="2487168"/>
+            <a:ext cx="7543800" cy="9525"/>
+          </a:xfrm>
+          <a:prstGeom prst="rect">
+            <a:avLst/>
+          </a:prstGeom>
+          <a:solidFill>
+            <a:srgbClr val="E5E7EB"/>
+          </a:solidFill>
+          <a:ln>
+            <a:noFill/>
+          </a:ln>
+          <a:effectLst/>
+        </p:spPr>
+        <p:style>
+          <a:lnRef idx="1">
+            <a:schemeClr val="accent1"/>
+          </a:lnRef>
+          <a:fillRef idx="3">
+            <a:schemeClr val="accent1"/>
+          </a:fillRef>
+          <a:effectRef idx="2">
+            <a:schemeClr val="accent1"/>
+          </a:effectRef>
+          <a:fontRef idx="minor">
+            <a:schemeClr val="lt1"/>
+          </a:fontRef>
+        </p:style>
+        <p:txBody>
+          <a:bodyPr rtlCol="0" anchor="ctr"/>
+          <a:lstStyle/>
+          <a:p>
+            <a:pPr algn="ctr"/>
+          </a:p>
+        </p:txBody>
+      </p:sp>
+      <p:sp>
+        <p:nvSpPr>
+          <p:cNvPr id="10" name="TextBox 9"/>
           <p:cNvSpPr txBox="1"/>
           <p:nvPr/>
         </p:nvSpPr>
         <p:spPr>
           <a:xfrm>
-            <a:off x="777240" y="2432304"/>
-            <a:ext cx="3108960" cy="621792"/>
+            <a:off x="3886200" y="2578608"/>
+            <a:ext cx="7589520" cy="676656"/>
           </a:xfrm>
           <a:prstGeom prst="rect">
             <a:avLst/>
@@ -4457,7 +4762,7 @@
               </a:spcAft>
             </a:pPr>
             <a:r>
-              <a:rPr sz="3000" b="1" i="0">
+              <a:rPr sz="1000" b="0" i="0">
                 <a:solidFill>
                   <a:srgbClr val="1B1B26"/>
                 </a:solidFill>
@@ -4465,62 +4770,21 @@
                 <a:ea typeface="Yu Gothic"/>
                 <a:cs typeface="Yu Gothic"/>
               </a:rPr>
-              <a:t>40.2億</a:t>
-            </a:r>
-          </a:p>
-        </p:txBody>
-      </p:sp>
-      <p:sp>
-        <p:nvSpPr>
-          <p:cNvPr id="9" name="TextBox 8"/>
-          <p:cNvSpPr txBox="1"/>
-          <p:nvPr/>
-        </p:nvSpPr>
-        <p:spPr>
-          <a:xfrm>
-            <a:off x="777240" y="3090672"/>
-            <a:ext cx="3108960" cy="310896"/>
-          </a:xfrm>
-          <a:prstGeom prst="rect">
-            <a:avLst/>
-          </a:prstGeom>
-          <a:noFill/>
-        </p:spPr>
-        <p:txBody>
-          <a:bodyPr wrap="square" lIns="0" rIns="0" tIns="0" bIns="0">
-            <a:spAutoFit/>
-          </a:bodyPr>
-          <a:lstStyle/>
-          <a:p>
-            <a:pPr algn="l">
-              <a:spcAft>
-                <a:spcPts val="400"/>
-              </a:spcAft>
-            </a:pPr>
-            <a:r>
-              <a:rPr sz="950" b="0" i="0">
-                <a:solidFill>
-                  <a:srgbClr val="6B7280"/>
-                </a:solidFill>
-                <a:latin typeface="Yu Gothic"/>
-                <a:ea typeface="Yu Gothic"/>
-                <a:cs typeface="Yu Gothic"/>
-              </a:rPr>
-              <a:t>営業利益（営業事業本部）</a:t>
-            </a:r>
-          </a:p>
-        </p:txBody>
-      </p:sp>
-      <p:sp>
-        <p:nvSpPr>
-          <p:cNvPr id="10" name="Rounded Rectangle 9"/>
+              <a:t>評価対象を140社から全量700〜800社に拡大。顧客評価は5軸（成長性は維持）で統一し、採点→ランク確定→重点顧客台帳の運用を開始</a:t>
+            </a:r>
+          </a:p>
+        </p:txBody>
+      </p:sp>
+      <p:sp>
+        <p:nvSpPr>
+          <p:cNvPr id="11" name="Rounded Rectangle 10"/>
           <p:cNvSpPr/>
           <p:nvPr/>
         </p:nvSpPr>
         <p:spPr>
           <a:xfrm>
-            <a:off x="4297680" y="1920240"/>
-            <a:ext cx="3602736" cy="1572768"/>
+            <a:off x="502920" y="3456432"/>
+            <a:ext cx="11183112" cy="1335024"/>
           </a:xfrm>
           <a:prstGeom prst="roundRect">
             <a:avLst>
@@ -4561,14 +4825,73 @@
       </p:sp>
       <p:sp>
         <p:nvSpPr>
-          <p:cNvPr id="11" name="TextBox 10"/>
+          <p:cNvPr id="12" name="TextBox 11"/>
           <p:cNvSpPr txBox="1"/>
           <p:nvPr/>
         </p:nvSpPr>
         <p:spPr>
           <a:xfrm>
-            <a:off x="4572000" y="2121408"/>
-            <a:ext cx="3108960" cy="274320"/>
+            <a:off x="777240" y="3602736"/>
+            <a:ext cx="2926080" cy="566928"/>
+          </a:xfrm>
+          <a:prstGeom prst="rect">
+            <a:avLst/>
+          </a:prstGeom>
+          <a:noFill/>
+        </p:spPr>
+        <p:txBody>
+          <a:bodyPr wrap="square" lIns="0" rIns="0" tIns="0" bIns="0">
+            <a:spAutoFit/>
+          </a:bodyPr>
+          <a:lstStyle/>
+          <a:p>
+            <a:pPr algn="l">
+              <a:spcAft>
+                <a:spcPts val="0"/>
+              </a:spcAft>
+            </a:pPr>
+            <a:r>
+              <a:rPr sz="1300" b="1" i="0">
+                <a:solidFill>
+                  <a:srgbClr val="1B1B26"/>
+                </a:solidFill>
+                <a:latin typeface="Yu Gothic"/>
+                <a:ea typeface="Yu Gothic"/>
+                <a:cs typeface="Yu Gothic"/>
+              </a:rPr>
+              <a:t>接点づくり</a:t>
+            </a:r>
+          </a:p>
+          <a:p>
+            <a:pPr algn="l">
+              <a:spcAft>
+                <a:spcPts val="0"/>
+              </a:spcAft>
+            </a:pPr>
+            <a:r>
+              <a:rPr sz="1000" b="1" i="0">
+                <a:solidFill>
+                  <a:srgbClr val="2563EB"/>
+                </a:solidFill>
+                <a:latin typeface="Yu Gothic"/>
+                <a:ea typeface="Yu Gothic"/>
+                <a:cs typeface="Yu Gothic"/>
+              </a:rPr>
+              <a:t>リーダー：黒澤さん</a:t>
+            </a:r>
+          </a:p>
+        </p:txBody>
+      </p:sp>
+      <p:sp>
+        <p:nvSpPr>
+          <p:cNvPr id="13" name="TextBox 12"/>
+          <p:cNvSpPr txBox="1"/>
+          <p:nvPr/>
+        </p:nvSpPr>
+        <p:spPr>
+          <a:xfrm>
+            <a:off x="3886200" y="3584448"/>
+            <a:ext cx="7589520" cy="329184"/>
           </a:xfrm>
           <a:prstGeom prst="rect">
             <a:avLst/>
@@ -4587,29 +4910,73 @@
               </a:spcAft>
             </a:pPr>
             <a:r>
-              <a:rPr sz="1100" b="1" i="0">
-                <a:solidFill>
-                  <a:srgbClr val="6B7280"/>
+              <a:rPr sz="1150" b="1" i="0">
+                <a:solidFill>
+                  <a:srgbClr val="1E40AF"/>
                 </a:solidFill>
                 <a:latin typeface="Yu Gothic"/>
                 <a:ea typeface="Yu Gothic"/>
                 <a:cs typeface="Yu Gothic"/>
               </a:rPr>
-              <a:t>通期見込み（最新）</a:t>
-            </a:r>
-          </a:p>
-        </p:txBody>
-      </p:sp>
-      <p:sp>
-        <p:nvSpPr>
-          <p:cNvPr id="12" name="TextBox 11"/>
+              <a:t>90日後のゴール（定量）：リーダーから冒頭に提示</a:t>
+            </a:r>
+          </a:p>
+        </p:txBody>
+      </p:sp>
+      <p:sp>
+        <p:nvSpPr>
+          <p:cNvPr id="14" name="Rectangle 13"/>
+          <p:cNvSpPr/>
+          <p:nvPr/>
+        </p:nvSpPr>
+        <p:spPr>
+          <a:xfrm>
+            <a:off x="3886200" y="3968496"/>
+            <a:ext cx="7543800" cy="9525"/>
+          </a:xfrm>
+          <a:prstGeom prst="rect">
+            <a:avLst/>
+          </a:prstGeom>
+          <a:solidFill>
+            <a:srgbClr val="E5E7EB"/>
+          </a:solidFill>
+          <a:ln>
+            <a:noFill/>
+          </a:ln>
+          <a:effectLst/>
+        </p:spPr>
+        <p:style>
+          <a:lnRef idx="1">
+            <a:schemeClr val="accent1"/>
+          </a:lnRef>
+          <a:fillRef idx="3">
+            <a:schemeClr val="accent1"/>
+          </a:fillRef>
+          <a:effectRef idx="2">
+            <a:schemeClr val="accent1"/>
+          </a:effectRef>
+          <a:fontRef idx="minor">
+            <a:schemeClr val="lt1"/>
+          </a:fontRef>
+        </p:style>
+        <p:txBody>
+          <a:bodyPr rtlCol="0" anchor="ctr"/>
+          <a:lstStyle/>
+          <a:p>
+            <a:pPr algn="ctr"/>
+          </a:p>
+        </p:txBody>
+      </p:sp>
+      <p:sp>
+        <p:nvSpPr>
+          <p:cNvPr id="15" name="TextBox 14"/>
           <p:cNvSpPr txBox="1"/>
           <p:nvPr/>
         </p:nvSpPr>
         <p:spPr>
           <a:xfrm>
-            <a:off x="4572000" y="2432304"/>
-            <a:ext cx="3108960" cy="621792"/>
+            <a:off x="3886200" y="4059936"/>
+            <a:ext cx="7589520" cy="676656"/>
           </a:xfrm>
           <a:prstGeom prst="rect">
             <a:avLst/>
@@ -4628,70 +4995,29 @@
               </a:spcAft>
             </a:pPr>
             <a:r>
-              <a:rPr sz="3000" b="1" i="0">
-                <a:solidFill>
-                  <a:srgbClr val="2563EB"/>
+              <a:rPr sz="1000" b="0" i="0">
+                <a:solidFill>
+                  <a:srgbClr val="1B1B26"/>
                 </a:solidFill>
                 <a:latin typeface="Yu Gothic"/>
                 <a:ea typeface="Yu Gothic"/>
                 <a:cs typeface="Yu Gothic"/>
               </a:rPr>
-              <a:t>▲1.25億</a:t>
-            </a:r>
-          </a:p>
-        </p:txBody>
-      </p:sp>
-      <p:sp>
-        <p:nvSpPr>
-          <p:cNvPr id="13" name="TextBox 12"/>
-          <p:cNvSpPr txBox="1"/>
-          <p:nvPr/>
-        </p:nvSpPr>
-        <p:spPr>
-          <a:xfrm>
-            <a:off x="4572000" y="3090672"/>
-            <a:ext cx="3108960" cy="310896"/>
-          </a:xfrm>
-          <a:prstGeom prst="rect">
-            <a:avLst/>
-          </a:prstGeom>
-          <a:noFill/>
-        </p:spPr>
-        <p:txBody>
-          <a:bodyPr wrap="square" lIns="0" rIns="0" tIns="0" bIns="0">
-            <a:spAutoFit/>
-          </a:bodyPr>
-          <a:lstStyle/>
-          <a:p>
-            <a:pPr algn="l">
-              <a:spcAft>
-                <a:spcPts val="400"/>
-              </a:spcAft>
-            </a:pPr>
-            <a:r>
-              <a:rPr sz="950" b="0" i="0">
-                <a:solidFill>
-                  <a:srgbClr val="6B7280"/>
-                </a:solidFill>
-                <a:latin typeface="Yu Gothic"/>
-                <a:ea typeface="Yu Gothic"/>
-                <a:cs typeface="Yu Gothic"/>
-              </a:rPr>
-              <a:t>予算比。8/1時点に更新</a:t>
-            </a:r>
-          </a:p>
-        </p:txBody>
-      </p:sp>
-      <p:sp>
-        <p:nvSpPr>
-          <p:cNvPr id="14" name="Rounded Rectangle 13"/>
+              <a:t>KGIは「IDでつながり続けるファン数」の方向。営業利益からの逆算（何万IDでいくらの利益を生む装置か）で再設計中。ID取得の空白（ウルトラマート・ライブ・EXPO）の施策化へ</a:t>
+            </a:r>
+          </a:p>
+        </p:txBody>
+      </p:sp>
+      <p:sp>
+        <p:nvSpPr>
+          <p:cNvPr id="16" name="Rounded Rectangle 15"/>
           <p:cNvSpPr/>
           <p:nvPr/>
         </p:nvSpPr>
         <p:spPr>
           <a:xfrm>
-            <a:off x="8092440" y="1920240"/>
-            <a:ext cx="3602736" cy="1572768"/>
+            <a:off x="502920" y="4937760"/>
+            <a:ext cx="11183112" cy="1335024"/>
           </a:xfrm>
           <a:prstGeom prst="roundRect">
             <a:avLst>
@@ -4732,14 +5058,73 @@
       </p:sp>
       <p:sp>
         <p:nvSpPr>
-          <p:cNvPr id="15" name="TextBox 14"/>
+          <p:cNvPr id="17" name="TextBox 16"/>
           <p:cNvSpPr txBox="1"/>
           <p:nvPr/>
         </p:nvSpPr>
         <p:spPr>
           <a:xfrm>
-            <a:off x="8366760" y="2121408"/>
-            <a:ext cx="3108960" cy="274320"/>
+            <a:off x="777240" y="5084064"/>
+            <a:ext cx="2926080" cy="566928"/>
+          </a:xfrm>
+          <a:prstGeom prst="rect">
+            <a:avLst/>
+          </a:prstGeom>
+          <a:noFill/>
+        </p:spPr>
+        <p:txBody>
+          <a:bodyPr wrap="square" lIns="0" rIns="0" tIns="0" bIns="0">
+            <a:spAutoFit/>
+          </a:bodyPr>
+          <a:lstStyle/>
+          <a:p>
+            <a:pPr algn="l">
+              <a:spcAft>
+                <a:spcPts val="0"/>
+              </a:spcAft>
+            </a:pPr>
+            <a:r>
+              <a:rPr sz="1300" b="1" i="0">
+                <a:solidFill>
+                  <a:srgbClr val="1B1B26"/>
+                </a:solidFill>
+                <a:latin typeface="Yu Gothic"/>
+                <a:ea typeface="Yu Gothic"/>
+                <a:cs typeface="Yu Gothic"/>
+              </a:rPr>
+              <a:t>経営基盤強化</a:t>
+            </a:r>
+          </a:p>
+          <a:p>
+            <a:pPr algn="l">
+              <a:spcAft>
+                <a:spcPts val="0"/>
+              </a:spcAft>
+            </a:pPr>
+            <a:r>
+              <a:rPr sz="1000" b="1" i="0">
+                <a:solidFill>
+                  <a:srgbClr val="2563EB"/>
+                </a:solidFill>
+                <a:latin typeface="Yu Gothic"/>
+                <a:ea typeface="Yu Gothic"/>
+                <a:cs typeface="Yu Gothic"/>
+              </a:rPr>
+              <a:t>リーダー：高橋さん</a:t>
+            </a:r>
+          </a:p>
+        </p:txBody>
+      </p:sp>
+      <p:sp>
+        <p:nvSpPr>
+          <p:cNvPr id="18" name="TextBox 17"/>
+          <p:cNvSpPr txBox="1"/>
+          <p:nvPr/>
+        </p:nvSpPr>
+        <p:spPr>
+          <a:xfrm>
+            <a:off x="3886200" y="5065776"/>
+            <a:ext cx="7589520" cy="329184"/>
           </a:xfrm>
           <a:prstGeom prst="rect">
             <a:avLst/>
@@ -4758,29 +5143,73 @@
               </a:spcAft>
             </a:pPr>
             <a:r>
-              <a:rPr sz="1100" b="1" i="0">
-                <a:solidFill>
-                  <a:srgbClr val="6B7280"/>
+              <a:rPr sz="1150" b="1" i="0">
+                <a:solidFill>
+                  <a:srgbClr val="1E40AF"/>
                 </a:solidFill>
                 <a:latin typeface="Yu Gothic"/>
                 <a:ea typeface="Yu Gothic"/>
                 <a:cs typeface="Yu Gothic"/>
               </a:rPr>
-              <a:t>成果目標</a:t>
-            </a:r>
-          </a:p>
-        </p:txBody>
-      </p:sp>
-      <p:sp>
-        <p:nvSpPr>
-          <p:cNvPr id="16" name="TextBox 15"/>
+              <a:t>90日後のゴール（定量）：リーダーから冒頭に提示</a:t>
+            </a:r>
+          </a:p>
+        </p:txBody>
+      </p:sp>
+      <p:sp>
+        <p:nvSpPr>
+          <p:cNvPr id="19" name="Rectangle 18"/>
+          <p:cNvSpPr/>
+          <p:nvPr/>
+        </p:nvSpPr>
+        <p:spPr>
+          <a:xfrm>
+            <a:off x="3886200" y="5449824"/>
+            <a:ext cx="7543800" cy="9525"/>
+          </a:xfrm>
+          <a:prstGeom prst="rect">
+            <a:avLst/>
+          </a:prstGeom>
+          <a:solidFill>
+            <a:srgbClr val="E5E7EB"/>
+          </a:solidFill>
+          <a:ln>
+            <a:noFill/>
+          </a:ln>
+          <a:effectLst/>
+        </p:spPr>
+        <p:style>
+          <a:lnRef idx="1">
+            <a:schemeClr val="accent1"/>
+          </a:lnRef>
+          <a:fillRef idx="3">
+            <a:schemeClr val="accent1"/>
+          </a:fillRef>
+          <a:effectRef idx="2">
+            <a:schemeClr val="accent1"/>
+          </a:effectRef>
+          <a:fontRef idx="minor">
+            <a:schemeClr val="lt1"/>
+          </a:fontRef>
+        </p:style>
+        <p:txBody>
+          <a:bodyPr rtlCol="0" anchor="ctr"/>
+          <a:lstStyle/>
+          <a:p>
+            <a:pPr algn="ctr"/>
+          </a:p>
+        </p:txBody>
+      </p:sp>
+      <p:sp>
+        <p:nvSpPr>
+          <p:cNvPr id="20" name="TextBox 19"/>
           <p:cNvSpPr txBox="1"/>
           <p:nvPr/>
         </p:nvSpPr>
         <p:spPr>
           <a:xfrm>
-            <a:off x="8366760" y="2432304"/>
-            <a:ext cx="3108960" cy="621792"/>
+            <a:off x="3886200" y="5541264"/>
+            <a:ext cx="7589520" cy="676656"/>
           </a:xfrm>
           <a:prstGeom prst="rect">
             <a:avLst/>
@@ -4799,7 +5228,7 @@
               </a:spcAft>
             </a:pPr>
             <a:r>
-              <a:rPr sz="3000" b="1" i="0">
+              <a:rPr sz="1000" b="0" i="0">
                 <a:solidFill>
                   <a:srgbClr val="1B1B26"/>
                 </a:solidFill>
@@ -4807,21 +5236,21 @@
                 <a:ea typeface="Yu Gothic"/>
                 <a:cs typeface="Yu Gothic"/>
               </a:rPr>
-              <a:t>＋5億</a:t>
-            </a:r>
-          </a:p>
-        </p:txBody>
-      </p:sp>
-      <p:sp>
-        <p:nvSpPr>
-          <p:cNvPr id="17" name="TextBox 16"/>
+              <a:t>予実・見込み管理の方針、AI活用、会議統廃合・業務軽量化（工数の可視化を開始）、契約・監修体制の改革。担当と期日つきで進行中</a:t>
+            </a:r>
+          </a:p>
+        </p:txBody>
+      </p:sp>
+      <p:sp>
+        <p:nvSpPr>
+          <p:cNvPr id="21" name="TextBox 20"/>
           <p:cNvSpPr txBox="1"/>
           <p:nvPr/>
         </p:nvSpPr>
         <p:spPr>
           <a:xfrm>
-            <a:off x="8366760" y="3090672"/>
-            <a:ext cx="3108960" cy="310896"/>
+            <a:off x="502920" y="6345936"/>
+            <a:ext cx="10972800" cy="274320"/>
           </a:xfrm>
           <a:prstGeom prst="rect">
             <a:avLst/>
@@ -4848,21 +5277,21 @@
                 <a:ea typeface="Yu Gothic"/>
                 <a:cs typeface="Yu Gothic"/>
               </a:rPr>
-              <a:t>予算比（着地45.2億）。経営限りの取り扱い</a:t>
-            </a:r>
-          </a:p>
-        </p:txBody>
-      </p:sp>
-      <p:sp>
-        <p:nvSpPr>
-          <p:cNvPr id="18" name="TextBox 17"/>
+              <a:t>※ 月次で「今月やること」を数字で区切り、翌月この場で振り返ります（やりっぱなしにしない）</a:t>
+            </a:r>
+          </a:p>
+        </p:txBody>
+      </p:sp>
+      <p:sp>
+        <p:nvSpPr>
+          <p:cNvPr id="22" name="TextBox 21"/>
           <p:cNvSpPr txBox="1"/>
           <p:nvPr/>
         </p:nvSpPr>
         <p:spPr>
           <a:xfrm>
-            <a:off x="502920" y="3749039"/>
-            <a:ext cx="6400800" cy="292608"/>
+            <a:off x="502920" y="6547104"/>
+            <a:ext cx="9144000" cy="256032"/>
           </a:xfrm>
           <a:prstGeom prst="rect">
             <a:avLst/>
@@ -4881,656 +5310,6 @@
               </a:spcAft>
             </a:pPr>
             <a:r>
-              <a:rPr sz="1200" b="1" i="0">
-                <a:solidFill>
-                  <a:srgbClr val="1B1B26"/>
-                </a:solidFill>
-                <a:latin typeface="Yu Gothic"/>
-                <a:ea typeface="Yu Gothic"/>
-                <a:cs typeface="Yu Gothic"/>
-              </a:rPr>
-              <a:t>通期見込みの確度内訳（黒・青・赤）</a:t>
-            </a:r>
-          </a:p>
-        </p:txBody>
-      </p:sp>
-      <p:sp>
-        <p:nvSpPr>
-          <p:cNvPr id="19" name="TextBox 18"/>
-          <p:cNvSpPr txBox="1"/>
-          <p:nvPr/>
-        </p:nvSpPr>
-        <p:spPr>
-          <a:xfrm>
-            <a:off x="502920" y="4133087"/>
-            <a:ext cx="2011680" cy="274320"/>
-          </a:xfrm>
-          <a:prstGeom prst="rect">
-            <a:avLst/>
-          </a:prstGeom>
-          <a:noFill/>
-        </p:spPr>
-        <p:txBody>
-          <a:bodyPr wrap="square" lIns="0" rIns="0" tIns="0" bIns="0">
-            <a:spAutoFit/>
-          </a:bodyPr>
-          <a:lstStyle/>
-          <a:p>
-            <a:pPr algn="l">
-              <a:spcAft>
-                <a:spcPts val="400"/>
-              </a:spcAft>
-            </a:pPr>
-            <a:r>
-              <a:rPr sz="1050" b="1" i="0">
-                <a:solidFill>
-                  <a:srgbClr val="1B1B26"/>
-                </a:solidFill>
-                <a:latin typeface="Yu Gothic"/>
-                <a:ea typeface="Yu Gothic"/>
-                <a:cs typeface="Yu Gothic"/>
-              </a:rPr>
-              <a:t>黒（実績）</a:t>
-            </a:r>
-          </a:p>
-        </p:txBody>
-      </p:sp>
-      <p:sp>
-        <p:nvSpPr>
-          <p:cNvPr id="20" name="Rounded Rectangle 19"/>
-          <p:cNvSpPr/>
-          <p:nvPr/>
-        </p:nvSpPr>
-        <p:spPr>
-          <a:xfrm>
-            <a:off x="2606040" y="4151375"/>
-            <a:ext cx="5120640" cy="237744"/>
-          </a:xfrm>
-          <a:prstGeom prst="roundRect">
-            <a:avLst>
-              <a:gd name="adj" fmla="val 50000"/>
-            </a:avLst>
-          </a:prstGeom>
-          <a:solidFill>
-            <a:srgbClr val="F6F8FB"/>
-          </a:solidFill>
-          <a:ln>
-            <a:noFill/>
-          </a:ln>
-          <a:effectLst/>
-        </p:spPr>
-        <p:style>
-          <a:lnRef idx="1">
-            <a:schemeClr val="accent1"/>
-          </a:lnRef>
-          <a:fillRef idx="3">
-            <a:schemeClr val="accent1"/>
-          </a:fillRef>
-          <a:effectRef idx="2">
-            <a:schemeClr val="accent1"/>
-          </a:effectRef>
-          <a:fontRef idx="minor">
-            <a:schemeClr val="lt1"/>
-          </a:fontRef>
-        </p:style>
-        <p:txBody>
-          <a:bodyPr rtlCol="0" anchor="ctr"/>
-          <a:lstStyle/>
-          <a:p>
-            <a:pPr algn="ctr"/>
-          </a:p>
-        </p:txBody>
-      </p:sp>
-      <p:sp>
-        <p:nvSpPr>
-          <p:cNvPr id="21" name="Rounded Rectangle 20"/>
-          <p:cNvSpPr/>
-          <p:nvPr/>
-        </p:nvSpPr>
-        <p:spPr>
-          <a:xfrm>
-            <a:off x="2606040" y="4151375"/>
-            <a:ext cx="2560320" cy="237744"/>
-          </a:xfrm>
-          <a:prstGeom prst="roundRect">
-            <a:avLst>
-              <a:gd name="adj" fmla="val 50000"/>
-            </a:avLst>
-          </a:prstGeom>
-          <a:solidFill>
-            <a:srgbClr val="EAF1FE"/>
-          </a:solidFill>
-          <a:ln>
-            <a:noFill/>
-          </a:ln>
-          <a:effectLst/>
-        </p:spPr>
-        <p:style>
-          <a:lnRef idx="1">
-            <a:schemeClr val="accent1"/>
-          </a:lnRef>
-          <a:fillRef idx="3">
-            <a:schemeClr val="accent1"/>
-          </a:fillRef>
-          <a:effectRef idx="2">
-            <a:schemeClr val="accent1"/>
-          </a:effectRef>
-          <a:fontRef idx="minor">
-            <a:schemeClr val="lt1"/>
-          </a:fontRef>
-        </p:style>
-        <p:txBody>
-          <a:bodyPr rtlCol="0" anchor="ctr"/>
-          <a:lstStyle/>
-          <a:p>
-            <a:pPr algn="ctr"/>
-          </a:p>
-        </p:txBody>
-      </p:sp>
-      <p:sp>
-        <p:nvSpPr>
-          <p:cNvPr id="22" name="TextBox 21"/>
-          <p:cNvSpPr txBox="1"/>
-          <p:nvPr/>
-        </p:nvSpPr>
-        <p:spPr>
-          <a:xfrm>
-            <a:off x="7909560" y="4133087"/>
-            <a:ext cx="3749039" cy="292608"/>
-          </a:xfrm>
-          <a:prstGeom prst="rect">
-            <a:avLst/>
-          </a:prstGeom>
-          <a:noFill/>
-        </p:spPr>
-        <p:txBody>
-          <a:bodyPr wrap="square" lIns="0" rIns="0" tIns="0" bIns="0">
-            <a:spAutoFit/>
-          </a:bodyPr>
-          <a:lstStyle/>
-          <a:p>
-            <a:pPr algn="l">
-              <a:spcAft>
-                <a:spcPts val="400"/>
-              </a:spcAft>
-            </a:pPr>
-            <a:r>
-              <a:rPr sz="900" b="0" i="0">
-                <a:solidFill>
-                  <a:srgbClr val="6B7280"/>
-                </a:solidFill>
-                <a:latin typeface="Yu Gothic"/>
-                <a:ea typeface="Yu Gothic"/>
-                <a:cs typeface="Yu Gothic"/>
-              </a:rPr>
-              <a:t>【8/1更新】　確定済みの実績</a:t>
-            </a:r>
-          </a:p>
-        </p:txBody>
-      </p:sp>
-      <p:sp>
-        <p:nvSpPr>
-          <p:cNvPr id="23" name="TextBox 22"/>
-          <p:cNvSpPr txBox="1"/>
-          <p:nvPr/>
-        </p:nvSpPr>
-        <p:spPr>
-          <a:xfrm>
-            <a:off x="502920" y="4553712"/>
-            <a:ext cx="2011680" cy="274320"/>
-          </a:xfrm>
-          <a:prstGeom prst="rect">
-            <a:avLst/>
-          </a:prstGeom>
-          <a:noFill/>
-        </p:spPr>
-        <p:txBody>
-          <a:bodyPr wrap="square" lIns="0" rIns="0" tIns="0" bIns="0">
-            <a:spAutoFit/>
-          </a:bodyPr>
-          <a:lstStyle/>
-          <a:p>
-            <a:pPr algn="l">
-              <a:spcAft>
-                <a:spcPts val="400"/>
-              </a:spcAft>
-            </a:pPr>
-            <a:r>
-              <a:rPr sz="1050" b="1" i="0">
-                <a:solidFill>
-                  <a:srgbClr val="1B1B26"/>
-                </a:solidFill>
-                <a:latin typeface="Yu Gothic"/>
-                <a:ea typeface="Yu Gothic"/>
-                <a:cs typeface="Yu Gothic"/>
-              </a:rPr>
-              <a:t>青（仮申請受領）</a:t>
-            </a:r>
-          </a:p>
-        </p:txBody>
-      </p:sp>
-      <p:sp>
-        <p:nvSpPr>
-          <p:cNvPr id="24" name="Rounded Rectangle 23"/>
-          <p:cNvSpPr/>
-          <p:nvPr/>
-        </p:nvSpPr>
-        <p:spPr>
-          <a:xfrm>
-            <a:off x="2606040" y="4571999"/>
-            <a:ext cx="5120640" cy="237744"/>
-          </a:xfrm>
-          <a:prstGeom prst="roundRect">
-            <a:avLst>
-              <a:gd name="adj" fmla="val 50000"/>
-            </a:avLst>
-          </a:prstGeom>
-          <a:solidFill>
-            <a:srgbClr val="F6F8FB"/>
-          </a:solidFill>
-          <a:ln>
-            <a:noFill/>
-          </a:ln>
-          <a:effectLst/>
-        </p:spPr>
-        <p:style>
-          <a:lnRef idx="1">
-            <a:schemeClr val="accent1"/>
-          </a:lnRef>
-          <a:fillRef idx="3">
-            <a:schemeClr val="accent1"/>
-          </a:fillRef>
-          <a:effectRef idx="2">
-            <a:schemeClr val="accent1"/>
-          </a:effectRef>
-          <a:fontRef idx="minor">
-            <a:schemeClr val="lt1"/>
-          </a:fontRef>
-        </p:style>
-        <p:txBody>
-          <a:bodyPr rtlCol="0" anchor="ctr"/>
-          <a:lstStyle/>
-          <a:p>
-            <a:pPr algn="ctr"/>
-          </a:p>
-        </p:txBody>
-      </p:sp>
-      <p:sp>
-        <p:nvSpPr>
-          <p:cNvPr id="25" name="Rounded Rectangle 24"/>
-          <p:cNvSpPr/>
-          <p:nvPr/>
-        </p:nvSpPr>
-        <p:spPr>
-          <a:xfrm>
-            <a:off x="2606040" y="4571999"/>
-            <a:ext cx="1228953" cy="237744"/>
-          </a:xfrm>
-          <a:prstGeom prst="roundRect">
-            <a:avLst>
-              <a:gd name="adj" fmla="val 50000"/>
-            </a:avLst>
-          </a:prstGeom>
-          <a:solidFill>
-            <a:srgbClr val="EAF1FE"/>
-          </a:solidFill>
-          <a:ln>
-            <a:noFill/>
-          </a:ln>
-          <a:effectLst/>
-        </p:spPr>
-        <p:style>
-          <a:lnRef idx="1">
-            <a:schemeClr val="accent1"/>
-          </a:lnRef>
-          <a:fillRef idx="3">
-            <a:schemeClr val="accent1"/>
-          </a:fillRef>
-          <a:effectRef idx="2">
-            <a:schemeClr val="accent1"/>
-          </a:effectRef>
-          <a:fontRef idx="minor">
-            <a:schemeClr val="lt1"/>
-          </a:fontRef>
-        </p:style>
-        <p:txBody>
-          <a:bodyPr rtlCol="0" anchor="ctr"/>
-          <a:lstStyle/>
-          <a:p>
-            <a:pPr algn="ctr"/>
-          </a:p>
-        </p:txBody>
-      </p:sp>
-      <p:sp>
-        <p:nvSpPr>
-          <p:cNvPr id="26" name="TextBox 25"/>
-          <p:cNvSpPr txBox="1"/>
-          <p:nvPr/>
-        </p:nvSpPr>
-        <p:spPr>
-          <a:xfrm>
-            <a:off x="7909560" y="4553712"/>
-            <a:ext cx="3749039" cy="292608"/>
-          </a:xfrm>
-          <a:prstGeom prst="rect">
-            <a:avLst/>
-          </a:prstGeom>
-          <a:noFill/>
-        </p:spPr>
-        <p:txBody>
-          <a:bodyPr wrap="square" lIns="0" rIns="0" tIns="0" bIns="0">
-            <a:spAutoFit/>
-          </a:bodyPr>
-          <a:lstStyle/>
-          <a:p>
-            <a:pPr algn="l">
-              <a:spcAft>
-                <a:spcPts val="400"/>
-              </a:spcAft>
-            </a:pPr>
-            <a:r>
-              <a:rPr sz="900" b="0" i="0">
-                <a:solidFill>
-                  <a:srgbClr val="6B7280"/>
-                </a:solidFill>
-                <a:latin typeface="Yu Gothic"/>
-                <a:ea typeface="Yu Gothic"/>
-                <a:cs typeface="Yu Gothic"/>
-              </a:rPr>
-              <a:t>【8/1更新】　仮申請を受領済み・実現確度高</a:t>
-            </a:r>
-          </a:p>
-        </p:txBody>
-      </p:sp>
-      <p:sp>
-        <p:nvSpPr>
-          <p:cNvPr id="27" name="TextBox 26"/>
-          <p:cNvSpPr txBox="1"/>
-          <p:nvPr/>
-        </p:nvSpPr>
-        <p:spPr>
-          <a:xfrm>
-            <a:off x="502920" y="4974336"/>
-            <a:ext cx="2011680" cy="274320"/>
-          </a:xfrm>
-          <a:prstGeom prst="rect">
-            <a:avLst/>
-          </a:prstGeom>
-          <a:noFill/>
-        </p:spPr>
-        <p:txBody>
-          <a:bodyPr wrap="square" lIns="0" rIns="0" tIns="0" bIns="0">
-            <a:spAutoFit/>
-          </a:bodyPr>
-          <a:lstStyle/>
-          <a:p>
-            <a:pPr algn="l">
-              <a:spcAft>
-                <a:spcPts val="400"/>
-              </a:spcAft>
-            </a:pPr>
-            <a:r>
-              <a:rPr sz="1050" b="1" i="0">
-                <a:solidFill>
-                  <a:srgbClr val="1B1B26"/>
-                </a:solidFill>
-                <a:latin typeface="Yu Gothic"/>
-                <a:ea typeface="Yu Gothic"/>
-                <a:cs typeface="Yu Gothic"/>
-              </a:rPr>
-              <a:t>赤（営業中）</a:t>
-            </a:r>
-          </a:p>
-        </p:txBody>
-      </p:sp>
-      <p:sp>
-        <p:nvSpPr>
-          <p:cNvPr id="28" name="Rounded Rectangle 27"/>
-          <p:cNvSpPr/>
-          <p:nvPr/>
-        </p:nvSpPr>
-        <p:spPr>
-          <a:xfrm>
-            <a:off x="2606040" y="4992623"/>
-            <a:ext cx="5120640" cy="237744"/>
-          </a:xfrm>
-          <a:prstGeom prst="roundRect">
-            <a:avLst>
-              <a:gd name="adj" fmla="val 50000"/>
-            </a:avLst>
-          </a:prstGeom>
-          <a:solidFill>
-            <a:srgbClr val="F6F8FB"/>
-          </a:solidFill>
-          <a:ln>
-            <a:noFill/>
-          </a:ln>
-          <a:effectLst/>
-        </p:spPr>
-        <p:style>
-          <a:lnRef idx="1">
-            <a:schemeClr val="accent1"/>
-          </a:lnRef>
-          <a:fillRef idx="3">
-            <a:schemeClr val="accent1"/>
-          </a:fillRef>
-          <a:effectRef idx="2">
-            <a:schemeClr val="accent1"/>
-          </a:effectRef>
-          <a:fontRef idx="minor">
-            <a:schemeClr val="lt1"/>
-          </a:fontRef>
-        </p:style>
-        <p:txBody>
-          <a:bodyPr rtlCol="0" anchor="ctr"/>
-          <a:lstStyle/>
-          <a:p>
-            <a:pPr algn="ctr"/>
-          </a:p>
-        </p:txBody>
-      </p:sp>
-      <p:sp>
-        <p:nvSpPr>
-          <p:cNvPr id="29" name="Rounded Rectangle 28"/>
-          <p:cNvSpPr/>
-          <p:nvPr/>
-        </p:nvSpPr>
-        <p:spPr>
-          <a:xfrm>
-            <a:off x="2606040" y="4992623"/>
-            <a:ext cx="1331366" cy="237744"/>
-          </a:xfrm>
-          <a:prstGeom prst="roundRect">
-            <a:avLst>
-              <a:gd name="adj" fmla="val 50000"/>
-            </a:avLst>
-          </a:prstGeom>
-          <a:solidFill>
-            <a:srgbClr val="2563EB"/>
-          </a:solidFill>
-          <a:ln>
-            <a:noFill/>
-          </a:ln>
-          <a:effectLst/>
-        </p:spPr>
-        <p:style>
-          <a:lnRef idx="1">
-            <a:schemeClr val="accent1"/>
-          </a:lnRef>
-          <a:fillRef idx="3">
-            <a:schemeClr val="accent1"/>
-          </a:fillRef>
-          <a:effectRef idx="2">
-            <a:schemeClr val="accent1"/>
-          </a:effectRef>
-          <a:fontRef idx="minor">
-            <a:schemeClr val="lt1"/>
-          </a:fontRef>
-        </p:style>
-        <p:txBody>
-          <a:bodyPr rtlCol="0" anchor="ctr"/>
-          <a:lstStyle/>
-          <a:p>
-            <a:pPr algn="ctr"/>
-          </a:p>
-        </p:txBody>
-      </p:sp>
-      <p:sp>
-        <p:nvSpPr>
-          <p:cNvPr id="30" name="TextBox 29"/>
-          <p:cNvSpPr txBox="1"/>
-          <p:nvPr/>
-        </p:nvSpPr>
-        <p:spPr>
-          <a:xfrm>
-            <a:off x="7909560" y="4974336"/>
-            <a:ext cx="3749039" cy="292608"/>
-          </a:xfrm>
-          <a:prstGeom prst="rect">
-            <a:avLst/>
-          </a:prstGeom>
-          <a:noFill/>
-        </p:spPr>
-        <p:txBody>
-          <a:bodyPr wrap="square" lIns="0" rIns="0" tIns="0" bIns="0">
-            <a:spAutoFit/>
-          </a:bodyPr>
-          <a:lstStyle/>
-          <a:p>
-            <a:pPr algn="l">
-              <a:spcAft>
-                <a:spcPts val="400"/>
-              </a:spcAft>
-            </a:pPr>
-            <a:r>
-              <a:rPr sz="900" b="0" i="0">
-                <a:solidFill>
-                  <a:srgbClr val="6B7280"/>
-                </a:solidFill>
-                <a:latin typeface="Yu Gothic"/>
-                <a:ea typeface="Yu Gothic"/>
-                <a:cs typeface="Yu Gothic"/>
-              </a:rPr>
-              <a:t>26%・18.6億　転換率がレバー⑥。読み管理の定義とパイプライン統制で取り切る</a:t>
-            </a:r>
-          </a:p>
-        </p:txBody>
-      </p:sp>
-      <p:sp>
-        <p:nvSpPr>
-          <p:cNvPr id="31" name="Rounded Rectangle 30"/>
-          <p:cNvSpPr/>
-          <p:nvPr/>
-        </p:nvSpPr>
-        <p:spPr>
-          <a:xfrm>
-            <a:off x="502920" y="5532120"/>
-            <a:ext cx="11183112" cy="713232"/>
-          </a:xfrm>
-          <a:prstGeom prst="roundRect">
-            <a:avLst>
-              <a:gd name="adj" fmla="val 10000"/>
-            </a:avLst>
-          </a:prstGeom>
-          <a:solidFill>
-            <a:srgbClr val="EAF1FE"/>
-          </a:solidFill>
-          <a:ln>
-            <a:noFill/>
-          </a:ln>
-          <a:effectLst/>
-        </p:spPr>
-        <p:style>
-          <a:lnRef idx="1">
-            <a:schemeClr val="accent1"/>
-          </a:lnRef>
-          <a:fillRef idx="3">
-            <a:schemeClr val="accent1"/>
-          </a:fillRef>
-          <a:effectRef idx="2">
-            <a:schemeClr val="accent1"/>
-          </a:effectRef>
-          <a:fontRef idx="minor">
-            <a:schemeClr val="lt1"/>
-          </a:fontRef>
-        </p:style>
-        <p:txBody>
-          <a:bodyPr rtlCol="0" anchor="ctr"/>
-          <a:lstStyle/>
-          <a:p>
-            <a:pPr algn="ctr"/>
-          </a:p>
-        </p:txBody>
-      </p:sp>
-      <p:sp>
-        <p:nvSpPr>
-          <p:cNvPr id="32" name="TextBox 31"/>
-          <p:cNvSpPr txBox="1"/>
-          <p:nvPr/>
-        </p:nvSpPr>
-        <p:spPr>
-          <a:xfrm>
-            <a:off x="777240" y="5669280"/>
-            <a:ext cx="10789920" cy="457200"/>
-          </a:xfrm>
-          <a:prstGeom prst="rect">
-            <a:avLst/>
-          </a:prstGeom>
-          <a:noFill/>
-        </p:spPr>
-        <p:txBody>
-          <a:bodyPr wrap="square" lIns="0" rIns="0" tIns="0" bIns="0">
-            <a:spAutoFit/>
-          </a:bodyPr>
-          <a:lstStyle/>
-          <a:p>
-            <a:pPr algn="l">
-              <a:spcAft>
-                <a:spcPts val="400"/>
-              </a:spcAft>
-            </a:pPr>
-            <a:r>
-              <a:rPr sz="1100" b="1" i="0">
-                <a:solidFill>
-                  <a:srgbClr val="1E40AF"/>
-                </a:solidFill>
-                <a:latin typeface="Yu Gothic"/>
-                <a:ea typeface="Yu Gothic"/>
-                <a:cs typeface="Yu Gothic"/>
-              </a:rPr>
-              <a:t>中計対比：コンテンツ＆デジタル事業 営業利益計画 FY2026 30億 → FY2027 37億 → FY2028 50億。本プロジェクトの＋5億（予算比）は初年度計画の達成を下支えする位置づけ</a:t>
-            </a:r>
-          </a:p>
-        </p:txBody>
-      </p:sp>
-      <p:sp>
-        <p:nvSpPr>
-          <p:cNvPr id="33" name="TextBox 32"/>
-          <p:cNvSpPr txBox="1"/>
-          <p:nvPr/>
-        </p:nvSpPr>
-        <p:spPr>
-          <a:xfrm>
-            <a:off x="502920" y="6547104"/>
-            <a:ext cx="9144000" cy="256032"/>
-          </a:xfrm>
-          <a:prstGeom prst="rect">
-            <a:avLst/>
-          </a:prstGeom>
-          <a:noFill/>
-        </p:spPr>
-        <p:txBody>
-          <a:bodyPr wrap="square" lIns="0" rIns="0" tIns="0" bIns="0">
-            <a:spAutoFit/>
-          </a:bodyPr>
-          <a:lstStyle/>
-          <a:p>
-            <a:pPr algn="l">
-              <a:spcAft>
-                <a:spcPts val="400"/>
-              </a:spcAft>
-            </a:pPr>
-            <a:r>
               <a:rPr sz="750" b="0" i="0">
                 <a:solidFill>
                   <a:srgbClr val="6B7280"/>
@@ -5546,7 +5325,7 @@
       </p:sp>
       <p:sp>
         <p:nvSpPr>
-          <p:cNvPr id="34" name="TextBox 33"/>
+          <p:cNvPr id="23" name="TextBox 22"/>
           <p:cNvSpPr txBox="1"/>
           <p:nvPr/>
         </p:nvSpPr>
@@ -5700,7 +5479,7 @@
                 <a:ea typeface="Yu Gothic"/>
                 <a:cs typeface="Yu Gothic"/>
               </a:rPr>
-              <a:t>5億ブリッジ（第0版）— ギャップ6.25億をどのレバーで埋めるか</a:t>
+              <a:t>承認事項（3件）</a:t>
             </a:r>
           </a:p>
         </p:txBody>
@@ -5785,1311 +5564,21 @@
                 <a:ea typeface="Yu Gothic"/>
                 <a:cs typeface="Yu Gothic"/>
               </a:rPr>
-              <a:t>Day30に第1版へ更新：レバー別の責任者と目標額を確定します（担当：小沢さん）</a:t>
-            </a:r>
-          </a:p>
-        </p:txBody>
-      </p:sp>
-      <p:sp>
-        <p:nvSpPr>
-          <p:cNvPr id="6" name="TextBox 5"/>
-          <p:cNvSpPr txBox="1"/>
+              <a:t>ご承認いただきたいのはこの3件です。決定は24時間以内に決定ログへ記録し、全関係者へ展開します</a:t>
+            </a:r>
+          </a:p>
+        </p:txBody>
+      </p:sp>
+      <p:sp>
+        <p:nvSpPr>
+          <p:cNvPr id="6" name="Rounded Rectangle 5"/>
+          <p:cNvSpPr/>
           <p:nvPr/>
         </p:nvSpPr>
         <p:spPr>
           <a:xfrm>
             <a:off x="502920" y="1920240"/>
-            <a:ext cx="3017520" cy="292608"/>
-          </a:xfrm>
-          <a:prstGeom prst="rect">
-            <a:avLst/>
-          </a:prstGeom>
-          <a:noFill/>
-        </p:spPr>
-        <p:txBody>
-          <a:bodyPr wrap="square" lIns="0" rIns="0" tIns="0" bIns="0">
-            <a:spAutoFit/>
-          </a:bodyPr>
-          <a:lstStyle/>
-          <a:p>
-            <a:pPr algn="l">
-              <a:spcAft>
-                <a:spcPts val="400"/>
-              </a:spcAft>
-            </a:pPr>
-            <a:r>
-              <a:rPr sz="1050" b="1" i="0">
-                <a:solidFill>
-                  <a:srgbClr val="1B1B26"/>
-                </a:solidFill>
-                <a:latin typeface="Yu Gothic"/>
-                <a:ea typeface="Yu Gothic"/>
-                <a:cs typeface="Yu Gothic"/>
-              </a:rPr>
-              <a:t>① 低粗利×高工数の見直し</a:t>
-            </a:r>
-          </a:p>
-        </p:txBody>
-      </p:sp>
-      <p:sp>
-        <p:nvSpPr>
-          <p:cNvPr id="7" name="Rounded Rectangle 6"/>
-          <p:cNvSpPr/>
-          <p:nvPr/>
-        </p:nvSpPr>
-        <p:spPr>
-          <a:xfrm>
-            <a:off x="3657600" y="1938528"/>
-            <a:ext cx="4023360" cy="237744"/>
-          </a:xfrm>
-          <a:prstGeom prst="roundRect">
-            <a:avLst>
-              <a:gd name="adj" fmla="val 50000"/>
-            </a:avLst>
-          </a:prstGeom>
-          <a:solidFill>
-            <a:srgbClr val="EAF1FE"/>
-          </a:solidFill>
-          <a:ln>
-            <a:noFill/>
-          </a:ln>
-          <a:effectLst/>
-        </p:spPr>
-        <p:style>
-          <a:lnRef idx="1">
-            <a:schemeClr val="accent1"/>
-          </a:lnRef>
-          <a:fillRef idx="3">
-            <a:schemeClr val="accent1"/>
-          </a:fillRef>
-          <a:effectRef idx="2">
-            <a:schemeClr val="accent1"/>
-          </a:effectRef>
-          <a:fontRef idx="minor">
-            <a:schemeClr val="lt1"/>
-          </a:fontRef>
-        </p:style>
-        <p:txBody>
-          <a:bodyPr rtlCol="0" anchor="ctr"/>
-          <a:lstStyle/>
-          <a:p>
-            <a:pPr algn="ctr"/>
-          </a:p>
-        </p:txBody>
-      </p:sp>
-      <p:sp>
-        <p:nvSpPr>
-          <p:cNvPr id="8" name="Rounded Rectangle 7"/>
-          <p:cNvSpPr/>
-          <p:nvPr/>
-        </p:nvSpPr>
-        <p:spPr>
-          <a:xfrm>
-            <a:off x="3657600" y="1938528"/>
-            <a:ext cx="2682240" cy="237744"/>
-          </a:xfrm>
-          <a:prstGeom prst="roundRect">
-            <a:avLst>
-              <a:gd name="adj" fmla="val 50000"/>
-            </a:avLst>
-          </a:prstGeom>
-          <a:solidFill>
-            <a:srgbClr val="2563EB"/>
-          </a:solidFill>
-          <a:ln>
-            <a:noFill/>
-          </a:ln>
-          <a:effectLst/>
-        </p:spPr>
-        <p:style>
-          <a:lnRef idx="1">
-            <a:schemeClr val="accent1"/>
-          </a:lnRef>
-          <a:fillRef idx="3">
-            <a:schemeClr val="accent1"/>
-          </a:fillRef>
-          <a:effectRef idx="2">
-            <a:schemeClr val="accent1"/>
-          </a:effectRef>
-          <a:fontRef idx="minor">
-            <a:schemeClr val="lt1"/>
-          </a:fontRef>
-        </p:style>
-        <p:txBody>
-          <a:bodyPr rtlCol="0" anchor="ctr"/>
-          <a:lstStyle/>
-          <a:p>
-            <a:pPr algn="ctr"/>
-          </a:p>
-        </p:txBody>
-      </p:sp>
-      <p:sp>
-        <p:nvSpPr>
-          <p:cNvPr id="9" name="TextBox 8"/>
-          <p:cNvSpPr txBox="1"/>
-          <p:nvPr/>
-        </p:nvSpPr>
-        <p:spPr>
-          <a:xfrm>
-            <a:off x="7790688" y="1920240"/>
-            <a:ext cx="1280160" cy="274320"/>
-          </a:xfrm>
-          <a:prstGeom prst="rect">
-            <a:avLst/>
-          </a:prstGeom>
-          <a:noFill/>
-        </p:spPr>
-        <p:txBody>
-          <a:bodyPr wrap="square" lIns="0" rIns="0" tIns="0" bIns="0">
-            <a:spAutoFit/>
-          </a:bodyPr>
-          <a:lstStyle/>
-          <a:p>
-            <a:pPr algn="l">
-              <a:spcAft>
-                <a:spcPts val="400"/>
-              </a:spcAft>
-            </a:pPr>
-            <a:r>
-              <a:rPr sz="1000" b="1" i="0">
-                <a:solidFill>
-                  <a:srgbClr val="1B1B26"/>
-                </a:solidFill>
-                <a:latin typeface="Yu Gothic"/>
-                <a:ea typeface="Yu Gothic"/>
-                <a:cs typeface="Yu Gothic"/>
-              </a:rPr>
-              <a:t>1.0〜1.5億</a:t>
-            </a:r>
-          </a:p>
-        </p:txBody>
-      </p:sp>
-      <p:sp>
-        <p:nvSpPr>
-          <p:cNvPr id="10" name="TextBox 9"/>
-          <p:cNvSpPr txBox="1"/>
-          <p:nvPr/>
-        </p:nvSpPr>
-        <p:spPr>
-          <a:xfrm>
-            <a:off x="9052560" y="1920240"/>
-            <a:ext cx="2743200" cy="310896"/>
-          </a:xfrm>
-          <a:prstGeom prst="rect">
-            <a:avLst/>
-          </a:prstGeom>
-          <a:noFill/>
-        </p:spPr>
-        <p:txBody>
-          <a:bodyPr wrap="square" lIns="0" rIns="0" tIns="0" bIns="0">
-            <a:spAutoFit/>
-          </a:bodyPr>
-          <a:lstStyle/>
-          <a:p>
-            <a:pPr algn="l">
-              <a:spcAft>
-                <a:spcPts val="400"/>
-              </a:spcAft>
-            </a:pPr>
-            <a:r>
-              <a:rPr sz="850" b="0" i="0">
-                <a:solidFill>
-                  <a:srgbClr val="6B7280"/>
-                </a:solidFill>
-                <a:latin typeface="Yu Gothic"/>
-                <a:ea typeface="Yu Gothic"/>
-                <a:cs typeface="Yu Gothic"/>
-              </a:rPr>
-              <a:t>条件改定・縮小/撤退。ひも付けが前提</a:t>
-            </a:r>
-          </a:p>
-        </p:txBody>
-      </p:sp>
-      <p:sp>
-        <p:nvSpPr>
-          <p:cNvPr id="11" name="TextBox 10"/>
-          <p:cNvSpPr txBox="1"/>
-          <p:nvPr/>
-        </p:nvSpPr>
-        <p:spPr>
-          <a:xfrm>
-            <a:off x="502920" y="2432304"/>
-            <a:ext cx="3017520" cy="292608"/>
-          </a:xfrm>
-          <a:prstGeom prst="rect">
-            <a:avLst/>
-          </a:prstGeom>
-          <a:noFill/>
-        </p:spPr>
-        <p:txBody>
-          <a:bodyPr wrap="square" lIns="0" rIns="0" tIns="0" bIns="0">
-            <a:spAutoFit/>
-          </a:bodyPr>
-          <a:lstStyle/>
-          <a:p>
-            <a:pPr algn="l">
-              <a:spcAft>
-                <a:spcPts val="400"/>
-              </a:spcAft>
-            </a:pPr>
-            <a:r>
-              <a:rPr sz="1050" b="1" i="0">
-                <a:solidFill>
-                  <a:srgbClr val="1B1B26"/>
-                </a:solidFill>
-                <a:latin typeface="Yu Gothic"/>
-                <a:ea typeface="Yu Gothic"/>
-                <a:cs typeface="Yu Gothic"/>
-              </a:rPr>
-              <a:t>② 監修・契約ボトルネック解消</a:t>
-            </a:r>
-          </a:p>
-        </p:txBody>
-      </p:sp>
-      <p:sp>
-        <p:nvSpPr>
-          <p:cNvPr id="12" name="Rounded Rectangle 11"/>
-          <p:cNvSpPr/>
-          <p:nvPr/>
-        </p:nvSpPr>
-        <p:spPr>
-          <a:xfrm>
-            <a:off x="3657600" y="2450592"/>
-            <a:ext cx="4023360" cy="237744"/>
-          </a:xfrm>
-          <a:prstGeom prst="roundRect">
-            <a:avLst>
-              <a:gd name="adj" fmla="val 50000"/>
-            </a:avLst>
-          </a:prstGeom>
-          <a:solidFill>
-            <a:srgbClr val="EAF1FE"/>
-          </a:solidFill>
-          <a:ln>
-            <a:noFill/>
-          </a:ln>
-          <a:effectLst/>
-        </p:spPr>
-        <p:style>
-          <a:lnRef idx="1">
-            <a:schemeClr val="accent1"/>
-          </a:lnRef>
-          <a:fillRef idx="3">
-            <a:schemeClr val="accent1"/>
-          </a:fillRef>
-          <a:effectRef idx="2">
-            <a:schemeClr val="accent1"/>
-          </a:effectRef>
-          <a:fontRef idx="minor">
-            <a:schemeClr val="lt1"/>
-          </a:fontRef>
-        </p:style>
-        <p:txBody>
-          <a:bodyPr rtlCol="0" anchor="ctr"/>
-          <a:lstStyle/>
-          <a:p>
-            <a:pPr algn="ctr"/>
-          </a:p>
-        </p:txBody>
-      </p:sp>
-      <p:sp>
-        <p:nvSpPr>
-          <p:cNvPr id="13" name="Rounded Rectangle 12"/>
-          <p:cNvSpPr/>
-          <p:nvPr/>
-        </p:nvSpPr>
-        <p:spPr>
-          <a:xfrm>
-            <a:off x="3657600" y="2450592"/>
-            <a:ext cx="2682240" cy="237744"/>
-          </a:xfrm>
-          <a:prstGeom prst="roundRect">
-            <a:avLst>
-              <a:gd name="adj" fmla="val 50000"/>
-            </a:avLst>
-          </a:prstGeom>
-          <a:solidFill>
-            <a:srgbClr val="2563EB"/>
-          </a:solidFill>
-          <a:ln>
-            <a:noFill/>
-          </a:ln>
-          <a:effectLst/>
-        </p:spPr>
-        <p:style>
-          <a:lnRef idx="1">
-            <a:schemeClr val="accent1"/>
-          </a:lnRef>
-          <a:fillRef idx="3">
-            <a:schemeClr val="accent1"/>
-          </a:fillRef>
-          <a:effectRef idx="2">
-            <a:schemeClr val="accent1"/>
-          </a:effectRef>
-          <a:fontRef idx="minor">
-            <a:schemeClr val="lt1"/>
-          </a:fontRef>
-        </p:style>
-        <p:txBody>
-          <a:bodyPr rtlCol="0" anchor="ctr"/>
-          <a:lstStyle/>
-          <a:p>
-            <a:pPr algn="ctr"/>
-          </a:p>
-        </p:txBody>
-      </p:sp>
-      <p:sp>
-        <p:nvSpPr>
-          <p:cNvPr id="14" name="TextBox 13"/>
-          <p:cNvSpPr txBox="1"/>
-          <p:nvPr/>
-        </p:nvSpPr>
-        <p:spPr>
-          <a:xfrm>
-            <a:off x="7790688" y="2432304"/>
-            <a:ext cx="1280160" cy="274320"/>
-          </a:xfrm>
-          <a:prstGeom prst="rect">
-            <a:avLst/>
-          </a:prstGeom>
-          <a:noFill/>
-        </p:spPr>
-        <p:txBody>
-          <a:bodyPr wrap="square" lIns="0" rIns="0" tIns="0" bIns="0">
-            <a:spAutoFit/>
-          </a:bodyPr>
-          <a:lstStyle/>
-          <a:p>
-            <a:pPr algn="l">
-              <a:spcAft>
-                <a:spcPts val="400"/>
-              </a:spcAft>
-            </a:pPr>
-            <a:r>
-              <a:rPr sz="1000" b="1" i="0">
-                <a:solidFill>
-                  <a:srgbClr val="1B1B26"/>
-                </a:solidFill>
-                <a:latin typeface="Yu Gothic"/>
-                <a:ea typeface="Yu Gothic"/>
-                <a:cs typeface="Yu Gothic"/>
-              </a:rPr>
-              <a:t>1.0〜1.5億</a:t>
-            </a:r>
-          </a:p>
-        </p:txBody>
-      </p:sp>
-      <p:sp>
-        <p:nvSpPr>
-          <p:cNvPr id="15" name="TextBox 14"/>
-          <p:cNvSpPr txBox="1"/>
-          <p:nvPr/>
-        </p:nvSpPr>
-        <p:spPr>
-          <a:xfrm>
-            <a:off x="9052560" y="2432304"/>
-            <a:ext cx="2743200" cy="310896"/>
-          </a:xfrm>
-          <a:prstGeom prst="rect">
-            <a:avLst/>
-          </a:prstGeom>
-          <a:noFill/>
-        </p:spPr>
-        <p:txBody>
-          <a:bodyPr wrap="square" lIns="0" rIns="0" tIns="0" bIns="0">
-            <a:spAutoFit/>
-          </a:bodyPr>
-          <a:lstStyle/>
-          <a:p>
-            <a:pPr algn="l">
-              <a:spcAft>
-                <a:spcPts val="400"/>
-              </a:spcAft>
-            </a:pPr>
-            <a:r>
-              <a:rPr sz="850" b="0" i="0">
-                <a:solidFill>
-                  <a:srgbClr val="6B7280"/>
-                </a:solidFill>
-                <a:latin typeface="Yu Gothic"/>
-                <a:ea typeface="Yu Gothic"/>
-                <a:cs typeface="Yu Gothic"/>
-              </a:rPr>
-              <a:t>成約前倒し・失注減・回転数増</a:t>
-            </a:r>
-          </a:p>
-        </p:txBody>
-      </p:sp>
-      <p:sp>
-        <p:nvSpPr>
-          <p:cNvPr id="16" name="TextBox 15"/>
-          <p:cNvSpPr txBox="1"/>
-          <p:nvPr/>
-        </p:nvSpPr>
-        <p:spPr>
-          <a:xfrm>
-            <a:off x="502920" y="2944368"/>
-            <a:ext cx="3017520" cy="292608"/>
-          </a:xfrm>
-          <a:prstGeom prst="rect">
-            <a:avLst/>
-          </a:prstGeom>
-          <a:noFill/>
-        </p:spPr>
-        <p:txBody>
-          <a:bodyPr wrap="square" lIns="0" rIns="0" tIns="0" bIns="0">
-            <a:spAutoFit/>
-          </a:bodyPr>
-          <a:lstStyle/>
-          <a:p>
-            <a:pPr algn="l">
-              <a:spcAft>
-                <a:spcPts val="400"/>
-              </a:spcAft>
-            </a:pPr>
-            <a:r>
-              <a:rPr sz="1050" b="1" i="0">
-                <a:solidFill>
-                  <a:srgbClr val="1B1B26"/>
-                </a:solidFill>
-                <a:latin typeface="Yu Gothic"/>
-                <a:ea typeface="Yu Gothic"/>
-                <a:cs typeface="Yu Gothic"/>
-              </a:rPr>
-              <a:t>③ 浮いた工数の再投下</a:t>
-            </a:r>
-          </a:p>
-        </p:txBody>
-      </p:sp>
-      <p:sp>
-        <p:nvSpPr>
-          <p:cNvPr id="17" name="Rounded Rectangle 16"/>
-          <p:cNvSpPr/>
-          <p:nvPr/>
-        </p:nvSpPr>
-        <p:spPr>
-          <a:xfrm>
-            <a:off x="3657600" y="2962656"/>
-            <a:ext cx="4023360" cy="237744"/>
-          </a:xfrm>
-          <a:prstGeom prst="roundRect">
-            <a:avLst>
-              <a:gd name="adj" fmla="val 50000"/>
-            </a:avLst>
-          </a:prstGeom>
-          <a:solidFill>
-            <a:srgbClr val="EAF1FE"/>
-          </a:solidFill>
-          <a:ln>
-            <a:noFill/>
-          </a:ln>
-          <a:effectLst/>
-        </p:spPr>
-        <p:style>
-          <a:lnRef idx="1">
-            <a:schemeClr val="accent1"/>
-          </a:lnRef>
-          <a:fillRef idx="3">
-            <a:schemeClr val="accent1"/>
-          </a:fillRef>
-          <a:effectRef idx="2">
-            <a:schemeClr val="accent1"/>
-          </a:effectRef>
-          <a:fontRef idx="minor">
-            <a:schemeClr val="lt1"/>
-          </a:fontRef>
-        </p:style>
-        <p:txBody>
-          <a:bodyPr rtlCol="0" anchor="ctr"/>
-          <a:lstStyle/>
-          <a:p>
-            <a:pPr algn="ctr"/>
-          </a:p>
-        </p:txBody>
-      </p:sp>
-      <p:sp>
-        <p:nvSpPr>
-          <p:cNvPr id="18" name="Rounded Rectangle 17"/>
-          <p:cNvSpPr/>
-          <p:nvPr/>
-        </p:nvSpPr>
-        <p:spPr>
-          <a:xfrm>
-            <a:off x="3657600" y="2962656"/>
-            <a:ext cx="2682240" cy="237744"/>
-          </a:xfrm>
-          <a:prstGeom prst="roundRect">
-            <a:avLst>
-              <a:gd name="adj" fmla="val 50000"/>
-            </a:avLst>
-          </a:prstGeom>
-          <a:solidFill>
-            <a:srgbClr val="2563EB"/>
-          </a:solidFill>
-          <a:ln>
-            <a:noFill/>
-          </a:ln>
-          <a:effectLst/>
-        </p:spPr>
-        <p:style>
-          <a:lnRef idx="1">
-            <a:schemeClr val="accent1"/>
-          </a:lnRef>
-          <a:fillRef idx="3">
-            <a:schemeClr val="accent1"/>
-          </a:fillRef>
-          <a:effectRef idx="2">
-            <a:schemeClr val="accent1"/>
-          </a:effectRef>
-          <a:fontRef idx="minor">
-            <a:schemeClr val="lt1"/>
-          </a:fontRef>
-        </p:style>
-        <p:txBody>
-          <a:bodyPr rtlCol="0" anchor="ctr"/>
-          <a:lstStyle/>
-          <a:p>
-            <a:pPr algn="ctr"/>
-          </a:p>
-        </p:txBody>
-      </p:sp>
-      <p:sp>
-        <p:nvSpPr>
-          <p:cNvPr id="19" name="TextBox 18"/>
-          <p:cNvSpPr txBox="1"/>
-          <p:nvPr/>
-        </p:nvSpPr>
-        <p:spPr>
-          <a:xfrm>
-            <a:off x="7790688" y="2944368"/>
-            <a:ext cx="1280160" cy="274320"/>
-          </a:xfrm>
-          <a:prstGeom prst="rect">
-            <a:avLst/>
-          </a:prstGeom>
-          <a:noFill/>
-        </p:spPr>
-        <p:txBody>
-          <a:bodyPr wrap="square" lIns="0" rIns="0" tIns="0" bIns="0">
-            <a:spAutoFit/>
-          </a:bodyPr>
-          <a:lstStyle/>
-          <a:p>
-            <a:pPr algn="l">
-              <a:spcAft>
-                <a:spcPts val="400"/>
-              </a:spcAft>
-            </a:pPr>
-            <a:r>
-              <a:rPr sz="1000" b="1" i="0">
-                <a:solidFill>
-                  <a:srgbClr val="1B1B26"/>
-                </a:solidFill>
-                <a:latin typeface="Yu Gothic"/>
-                <a:ea typeface="Yu Gothic"/>
-                <a:cs typeface="Yu Gothic"/>
-              </a:rPr>
-              <a:t>1.0〜1.5億</a:t>
-            </a:r>
-          </a:p>
-        </p:txBody>
-      </p:sp>
-      <p:sp>
-        <p:nvSpPr>
-          <p:cNvPr id="20" name="TextBox 19"/>
-          <p:cNvSpPr txBox="1"/>
-          <p:nvPr/>
-        </p:nvSpPr>
-        <p:spPr>
-          <a:xfrm>
-            <a:off x="9052560" y="2944368"/>
-            <a:ext cx="2743200" cy="310896"/>
-          </a:xfrm>
-          <a:prstGeom prst="rect">
-            <a:avLst/>
-          </a:prstGeom>
-          <a:noFill/>
-        </p:spPr>
-        <p:txBody>
-          <a:bodyPr wrap="square" lIns="0" rIns="0" tIns="0" bIns="0">
-            <a:spAutoFit/>
-          </a:bodyPr>
-          <a:lstStyle/>
-          <a:p>
-            <a:pPr algn="l">
-              <a:spcAft>
-                <a:spcPts val="400"/>
-              </a:spcAft>
-            </a:pPr>
-            <a:r>
-              <a:rPr sz="850" b="0" i="0">
-                <a:solidFill>
-                  <a:srgbClr val="6B7280"/>
-                </a:solidFill>
-                <a:latin typeface="Yu Gothic"/>
-                <a:ea typeface="Yu Gothic"/>
-                <a:cs typeface="Yu Gothic"/>
-              </a:rPr>
-              <a:t>軽量化→高粗利先へ再配分。工数計測が前提</a:t>
-            </a:r>
-          </a:p>
-        </p:txBody>
-      </p:sp>
-      <p:sp>
-        <p:nvSpPr>
-          <p:cNvPr id="21" name="TextBox 20"/>
-          <p:cNvSpPr txBox="1"/>
-          <p:nvPr/>
-        </p:nvSpPr>
-        <p:spPr>
-          <a:xfrm>
-            <a:off x="502920" y="3456432"/>
-            <a:ext cx="3017520" cy="292608"/>
-          </a:xfrm>
-          <a:prstGeom prst="rect">
-            <a:avLst/>
-          </a:prstGeom>
-          <a:noFill/>
-        </p:spPr>
-        <p:txBody>
-          <a:bodyPr wrap="square" lIns="0" rIns="0" tIns="0" bIns="0">
-            <a:spAutoFit/>
-          </a:bodyPr>
-          <a:lstStyle/>
-          <a:p>
-            <a:pPr algn="l">
-              <a:spcAft>
-                <a:spcPts val="400"/>
-              </a:spcAft>
-            </a:pPr>
-            <a:r>
-              <a:rPr sz="1050" b="1" i="0">
-                <a:solidFill>
-                  <a:srgbClr val="1B1B26"/>
-                </a:solidFill>
-                <a:latin typeface="Yu Gothic"/>
-                <a:ea typeface="Yu Gothic"/>
-                <a:cs typeface="Yu Gothic"/>
-              </a:rPr>
-              <a:t>④ 取り分・コスト構造の改善</a:t>
-            </a:r>
-          </a:p>
-        </p:txBody>
-      </p:sp>
-      <p:sp>
-        <p:nvSpPr>
-          <p:cNvPr id="22" name="Rounded Rectangle 21"/>
-          <p:cNvSpPr/>
-          <p:nvPr/>
-        </p:nvSpPr>
-        <p:spPr>
-          <a:xfrm>
-            <a:off x="3657600" y="3474720"/>
-            <a:ext cx="2682240" cy="237744"/>
-          </a:xfrm>
-          <a:prstGeom prst="roundRect">
-            <a:avLst>
-              <a:gd name="adj" fmla="val 50000"/>
-            </a:avLst>
-          </a:prstGeom>
-          <a:solidFill>
-            <a:srgbClr val="EAF1FE"/>
-          </a:solidFill>
-          <a:ln>
-            <a:noFill/>
-          </a:ln>
-          <a:effectLst/>
-        </p:spPr>
-        <p:style>
-          <a:lnRef idx="1">
-            <a:schemeClr val="accent1"/>
-          </a:lnRef>
-          <a:fillRef idx="3">
-            <a:schemeClr val="accent1"/>
-          </a:fillRef>
-          <a:effectRef idx="2">
-            <a:schemeClr val="accent1"/>
-          </a:effectRef>
-          <a:fontRef idx="minor">
-            <a:schemeClr val="lt1"/>
-          </a:fontRef>
-        </p:style>
-        <p:txBody>
-          <a:bodyPr rtlCol="0" anchor="ctr"/>
-          <a:lstStyle/>
-          <a:p>
-            <a:pPr algn="ctr"/>
-          </a:p>
-        </p:txBody>
-      </p:sp>
-      <p:sp>
-        <p:nvSpPr>
-          <p:cNvPr id="23" name="Rounded Rectangle 22"/>
-          <p:cNvSpPr/>
-          <p:nvPr/>
-        </p:nvSpPr>
-        <p:spPr>
-          <a:xfrm>
-            <a:off x="3657600" y="3474720"/>
-            <a:ext cx="1341120" cy="237744"/>
-          </a:xfrm>
-          <a:prstGeom prst="roundRect">
-            <a:avLst>
-              <a:gd name="adj" fmla="val 50000"/>
-            </a:avLst>
-          </a:prstGeom>
-          <a:solidFill>
-            <a:srgbClr val="2563EB"/>
-          </a:solidFill>
-          <a:ln>
-            <a:noFill/>
-          </a:ln>
-          <a:effectLst/>
-        </p:spPr>
-        <p:style>
-          <a:lnRef idx="1">
-            <a:schemeClr val="accent1"/>
-          </a:lnRef>
-          <a:fillRef idx="3">
-            <a:schemeClr val="accent1"/>
-          </a:fillRef>
-          <a:effectRef idx="2">
-            <a:schemeClr val="accent1"/>
-          </a:effectRef>
-          <a:fontRef idx="minor">
-            <a:schemeClr val="lt1"/>
-          </a:fontRef>
-        </p:style>
-        <p:txBody>
-          <a:bodyPr rtlCol="0" anchor="ctr"/>
-          <a:lstStyle/>
-          <a:p>
-            <a:pPr algn="ctr"/>
-          </a:p>
-        </p:txBody>
-      </p:sp>
-      <p:sp>
-        <p:nvSpPr>
-          <p:cNvPr id="24" name="TextBox 23"/>
-          <p:cNvSpPr txBox="1"/>
-          <p:nvPr/>
-        </p:nvSpPr>
-        <p:spPr>
-          <a:xfrm>
-            <a:off x="6449568" y="3456432"/>
-            <a:ext cx="1280160" cy="274320"/>
-          </a:xfrm>
-          <a:prstGeom prst="rect">
-            <a:avLst/>
-          </a:prstGeom>
-          <a:noFill/>
-        </p:spPr>
-        <p:txBody>
-          <a:bodyPr wrap="square" lIns="0" rIns="0" tIns="0" bIns="0">
-            <a:spAutoFit/>
-          </a:bodyPr>
-          <a:lstStyle/>
-          <a:p>
-            <a:pPr algn="l">
-              <a:spcAft>
-                <a:spcPts val="400"/>
-              </a:spcAft>
-            </a:pPr>
-            <a:r>
-              <a:rPr sz="1000" b="1" i="0">
-                <a:solidFill>
-                  <a:srgbClr val="1B1B26"/>
-                </a:solidFill>
-                <a:latin typeface="Yu Gothic"/>
-                <a:ea typeface="Yu Gothic"/>
-                <a:cs typeface="Yu Gothic"/>
-              </a:rPr>
-              <a:t>0.5〜1.0億</a:t>
-            </a:r>
-          </a:p>
-        </p:txBody>
-      </p:sp>
-      <p:sp>
-        <p:nvSpPr>
-          <p:cNvPr id="25" name="TextBox 24"/>
-          <p:cNvSpPr txBox="1"/>
-          <p:nvPr/>
-        </p:nvSpPr>
-        <p:spPr>
-          <a:xfrm>
-            <a:off x="9052560" y="3456432"/>
-            <a:ext cx="2743200" cy="310896"/>
-          </a:xfrm>
-          <a:prstGeom prst="rect">
-            <a:avLst/>
-          </a:prstGeom>
-          <a:noFill/>
-        </p:spPr>
-        <p:txBody>
-          <a:bodyPr wrap="square" lIns="0" rIns="0" tIns="0" bIns="0">
-            <a:spAutoFit/>
-          </a:bodyPr>
-          <a:lstStyle/>
-          <a:p>
-            <a:pPr algn="l">
-              <a:spcAft>
-                <a:spcPts val="400"/>
-              </a:spcAft>
-            </a:pPr>
-            <a:r>
-              <a:rPr sz="850" b="0" i="0">
-                <a:solidFill>
-                  <a:srgbClr val="6B7280"/>
-                </a:solidFill>
-                <a:latin typeface="Yu Gothic"/>
-                <a:ea typeface="Yu Gothic"/>
-                <a:cs typeface="Yu Gothic"/>
-              </a:rPr>
-              <a:t>委員会配分の把握・事務削減（守り）</a:t>
-            </a:r>
-          </a:p>
-        </p:txBody>
-      </p:sp>
-      <p:sp>
-        <p:nvSpPr>
-          <p:cNvPr id="26" name="TextBox 25"/>
-          <p:cNvSpPr txBox="1"/>
-          <p:nvPr/>
-        </p:nvSpPr>
-        <p:spPr>
-          <a:xfrm>
-            <a:off x="502920" y="3968496"/>
-            <a:ext cx="3017520" cy="292608"/>
-          </a:xfrm>
-          <a:prstGeom prst="rect">
-            <a:avLst/>
-          </a:prstGeom>
-          <a:noFill/>
-        </p:spPr>
-        <p:txBody>
-          <a:bodyPr wrap="square" lIns="0" rIns="0" tIns="0" bIns="0">
-            <a:spAutoFit/>
-          </a:bodyPr>
-          <a:lstStyle/>
-          <a:p>
-            <a:pPr algn="l">
-              <a:spcAft>
-                <a:spcPts val="400"/>
-              </a:spcAft>
-            </a:pPr>
-            <a:r>
-              <a:rPr sz="1050" b="1" i="0">
-                <a:solidFill>
-                  <a:srgbClr val="1B1B26"/>
-                </a:solidFill>
-                <a:latin typeface="Yu Gothic"/>
-                <a:ea typeface="Yu Gothic"/>
-                <a:cs typeface="Yu Gothic"/>
-              </a:rPr>
-              <a:t>⑤ トップ外交による大型案件</a:t>
-            </a:r>
-          </a:p>
-        </p:txBody>
-      </p:sp>
-      <p:sp>
-        <p:nvSpPr>
-          <p:cNvPr id="27" name="Rounded Rectangle 26"/>
-          <p:cNvSpPr/>
-          <p:nvPr/>
-        </p:nvSpPr>
-        <p:spPr>
-          <a:xfrm>
-            <a:off x="3657600" y="3986783"/>
-            <a:ext cx="2682240" cy="237744"/>
-          </a:xfrm>
-          <a:prstGeom prst="roundRect">
-            <a:avLst>
-              <a:gd name="adj" fmla="val 50000"/>
-            </a:avLst>
-          </a:prstGeom>
-          <a:solidFill>
-            <a:srgbClr val="EAF1FE"/>
-          </a:solidFill>
-          <a:ln>
-            <a:noFill/>
-          </a:ln>
-          <a:effectLst/>
-        </p:spPr>
-        <p:style>
-          <a:lnRef idx="1">
-            <a:schemeClr val="accent1"/>
-          </a:lnRef>
-          <a:fillRef idx="3">
-            <a:schemeClr val="accent1"/>
-          </a:fillRef>
-          <a:effectRef idx="2">
-            <a:schemeClr val="accent1"/>
-          </a:effectRef>
-          <a:fontRef idx="minor">
-            <a:schemeClr val="lt1"/>
-          </a:fontRef>
-        </p:style>
-        <p:txBody>
-          <a:bodyPr rtlCol="0" anchor="ctr"/>
-          <a:lstStyle/>
-          <a:p>
-            <a:pPr algn="ctr"/>
-          </a:p>
-        </p:txBody>
-      </p:sp>
-      <p:sp>
-        <p:nvSpPr>
-          <p:cNvPr id="28" name="Rounded Rectangle 27"/>
-          <p:cNvSpPr/>
-          <p:nvPr/>
-        </p:nvSpPr>
-        <p:spPr>
-          <a:xfrm>
-            <a:off x="3657600" y="3986783"/>
-            <a:ext cx="1341120" cy="237744"/>
-          </a:xfrm>
-          <a:prstGeom prst="roundRect">
-            <a:avLst>
-              <a:gd name="adj" fmla="val 50000"/>
-            </a:avLst>
-          </a:prstGeom>
-          <a:solidFill>
-            <a:srgbClr val="2563EB"/>
-          </a:solidFill>
-          <a:ln>
-            <a:noFill/>
-          </a:ln>
-          <a:effectLst/>
-        </p:spPr>
-        <p:style>
-          <a:lnRef idx="1">
-            <a:schemeClr val="accent1"/>
-          </a:lnRef>
-          <a:fillRef idx="3">
-            <a:schemeClr val="accent1"/>
-          </a:fillRef>
-          <a:effectRef idx="2">
-            <a:schemeClr val="accent1"/>
-          </a:effectRef>
-          <a:fontRef idx="minor">
-            <a:schemeClr val="lt1"/>
-          </a:fontRef>
-        </p:style>
-        <p:txBody>
-          <a:bodyPr rtlCol="0" anchor="ctr"/>
-          <a:lstStyle/>
-          <a:p>
-            <a:pPr algn="ctr"/>
-          </a:p>
-        </p:txBody>
-      </p:sp>
-      <p:sp>
-        <p:nvSpPr>
-          <p:cNvPr id="29" name="TextBox 28"/>
-          <p:cNvSpPr txBox="1"/>
-          <p:nvPr/>
-        </p:nvSpPr>
-        <p:spPr>
-          <a:xfrm>
-            <a:off x="6449568" y="3968496"/>
-            <a:ext cx="1280160" cy="274320"/>
-          </a:xfrm>
-          <a:prstGeom prst="rect">
-            <a:avLst/>
-          </a:prstGeom>
-          <a:noFill/>
-        </p:spPr>
-        <p:txBody>
-          <a:bodyPr wrap="square" lIns="0" rIns="0" tIns="0" bIns="0">
-            <a:spAutoFit/>
-          </a:bodyPr>
-          <a:lstStyle/>
-          <a:p>
-            <a:pPr algn="l">
-              <a:spcAft>
-                <a:spcPts val="400"/>
-              </a:spcAft>
-            </a:pPr>
-            <a:r>
-              <a:rPr sz="1000" b="1" i="0">
-                <a:solidFill>
-                  <a:srgbClr val="1B1B26"/>
-                </a:solidFill>
-                <a:latin typeface="Yu Gothic"/>
-                <a:ea typeface="Yu Gothic"/>
-                <a:cs typeface="Yu Gothic"/>
-              </a:rPr>
-              <a:t>0.5〜1.0億</a:t>
-            </a:r>
-          </a:p>
-        </p:txBody>
-      </p:sp>
-      <p:sp>
-        <p:nvSpPr>
-          <p:cNvPr id="30" name="TextBox 29"/>
-          <p:cNvSpPr txBox="1"/>
-          <p:nvPr/>
-        </p:nvSpPr>
-        <p:spPr>
-          <a:xfrm>
-            <a:off x="9052560" y="3968496"/>
-            <a:ext cx="2743200" cy="310896"/>
-          </a:xfrm>
-          <a:prstGeom prst="rect">
-            <a:avLst/>
-          </a:prstGeom>
-          <a:noFill/>
-        </p:spPr>
-        <p:txBody>
-          <a:bodyPr wrap="square" lIns="0" rIns="0" tIns="0" bIns="0">
-            <a:spAutoFit/>
-          </a:bodyPr>
-          <a:lstStyle/>
-          <a:p>
-            <a:pPr algn="l">
-              <a:spcAft>
-                <a:spcPts val="400"/>
-              </a:spcAft>
-            </a:pPr>
-            <a:r>
-              <a:rPr sz="850" b="0" i="0">
-                <a:solidFill>
-                  <a:srgbClr val="6B7280"/>
-                </a:solidFill>
-                <a:latin typeface="Yu Gothic"/>
-                <a:ea typeface="Yu Gothic"/>
-                <a:cs typeface="Yu Gothic"/>
-              </a:rPr>
-              <a:t>本日ターゲットの承認後に具体化</a:t>
-            </a:r>
-          </a:p>
-        </p:txBody>
-      </p:sp>
-      <p:sp>
-        <p:nvSpPr>
-          <p:cNvPr id="31" name="TextBox 30"/>
-          <p:cNvSpPr txBox="1"/>
-          <p:nvPr/>
-        </p:nvSpPr>
-        <p:spPr>
-          <a:xfrm>
-            <a:off x="502920" y="4480560"/>
-            <a:ext cx="3017520" cy="292608"/>
-          </a:xfrm>
-          <a:prstGeom prst="rect">
-            <a:avLst/>
-          </a:prstGeom>
-          <a:noFill/>
-        </p:spPr>
-        <p:txBody>
-          <a:bodyPr wrap="square" lIns="0" rIns="0" tIns="0" bIns="0">
-            <a:spAutoFit/>
-          </a:bodyPr>
-          <a:lstStyle/>
-          <a:p>
-            <a:pPr algn="l">
-              <a:spcAft>
-                <a:spcPts val="400"/>
-              </a:spcAft>
-            </a:pPr>
-            <a:r>
-              <a:rPr sz="1050" b="1" i="0">
-                <a:solidFill>
-                  <a:srgbClr val="1B1B26"/>
-                </a:solidFill>
-                <a:latin typeface="Yu Gothic"/>
-                <a:ea typeface="Yu Gothic"/>
-                <a:cs typeface="Yu Gothic"/>
-              </a:rPr>
-              <a:t>⑥ 見込みの確度転換（挽回）</a:t>
-            </a:r>
-          </a:p>
-        </p:txBody>
-      </p:sp>
-      <p:sp>
-        <p:nvSpPr>
-          <p:cNvPr id="32" name="Rounded Rectangle 31"/>
-          <p:cNvSpPr/>
-          <p:nvPr/>
-        </p:nvSpPr>
-        <p:spPr>
-          <a:xfrm>
-            <a:off x="3657600" y="4498848"/>
-            <a:ext cx="4023360" cy="237744"/>
-          </a:xfrm>
-          <a:prstGeom prst="roundRect">
-            <a:avLst>
-              <a:gd name="adj" fmla="val 50000"/>
-            </a:avLst>
-          </a:prstGeom>
-          <a:solidFill>
-            <a:srgbClr val="EAF1FE"/>
-          </a:solidFill>
-          <a:ln>
-            <a:noFill/>
-          </a:ln>
-          <a:effectLst/>
-        </p:spPr>
-        <p:style>
-          <a:lnRef idx="1">
-            <a:schemeClr val="accent1"/>
-          </a:lnRef>
-          <a:fillRef idx="3">
-            <a:schemeClr val="accent1"/>
-          </a:fillRef>
-          <a:effectRef idx="2">
-            <a:schemeClr val="accent1"/>
-          </a:effectRef>
-          <a:fontRef idx="minor">
-            <a:schemeClr val="lt1"/>
-          </a:fontRef>
-        </p:style>
-        <p:txBody>
-          <a:bodyPr rtlCol="0" anchor="ctr"/>
-          <a:lstStyle/>
-          <a:p>
-            <a:pPr algn="ctr"/>
-          </a:p>
-        </p:txBody>
-      </p:sp>
-      <p:sp>
-        <p:nvSpPr>
-          <p:cNvPr id="33" name="Rounded Rectangle 32"/>
-          <p:cNvSpPr/>
-          <p:nvPr/>
-        </p:nvSpPr>
-        <p:spPr>
-          <a:xfrm>
-            <a:off x="3657600" y="4498848"/>
-            <a:ext cx="2682240" cy="237744"/>
-          </a:xfrm>
-          <a:prstGeom prst="roundRect">
-            <a:avLst>
-              <a:gd name="adj" fmla="val 50000"/>
-            </a:avLst>
-          </a:prstGeom>
-          <a:solidFill>
-            <a:srgbClr val="2563EB"/>
-          </a:solidFill>
-          <a:ln>
-            <a:noFill/>
-          </a:ln>
-          <a:effectLst/>
-        </p:spPr>
-        <p:style>
-          <a:lnRef idx="1">
-            <a:schemeClr val="accent1"/>
-          </a:lnRef>
-          <a:fillRef idx="3">
-            <a:schemeClr val="accent1"/>
-          </a:fillRef>
-          <a:effectRef idx="2">
-            <a:schemeClr val="accent1"/>
-          </a:effectRef>
-          <a:fontRef idx="minor">
-            <a:schemeClr val="lt1"/>
-          </a:fontRef>
-        </p:style>
-        <p:txBody>
-          <a:bodyPr rtlCol="0" anchor="ctr"/>
-          <a:lstStyle/>
-          <a:p>
-            <a:pPr algn="ctr"/>
-          </a:p>
-        </p:txBody>
-      </p:sp>
-      <p:sp>
-        <p:nvSpPr>
-          <p:cNvPr id="34" name="TextBox 33"/>
-          <p:cNvSpPr txBox="1"/>
-          <p:nvPr/>
-        </p:nvSpPr>
-        <p:spPr>
-          <a:xfrm>
-            <a:off x="7790688" y="4480560"/>
-            <a:ext cx="1280160" cy="274320"/>
-          </a:xfrm>
-          <a:prstGeom prst="rect">
-            <a:avLst/>
-          </a:prstGeom>
-          <a:noFill/>
-        </p:spPr>
-        <p:txBody>
-          <a:bodyPr wrap="square" lIns="0" rIns="0" tIns="0" bIns="0">
-            <a:spAutoFit/>
-          </a:bodyPr>
-          <a:lstStyle/>
-          <a:p>
-            <a:pPr algn="l">
-              <a:spcAft>
-                <a:spcPts val="400"/>
-              </a:spcAft>
-            </a:pPr>
-            <a:r>
-              <a:rPr sz="1000" b="1" i="0">
-                <a:solidFill>
-                  <a:srgbClr val="1B1B26"/>
-                </a:solidFill>
-                <a:latin typeface="Yu Gothic"/>
-                <a:ea typeface="Yu Gothic"/>
-                <a:cs typeface="Yu Gothic"/>
-              </a:rPr>
-              <a:t>1.0〜1.5億</a:t>
-            </a:r>
-          </a:p>
-        </p:txBody>
-      </p:sp>
-      <p:sp>
-        <p:nvSpPr>
-          <p:cNvPr id="35" name="TextBox 34"/>
-          <p:cNvSpPr txBox="1"/>
-          <p:nvPr/>
-        </p:nvSpPr>
-        <p:spPr>
-          <a:xfrm>
-            <a:off x="9052560" y="4480560"/>
-            <a:ext cx="2743200" cy="310896"/>
-          </a:xfrm>
-          <a:prstGeom prst="rect">
-            <a:avLst/>
-          </a:prstGeom>
-          <a:noFill/>
-        </p:spPr>
-        <p:txBody>
-          <a:bodyPr wrap="square" lIns="0" rIns="0" tIns="0" bIns="0">
-            <a:spAutoFit/>
-          </a:bodyPr>
-          <a:lstStyle/>
-          <a:p>
-            <a:pPr algn="l">
-              <a:spcAft>
-                <a:spcPts val="400"/>
-              </a:spcAft>
-            </a:pPr>
-            <a:r>
-              <a:rPr sz="850" b="0" i="0">
-                <a:solidFill>
-                  <a:srgbClr val="6B7280"/>
-                </a:solidFill>
-                <a:latin typeface="Yu Gothic"/>
-                <a:ea typeface="Yu Gothic"/>
-                <a:cs typeface="Yu Gothic"/>
-              </a:rPr>
-              <a:t>赤26%（18.6億）の転換率向上</a:t>
-            </a:r>
-          </a:p>
-        </p:txBody>
-      </p:sp>
-      <p:sp>
-        <p:nvSpPr>
-          <p:cNvPr id="36" name="Rounded Rectangle 35"/>
-          <p:cNvSpPr/>
-          <p:nvPr/>
-        </p:nvSpPr>
-        <p:spPr>
-          <a:xfrm>
-            <a:off x="502920" y="5193792"/>
-            <a:ext cx="11183112" cy="969264"/>
+            <a:ext cx="11183112" cy="1298448"/>
           </a:xfrm>
           <a:prstGeom prst="roundRect">
             <a:avLst>
@@ -7130,14 +5619,101 @@
       </p:sp>
       <p:sp>
         <p:nvSpPr>
-          <p:cNvPr id="37" name="TextBox 36"/>
+          <p:cNvPr id="7" name="Rounded Rectangle 6"/>
+          <p:cNvSpPr/>
+          <p:nvPr/>
+        </p:nvSpPr>
+        <p:spPr>
+          <a:xfrm>
+            <a:off x="777240" y="2231136"/>
+            <a:ext cx="566928" cy="566928"/>
+          </a:xfrm>
+          <a:prstGeom prst="roundRect">
+            <a:avLst>
+              <a:gd name="adj" fmla="val 10000"/>
+            </a:avLst>
+          </a:prstGeom>
+          <a:solidFill>
+            <a:srgbClr val="2563EB"/>
+          </a:solidFill>
+          <a:ln>
+            <a:noFill/>
+          </a:ln>
+          <a:effectLst/>
+        </p:spPr>
+        <p:style>
+          <a:lnRef idx="1">
+            <a:schemeClr val="accent1"/>
+          </a:lnRef>
+          <a:fillRef idx="3">
+            <a:schemeClr val="accent1"/>
+          </a:fillRef>
+          <a:effectRef idx="2">
+            <a:schemeClr val="accent1"/>
+          </a:effectRef>
+          <a:fontRef idx="minor">
+            <a:schemeClr val="lt1"/>
+          </a:fontRef>
+        </p:style>
+        <p:txBody>
+          <a:bodyPr rtlCol="0" anchor="ctr"/>
+          <a:lstStyle/>
+          <a:p>
+            <a:pPr algn="ctr"/>
+          </a:p>
+        </p:txBody>
+      </p:sp>
+      <p:sp>
+        <p:nvSpPr>
+          <p:cNvPr id="8" name="TextBox 7"/>
           <p:cNvSpPr txBox="1"/>
           <p:nvPr/>
         </p:nvSpPr>
         <p:spPr>
           <a:xfrm>
-            <a:off x="777240" y="5340096"/>
-            <a:ext cx="10607040" cy="731520"/>
+            <a:off x="777240" y="2304288"/>
+            <a:ext cx="566928" cy="457200"/>
+          </a:xfrm>
+          <a:prstGeom prst="rect">
+            <a:avLst/>
+          </a:prstGeom>
+          <a:noFill/>
+        </p:spPr>
+        <p:txBody>
+          <a:bodyPr wrap="square" lIns="0" rIns="0" tIns="0" bIns="0">
+            <a:spAutoFit/>
+          </a:bodyPr>
+          <a:lstStyle/>
+          <a:p>
+            <a:pPr algn="ctr">
+              <a:spcAft>
+                <a:spcPts val="400"/>
+              </a:spcAft>
+            </a:pPr>
+            <a:r>
+              <a:rPr sz="2000" b="1" i="0">
+                <a:solidFill>
+                  <a:srgbClr val="FFFFFF"/>
+                </a:solidFill>
+                <a:latin typeface="Yu Gothic"/>
+                <a:ea typeface="Yu Gothic"/>
+                <a:cs typeface="Yu Gothic"/>
+              </a:rPr>
+              <a:t>1</a:t>
+            </a:r>
+          </a:p>
+        </p:txBody>
+      </p:sp>
+      <p:sp>
+        <p:nvSpPr>
+          <p:cNvPr id="9" name="TextBox 8"/>
+          <p:cNvSpPr txBox="1"/>
+          <p:nvPr/>
+        </p:nvSpPr>
+        <p:spPr>
+          <a:xfrm>
+            <a:off x="1600200" y="2084832"/>
+            <a:ext cx="9875520" cy="347472"/>
           </a:xfrm>
           <a:prstGeom prst="rect">
             <a:avLst/>
@@ -7156,7 +5732,7 @@
               </a:spcAft>
             </a:pPr>
             <a:r>
-              <a:rPr sz="1200" b="1" i="0">
+              <a:rPr sz="1450" b="1" i="0">
                 <a:solidFill>
                   <a:srgbClr val="1B1B26"/>
                 </a:solidFill>
@@ -7164,9 +5740,32 @@
                 <a:ea typeface="Yu Gothic"/>
                 <a:cs typeface="Yu Gothic"/>
               </a:rPr>
-              <a:t>合計 5.0〜8.0億 ＞ ギャップ6.25億（見込み比）。到達可能圏だが、①②は財務ひも付け、③は工数計測、⑥は確度定義の整備が前提</a:t>
-            </a:r>
-          </a:p>
+              <a:t>今期目標の構造</a:t>
+            </a:r>
+          </a:p>
+        </p:txBody>
+      </p:sp>
+      <p:sp>
+        <p:nvSpPr>
+          <p:cNvPr id="10" name="TextBox 9"/>
+          <p:cNvSpPr txBox="1"/>
+          <p:nvPr/>
+        </p:nvSpPr>
+        <p:spPr>
+          <a:xfrm>
+            <a:off x="1600200" y="2487168"/>
+            <a:ext cx="9692640" cy="658368"/>
+          </a:xfrm>
+          <a:prstGeom prst="rect">
+            <a:avLst/>
+          </a:prstGeom>
+          <a:noFill/>
+        </p:spPr>
+        <p:txBody>
+          <a:bodyPr wrap="square" lIns="0" rIns="0" tIns="0" bIns="0">
+            <a:spAutoFit/>
+          </a:bodyPr>
+          <a:lstStyle/>
           <a:p>
             <a:pPr algn="l">
               <a:spcAft>
@@ -7174,29 +5773,164 @@
               </a:spcAft>
             </a:pPr>
             <a:r>
-              <a:rPr sz="1000" b="0" i="0">
-                <a:solidFill>
-                  <a:srgbClr val="6B7280"/>
+              <a:rPr sz="1100" b="0" i="0">
+                <a:solidFill>
+                  <a:srgbClr val="1B1B26"/>
                 </a:solidFill>
                 <a:latin typeface="Yu Gothic"/>
                 <a:ea typeface="Yu Gothic"/>
                 <a:cs typeface="Yu Gothic"/>
               </a:rPr>
-              <a:t>濃い青＝下限（固い読み）／薄い青＝上限。数字はレバー・案件の単位で追い、人の単位では追いません</a:t>
-            </a:r>
-          </a:p>
-        </p:txBody>
-      </p:sp>
-      <p:sp>
-        <p:nvSpPr>
-          <p:cNvPr id="38" name="TextBox 37"/>
+              <a:t>40億＝ベース25億＋アップサイド15億（ライセンス・商品・中国 各＋5億）を正式目標とし、社内はアップサイド＋20億ミニマムで運営すること</a:t>
+            </a:r>
+          </a:p>
+        </p:txBody>
+      </p:sp>
+      <p:sp>
+        <p:nvSpPr>
+          <p:cNvPr id="11" name="Rounded Rectangle 10"/>
+          <p:cNvSpPr/>
+          <p:nvPr/>
+        </p:nvSpPr>
+        <p:spPr>
+          <a:xfrm>
+            <a:off x="502920" y="3364992"/>
+            <a:ext cx="11183112" cy="1298448"/>
+          </a:xfrm>
+          <a:prstGeom prst="roundRect">
+            <a:avLst>
+              <a:gd name="adj" fmla="val 10000"/>
+            </a:avLst>
+          </a:prstGeom>
+          <a:solidFill>
+            <a:srgbClr val="F6F8FB"/>
+          </a:solidFill>
+          <a:ln w="9525">
+            <a:solidFill>
+              <a:srgbClr val="E5E7EB"/>
+            </a:solidFill>
+          </a:ln>
+          <a:effectLst/>
+        </p:spPr>
+        <p:style>
+          <a:lnRef idx="1">
+            <a:schemeClr val="accent1"/>
+          </a:lnRef>
+          <a:fillRef idx="3">
+            <a:schemeClr val="accent1"/>
+          </a:fillRef>
+          <a:effectRef idx="2">
+            <a:schemeClr val="accent1"/>
+          </a:effectRef>
+          <a:fontRef idx="minor">
+            <a:schemeClr val="lt1"/>
+          </a:fontRef>
+        </p:style>
+        <p:txBody>
+          <a:bodyPr rtlCol="0" anchor="ctr"/>
+          <a:lstStyle/>
+          <a:p>
+            <a:pPr algn="ctr"/>
+          </a:p>
+        </p:txBody>
+      </p:sp>
+      <p:sp>
+        <p:nvSpPr>
+          <p:cNvPr id="12" name="Rounded Rectangle 11"/>
+          <p:cNvSpPr/>
+          <p:nvPr/>
+        </p:nvSpPr>
+        <p:spPr>
+          <a:xfrm>
+            <a:off x="777240" y="3675888"/>
+            <a:ext cx="566928" cy="566928"/>
+          </a:xfrm>
+          <a:prstGeom prst="roundRect">
+            <a:avLst>
+              <a:gd name="adj" fmla="val 10000"/>
+            </a:avLst>
+          </a:prstGeom>
+          <a:solidFill>
+            <a:srgbClr val="2563EB"/>
+          </a:solidFill>
+          <a:ln>
+            <a:noFill/>
+          </a:ln>
+          <a:effectLst/>
+        </p:spPr>
+        <p:style>
+          <a:lnRef idx="1">
+            <a:schemeClr val="accent1"/>
+          </a:lnRef>
+          <a:fillRef idx="3">
+            <a:schemeClr val="accent1"/>
+          </a:fillRef>
+          <a:effectRef idx="2">
+            <a:schemeClr val="accent1"/>
+          </a:effectRef>
+          <a:fontRef idx="minor">
+            <a:schemeClr val="lt1"/>
+          </a:fontRef>
+        </p:style>
+        <p:txBody>
+          <a:bodyPr rtlCol="0" anchor="ctr"/>
+          <a:lstStyle/>
+          <a:p>
+            <a:pPr algn="ctr"/>
+          </a:p>
+        </p:txBody>
+      </p:sp>
+      <p:sp>
+        <p:nvSpPr>
+          <p:cNvPr id="13" name="TextBox 12"/>
           <p:cNvSpPr txBox="1"/>
           <p:nvPr/>
         </p:nvSpPr>
         <p:spPr>
           <a:xfrm>
-            <a:off x="502920" y="6547104"/>
-            <a:ext cx="9144000" cy="256032"/>
+            <a:off x="777240" y="3749040"/>
+            <a:ext cx="566928" cy="457200"/>
+          </a:xfrm>
+          <a:prstGeom prst="rect">
+            <a:avLst/>
+          </a:prstGeom>
+          <a:noFill/>
+        </p:spPr>
+        <p:txBody>
+          <a:bodyPr wrap="square" lIns="0" rIns="0" tIns="0" bIns="0">
+            <a:spAutoFit/>
+          </a:bodyPr>
+          <a:lstStyle/>
+          <a:p>
+            <a:pPr algn="ctr">
+              <a:spcAft>
+                <a:spcPts val="400"/>
+              </a:spcAft>
+            </a:pPr>
+            <a:r>
+              <a:rPr sz="2000" b="1" i="0">
+                <a:solidFill>
+                  <a:srgbClr val="FFFFFF"/>
+                </a:solidFill>
+                <a:latin typeface="Yu Gothic"/>
+                <a:ea typeface="Yu Gothic"/>
+                <a:cs typeface="Yu Gothic"/>
+              </a:rPr>
+              <a:t>2</a:t>
+            </a:r>
+          </a:p>
+        </p:txBody>
+      </p:sp>
+      <p:sp>
+        <p:nvSpPr>
+          <p:cNvPr id="14" name="TextBox 13"/>
+          <p:cNvSpPr txBox="1"/>
+          <p:nvPr/>
+        </p:nvSpPr>
+        <p:spPr>
+          <a:xfrm>
+            <a:off x="1600200" y="3529584"/>
+            <a:ext cx="9875520" cy="347472"/>
           </a:xfrm>
           <a:prstGeom prst="rect">
             <a:avLst/>
@@ -7215,6 +5949,305 @@
               </a:spcAft>
             </a:pPr>
             <a:r>
+              <a:rPr sz="1450" b="1" i="0">
+                <a:solidFill>
+                  <a:srgbClr val="1B1B26"/>
+                </a:solidFill>
+                <a:latin typeface="Yu Gothic"/>
+                <a:ea typeface="Yu Gothic"/>
+                <a:cs typeface="Yu Gothic"/>
+              </a:rPr>
+              <a:t>顧客評価の基本方針</a:t>
+            </a:r>
+          </a:p>
+        </p:txBody>
+      </p:sp>
+      <p:sp>
+        <p:nvSpPr>
+          <p:cNvPr id="15" name="TextBox 14"/>
+          <p:cNvSpPr txBox="1"/>
+          <p:nvPr/>
+        </p:nvSpPr>
+        <p:spPr>
+          <a:xfrm>
+            <a:off x="1600200" y="3931920"/>
+            <a:ext cx="9692640" cy="658368"/>
+          </a:xfrm>
+          <a:prstGeom prst="rect">
+            <a:avLst/>
+          </a:prstGeom>
+          <a:noFill/>
+        </p:spPr>
+        <p:txBody>
+          <a:bodyPr wrap="square" lIns="0" rIns="0" tIns="0" bIns="0">
+            <a:spAutoFit/>
+          </a:bodyPr>
+          <a:lstStyle/>
+          <a:p>
+            <a:pPr algn="l">
+              <a:spcAft>
+                <a:spcPts val="400"/>
+              </a:spcAft>
+            </a:pPr>
+            <a:r>
+              <a:rPr sz="1100" b="0" i="0">
+                <a:solidFill>
+                  <a:srgbClr val="1B1B26"/>
+                </a:solidFill>
+                <a:latin typeface="Yu Gothic"/>
+                <a:ea typeface="Yu Gothic"/>
+                <a:cs typeface="Yu Gothic"/>
+              </a:rPr>
+              <a:t>全量700〜800社を対象に、5軸（取引実績・成長性・IP適合・CRM/D2C・海外）で統一評価すること。案件は1つのマッピングで見て、基準を超える特殊案件のみ戦略会議で決議</a:t>
+            </a:r>
+          </a:p>
+        </p:txBody>
+      </p:sp>
+      <p:sp>
+        <p:nvSpPr>
+          <p:cNvPr id="16" name="Rounded Rectangle 15"/>
+          <p:cNvSpPr/>
+          <p:nvPr/>
+        </p:nvSpPr>
+        <p:spPr>
+          <a:xfrm>
+            <a:off x="502920" y="4809744"/>
+            <a:ext cx="11183112" cy="1298448"/>
+          </a:xfrm>
+          <a:prstGeom prst="roundRect">
+            <a:avLst>
+              <a:gd name="adj" fmla="val 10000"/>
+            </a:avLst>
+          </a:prstGeom>
+          <a:solidFill>
+            <a:srgbClr val="F6F8FB"/>
+          </a:solidFill>
+          <a:ln w="9525">
+            <a:solidFill>
+              <a:srgbClr val="E5E7EB"/>
+            </a:solidFill>
+          </a:ln>
+          <a:effectLst/>
+        </p:spPr>
+        <p:style>
+          <a:lnRef idx="1">
+            <a:schemeClr val="accent1"/>
+          </a:lnRef>
+          <a:fillRef idx="3">
+            <a:schemeClr val="accent1"/>
+          </a:fillRef>
+          <a:effectRef idx="2">
+            <a:schemeClr val="accent1"/>
+          </a:effectRef>
+          <a:fontRef idx="minor">
+            <a:schemeClr val="lt1"/>
+          </a:fontRef>
+        </p:style>
+        <p:txBody>
+          <a:bodyPr rtlCol="0" anchor="ctr"/>
+          <a:lstStyle/>
+          <a:p>
+            <a:pPr algn="ctr"/>
+          </a:p>
+        </p:txBody>
+      </p:sp>
+      <p:sp>
+        <p:nvSpPr>
+          <p:cNvPr id="17" name="Rounded Rectangle 16"/>
+          <p:cNvSpPr/>
+          <p:nvPr/>
+        </p:nvSpPr>
+        <p:spPr>
+          <a:xfrm>
+            <a:off x="777240" y="5120640"/>
+            <a:ext cx="566928" cy="566928"/>
+          </a:xfrm>
+          <a:prstGeom prst="roundRect">
+            <a:avLst>
+              <a:gd name="adj" fmla="val 10000"/>
+            </a:avLst>
+          </a:prstGeom>
+          <a:solidFill>
+            <a:srgbClr val="2563EB"/>
+          </a:solidFill>
+          <a:ln>
+            <a:noFill/>
+          </a:ln>
+          <a:effectLst/>
+        </p:spPr>
+        <p:style>
+          <a:lnRef idx="1">
+            <a:schemeClr val="accent1"/>
+          </a:lnRef>
+          <a:fillRef idx="3">
+            <a:schemeClr val="accent1"/>
+          </a:fillRef>
+          <a:effectRef idx="2">
+            <a:schemeClr val="accent1"/>
+          </a:effectRef>
+          <a:fontRef idx="minor">
+            <a:schemeClr val="lt1"/>
+          </a:fontRef>
+        </p:style>
+        <p:txBody>
+          <a:bodyPr rtlCol="0" anchor="ctr"/>
+          <a:lstStyle/>
+          <a:p>
+            <a:pPr algn="ctr"/>
+          </a:p>
+        </p:txBody>
+      </p:sp>
+      <p:sp>
+        <p:nvSpPr>
+          <p:cNvPr id="18" name="TextBox 17"/>
+          <p:cNvSpPr txBox="1"/>
+          <p:nvPr/>
+        </p:nvSpPr>
+        <p:spPr>
+          <a:xfrm>
+            <a:off x="777240" y="5193792"/>
+            <a:ext cx="566928" cy="457200"/>
+          </a:xfrm>
+          <a:prstGeom prst="rect">
+            <a:avLst/>
+          </a:prstGeom>
+          <a:noFill/>
+        </p:spPr>
+        <p:txBody>
+          <a:bodyPr wrap="square" lIns="0" rIns="0" tIns="0" bIns="0">
+            <a:spAutoFit/>
+          </a:bodyPr>
+          <a:lstStyle/>
+          <a:p>
+            <a:pPr algn="ctr">
+              <a:spcAft>
+                <a:spcPts val="400"/>
+              </a:spcAft>
+            </a:pPr>
+            <a:r>
+              <a:rPr sz="2000" b="1" i="0">
+                <a:solidFill>
+                  <a:srgbClr val="FFFFFF"/>
+                </a:solidFill>
+                <a:latin typeface="Yu Gothic"/>
+                <a:ea typeface="Yu Gothic"/>
+                <a:cs typeface="Yu Gothic"/>
+              </a:rPr>
+              <a:t>3</a:t>
+            </a:r>
+          </a:p>
+        </p:txBody>
+      </p:sp>
+      <p:sp>
+        <p:nvSpPr>
+          <p:cNvPr id="19" name="TextBox 18"/>
+          <p:cNvSpPr txBox="1"/>
+          <p:nvPr/>
+        </p:nvSpPr>
+        <p:spPr>
+          <a:xfrm>
+            <a:off x="1600200" y="4974336"/>
+            <a:ext cx="9875520" cy="347472"/>
+          </a:xfrm>
+          <a:prstGeom prst="rect">
+            <a:avLst/>
+          </a:prstGeom>
+          <a:noFill/>
+        </p:spPr>
+        <p:txBody>
+          <a:bodyPr wrap="square" lIns="0" rIns="0" tIns="0" bIns="0">
+            <a:spAutoFit/>
+          </a:bodyPr>
+          <a:lstStyle/>
+          <a:p>
+            <a:pPr algn="l">
+              <a:spcAft>
+                <a:spcPts val="400"/>
+              </a:spcAft>
+            </a:pPr>
+            <a:r>
+              <a:rPr sz="1450" b="1" i="0">
+                <a:solidFill>
+                  <a:srgbClr val="1B1B26"/>
+                </a:solidFill>
+                <a:latin typeface="Yu Gothic"/>
+                <a:ea typeface="Yu Gothic"/>
+                <a:cs typeface="Yu Gothic"/>
+              </a:rPr>
+              <a:t>各分科会の90日後ゴール</a:t>
+            </a:r>
+          </a:p>
+        </p:txBody>
+      </p:sp>
+      <p:sp>
+        <p:nvSpPr>
+          <p:cNvPr id="20" name="TextBox 19"/>
+          <p:cNvSpPr txBox="1"/>
+          <p:nvPr/>
+        </p:nvSpPr>
+        <p:spPr>
+          <a:xfrm>
+            <a:off x="1600200" y="5376672"/>
+            <a:ext cx="9692640" cy="658368"/>
+          </a:xfrm>
+          <a:prstGeom prst="rect">
+            <a:avLst/>
+          </a:prstGeom>
+          <a:noFill/>
+        </p:spPr>
+        <p:txBody>
+          <a:bodyPr wrap="square" lIns="0" rIns="0" tIns="0" bIns="0">
+            <a:spAutoFit/>
+          </a:bodyPr>
+          <a:lstStyle/>
+          <a:p>
+            <a:pPr algn="l">
+              <a:spcAft>
+                <a:spcPts val="400"/>
+              </a:spcAft>
+            </a:pPr>
+            <a:r>
+              <a:rPr sz="1100" b="0" i="0">
+                <a:solidFill>
+                  <a:srgbClr val="1B1B26"/>
+                </a:solidFill>
+                <a:latin typeface="Yu Gothic"/>
+                <a:ea typeface="Yu Gothic"/>
+                <a:cs typeface="Yu Gothic"/>
+              </a:rPr>
+              <a:t>3分科会が本日提示する定量ゴールを、90日間の到達点として確定すること（以後の点検会議はこのゴールへの進捗で報告）</a:t>
+            </a:r>
+          </a:p>
+        </p:txBody>
+      </p:sp>
+      <p:sp>
+        <p:nvSpPr>
+          <p:cNvPr id="21" name="TextBox 20"/>
+          <p:cNvSpPr txBox="1"/>
+          <p:nvPr/>
+        </p:nvSpPr>
+        <p:spPr>
+          <a:xfrm>
+            <a:off x="502920" y="6547104"/>
+            <a:ext cx="9144000" cy="256032"/>
+          </a:xfrm>
+          <a:prstGeom prst="rect">
+            <a:avLst/>
+          </a:prstGeom>
+          <a:noFill/>
+        </p:spPr>
+        <p:txBody>
+          <a:bodyPr wrap="square" lIns="0" rIns="0" tIns="0" bIns="0">
+            <a:spAutoFit/>
+          </a:bodyPr>
+          <a:lstStyle/>
+          <a:p>
+            <a:pPr algn="l">
+              <a:spcAft>
+                <a:spcPts val="400"/>
+              </a:spcAft>
+            </a:pPr>
+            <a:r>
               <a:rPr sz="750" b="0" i="0">
                 <a:solidFill>
                   <a:srgbClr val="6B7280"/>
@@ -7230,7 +6263,7 @@
       </p:sp>
       <p:sp>
         <p:nvSpPr>
-          <p:cNvPr id="39" name="TextBox 38"/>
+          <p:cNvPr id="22" name="TextBox 21"/>
           <p:cNvSpPr txBox="1"/>
           <p:nvPr/>
         </p:nvSpPr>
@@ -7384,7 +6417,7 @@
                 <a:ea typeface="Yu Gothic"/>
                 <a:cs typeface="Yu Gothic"/>
               </a:rPr>
-              <a:t>分科会の報告 — 90日後に達成したい状態と3分類</a:t>
+              <a:t>本日の論点 — ご意見をいただきたいこと</a:t>
             </a:r>
           </a:p>
         </p:txBody>
@@ -7469,7 +6502,7 @@
                 <a:ea typeface="Yu Gothic"/>
                 <a:cs typeface="Yu Gothic"/>
               </a:rPr>
-              <a:t>各リーダー10分。冒頭に「90日後に達成したい状態」→ 決議・報告・承認の順で（下記の状態文は初回分科会で確定）</a:t>
+              <a:t>決めるところまでは求めません。方向感のご意見をいただき、分科会に持ち帰って具体化します</a:t>
             </a:r>
           </a:p>
         </p:txBody>
@@ -7482,8 +6515,8 @@
         </p:nvSpPr>
         <p:spPr>
           <a:xfrm>
-            <a:off x="502920" y="1975104"/>
-            <a:ext cx="11183112" cy="1335024"/>
+            <a:off x="502920" y="1920240"/>
+            <a:ext cx="11183112" cy="1298448"/>
           </a:xfrm>
           <a:prstGeom prst="roundRect">
             <a:avLst>
@@ -7491,7 +6524,7 @@
             </a:avLst>
           </a:prstGeom>
           <a:solidFill>
-            <a:srgbClr val="F6F8FB"/>
+            <a:srgbClr val="FFFFFF"/>
           </a:solidFill>
           <a:ln w="9525">
             <a:solidFill>
@@ -7530,67 +6563,8 @@
         </p:nvSpPr>
         <p:spPr>
           <a:xfrm>
-            <a:off x="777240" y="2103120"/>
-            <a:ext cx="2926080" cy="566928"/>
-          </a:xfrm>
-          <a:prstGeom prst="rect">
-            <a:avLst/>
-          </a:prstGeom>
-          <a:noFill/>
-        </p:spPr>
-        <p:txBody>
-          <a:bodyPr wrap="square" lIns="0" rIns="0" tIns="0" bIns="0">
-            <a:spAutoFit/>
-          </a:bodyPr>
-          <a:lstStyle/>
-          <a:p>
-            <a:pPr algn="l">
-              <a:spcAft>
-                <a:spcPts val="0"/>
-              </a:spcAft>
-            </a:pPr>
-            <a:r>
-              <a:rPr sz="1300" b="1" i="0">
-                <a:solidFill>
-                  <a:srgbClr val="1B1B26"/>
-                </a:solidFill>
-                <a:latin typeface="Yu Gothic"/>
-                <a:ea typeface="Yu Gothic"/>
-                <a:cs typeface="Yu Gothic"/>
-              </a:rPr>
-              <a:t>ライセンス営業改革</a:t>
-            </a:r>
-          </a:p>
-          <a:p>
-            <a:pPr algn="l">
-              <a:spcAft>
-                <a:spcPts val="0"/>
-              </a:spcAft>
-            </a:pPr>
-            <a:r>
-              <a:rPr sz="1000" b="1" i="0">
-                <a:solidFill>
-                  <a:srgbClr val="2563EB"/>
-                </a:solidFill>
-                <a:latin typeface="Yu Gothic"/>
-                <a:ea typeface="Yu Gothic"/>
-                <a:cs typeface="Yu Gothic"/>
-              </a:rPr>
-              <a:t>リーダー：南谷さん</a:t>
-            </a:r>
-          </a:p>
-        </p:txBody>
-      </p:sp>
-      <p:sp>
-        <p:nvSpPr>
-          <p:cNvPr id="8" name="TextBox 7"/>
-          <p:cNvSpPr txBox="1"/>
-          <p:nvPr/>
-        </p:nvSpPr>
-        <p:spPr>
-          <a:xfrm>
-            <a:off x="3886200" y="2103120"/>
-            <a:ext cx="7589520" cy="566928"/>
+            <a:off x="777240" y="2066544"/>
+            <a:ext cx="10424160" cy="347472"/>
           </a:xfrm>
           <a:prstGeom prst="rect">
             <a:avLst/>
@@ -7609,7 +6583,7 @@
               </a:spcAft>
             </a:pPr>
             <a:r>
-              <a:rPr sz="1150" b="1" i="0">
+              <a:rPr sz="1350" b="1" i="0">
                 <a:solidFill>
                   <a:srgbClr val="1E40AF"/>
                 </a:solidFill>
@@ -7617,65 +6591,21 @@
                 <a:ea typeface="Yu Gothic"/>
                 <a:cs typeface="Yu Gothic"/>
               </a:rPr>
-              <a:t>90日後：顧客ランクが全社共通になり、上位顧客のすべてに次のアクションと期限が付いている</a:t>
-            </a:r>
-          </a:p>
-        </p:txBody>
-      </p:sp>
-      <p:sp>
-        <p:nvSpPr>
-          <p:cNvPr id="9" name="Rectangle 8"/>
-          <p:cNvSpPr/>
-          <p:nvPr/>
-        </p:nvSpPr>
-        <p:spPr>
-          <a:xfrm>
-            <a:off x="3886200" y="2761488"/>
-            <a:ext cx="7543800" cy="9525"/>
-          </a:xfrm>
-          <a:prstGeom prst="rect">
-            <a:avLst/>
-          </a:prstGeom>
-          <a:solidFill>
-            <a:srgbClr val="E5E7EB"/>
-          </a:solidFill>
-          <a:ln>
-            <a:noFill/>
-          </a:ln>
-          <a:effectLst/>
-        </p:spPr>
-        <p:style>
-          <a:lnRef idx="1">
-            <a:schemeClr val="accent1"/>
-          </a:lnRef>
-          <a:fillRef idx="3">
-            <a:schemeClr val="accent1"/>
-          </a:fillRef>
-          <a:effectRef idx="2">
-            <a:schemeClr val="accent1"/>
-          </a:effectRef>
-          <a:fontRef idx="minor">
-            <a:schemeClr val="lt1"/>
-          </a:fontRef>
-        </p:style>
-        <p:txBody>
-          <a:bodyPr rtlCol="0" anchor="ctr"/>
-          <a:lstStyle/>
-          <a:p>
-            <a:pPr algn="ctr"/>
-          </a:p>
-        </p:txBody>
-      </p:sp>
-      <p:sp>
-        <p:nvSpPr>
-          <p:cNvPr id="10" name="TextBox 9"/>
+              <a:t>論点1　接点のID取得の空白をどこまで一気に埋めるか</a:t>
+            </a:r>
+          </a:p>
+        </p:txBody>
+      </p:sp>
+      <p:sp>
+        <p:nvSpPr>
+          <p:cNvPr id="8" name="TextBox 7"/>
           <p:cNvSpPr txBox="1"/>
           <p:nvPr/>
         </p:nvSpPr>
         <p:spPr>
           <a:xfrm>
-            <a:off x="3886200" y="2852928"/>
-            <a:ext cx="7589520" cy="384048"/>
+            <a:off x="777240" y="2468880"/>
+            <a:ext cx="10424160" cy="658368"/>
           </a:xfrm>
           <a:prstGeom prst="rect">
             <a:avLst/>
@@ -7694,29 +6624,29 @@
               </a:spcAft>
             </a:pPr>
             <a:r>
-              <a:rPr sz="950" b="0" i="0">
-                <a:solidFill>
-                  <a:srgbClr val="6B7280"/>
+              <a:rPr sz="1100" b="0" i="0">
+                <a:solidFill>
+                  <a:srgbClr val="1B1B26"/>
                 </a:solidFill>
                 <a:latin typeface="Yu Gothic"/>
                 <a:ea typeface="Yu Gothic"/>
                 <a:cs typeface="Yu Gothic"/>
               </a:rPr>
-              <a:t>顧客採点・重点顧客・ランク管理の3様式／確認会・棚卸しの進捗／承認：ランク統合の基本方針</a:t>
-            </a:r>
-          </a:p>
-        </p:txBody>
-      </p:sp>
-      <p:sp>
-        <p:nvSpPr>
-          <p:cNvPr id="11" name="Rounded Rectangle 10"/>
+              <a:t>ウルトラマート来店・ライブ動員・EXPO先行チケットでIDが取れていない。取ろうとしていないだけで、QR・簡易登録→本登録の段階設計で取れる。どの接点から着手するか</a:t>
+            </a:r>
+          </a:p>
+        </p:txBody>
+      </p:sp>
+      <p:sp>
+        <p:nvSpPr>
+          <p:cNvPr id="9" name="Rounded Rectangle 8"/>
           <p:cNvSpPr/>
           <p:nvPr/>
         </p:nvSpPr>
         <p:spPr>
           <a:xfrm>
-            <a:off x="502920" y="3456432"/>
-            <a:ext cx="11183112" cy="1335024"/>
+            <a:off x="502920" y="3364992"/>
+            <a:ext cx="11183112" cy="1298448"/>
           </a:xfrm>
           <a:prstGeom prst="roundRect">
             <a:avLst>
@@ -7724,7 +6654,7 @@
             </a:avLst>
           </a:prstGeom>
           <a:solidFill>
-            <a:srgbClr val="F6F8FB"/>
+            <a:srgbClr val="FFFFFF"/>
           </a:solidFill>
           <a:ln w="9525">
             <a:solidFill>
@@ -7757,73 +6687,14 @@
       </p:sp>
       <p:sp>
         <p:nvSpPr>
-          <p:cNvPr id="12" name="TextBox 11"/>
+          <p:cNvPr id="10" name="TextBox 9"/>
           <p:cNvSpPr txBox="1"/>
           <p:nvPr/>
         </p:nvSpPr>
         <p:spPr>
           <a:xfrm>
-            <a:off x="777240" y="3584448"/>
-            <a:ext cx="2926080" cy="566928"/>
-          </a:xfrm>
-          <a:prstGeom prst="rect">
-            <a:avLst/>
-          </a:prstGeom>
-          <a:noFill/>
-        </p:spPr>
-        <p:txBody>
-          <a:bodyPr wrap="square" lIns="0" rIns="0" tIns="0" bIns="0">
-            <a:spAutoFit/>
-          </a:bodyPr>
-          <a:lstStyle/>
-          <a:p>
-            <a:pPr algn="l">
-              <a:spcAft>
-                <a:spcPts val="0"/>
-              </a:spcAft>
-            </a:pPr>
-            <a:r>
-              <a:rPr sz="1300" b="1" i="0">
-                <a:solidFill>
-                  <a:srgbClr val="1B1B26"/>
-                </a:solidFill>
-                <a:latin typeface="Yu Gothic"/>
-                <a:ea typeface="Yu Gothic"/>
-                <a:cs typeface="Yu Gothic"/>
-              </a:rPr>
-              <a:t>接点づくり</a:t>
-            </a:r>
-          </a:p>
-          <a:p>
-            <a:pPr algn="l">
-              <a:spcAft>
-                <a:spcPts val="0"/>
-              </a:spcAft>
-            </a:pPr>
-            <a:r>
-              <a:rPr sz="1000" b="1" i="0">
-                <a:solidFill>
-                  <a:srgbClr val="2563EB"/>
-                </a:solidFill>
-                <a:latin typeface="Yu Gothic"/>
-                <a:ea typeface="Yu Gothic"/>
-                <a:cs typeface="Yu Gothic"/>
-              </a:rPr>
-              <a:t>リーダー：黒澤さん</a:t>
-            </a:r>
-          </a:p>
-        </p:txBody>
-      </p:sp>
-      <p:sp>
-        <p:nvSpPr>
-          <p:cNvPr id="13" name="TextBox 12"/>
-          <p:cNvSpPr txBox="1"/>
-          <p:nvPr/>
-        </p:nvSpPr>
-        <p:spPr>
-          <a:xfrm>
-            <a:off x="3886200" y="3584448"/>
-            <a:ext cx="7589520" cy="566928"/>
+            <a:off x="777240" y="3511296"/>
+            <a:ext cx="10424160" cy="347472"/>
           </a:xfrm>
           <a:prstGeom prst="rect">
             <a:avLst/>
@@ -7842,7 +6713,7 @@
               </a:spcAft>
             </a:pPr>
             <a:r>
-              <a:rPr sz="1150" b="1" i="0">
+              <a:rPr sz="1350" b="1" i="0">
                 <a:solidFill>
                   <a:srgbClr val="1E40AF"/>
                 </a:solidFill>
@@ -7850,65 +6721,21 @@
                 <a:ea typeface="Yu Gothic"/>
                 <a:cs typeface="Yu Gothic"/>
               </a:rPr>
-              <a:t>90日後：IDでつながり続けるファン数が毎月の定点で出て、接点からの送客実験が1つ回っている</a:t>
-            </a:r>
-          </a:p>
-        </p:txBody>
-      </p:sp>
-      <p:sp>
-        <p:nvSpPr>
-          <p:cNvPr id="14" name="Rectangle 13"/>
-          <p:cNvSpPr/>
-          <p:nvPr/>
-        </p:nvSpPr>
-        <p:spPr>
-          <a:xfrm>
-            <a:off x="3886200" y="4242816"/>
-            <a:ext cx="7543800" cy="9525"/>
-          </a:xfrm>
-          <a:prstGeom prst="rect">
-            <a:avLst/>
-          </a:prstGeom>
-          <a:solidFill>
-            <a:srgbClr val="E5E7EB"/>
-          </a:solidFill>
-          <a:ln>
-            <a:noFill/>
-          </a:ln>
-          <a:effectLst/>
-        </p:spPr>
-        <p:style>
-          <a:lnRef idx="1">
-            <a:schemeClr val="accent1"/>
-          </a:lnRef>
-          <a:fillRef idx="3">
-            <a:schemeClr val="accent1"/>
-          </a:fillRef>
-          <a:effectRef idx="2">
-            <a:schemeClr val="accent1"/>
-          </a:effectRef>
-          <a:fontRef idx="minor">
-            <a:schemeClr val="lt1"/>
-          </a:fontRef>
-        </p:style>
-        <p:txBody>
-          <a:bodyPr rtlCol="0" anchor="ctr"/>
-          <a:lstStyle/>
-          <a:p>
-            <a:pPr algn="ctr"/>
-          </a:p>
-        </p:txBody>
-      </p:sp>
-      <p:sp>
-        <p:nvSpPr>
-          <p:cNvPr id="15" name="TextBox 14"/>
+              <a:t>論点2　ID基盤への投資判断の型</a:t>
+            </a:r>
+          </a:p>
+        </p:txBody>
+      </p:sp>
+      <p:sp>
+        <p:nvSpPr>
+          <p:cNvPr id="11" name="TextBox 10"/>
           <p:cNvSpPr txBox="1"/>
           <p:nvPr/>
         </p:nvSpPr>
         <p:spPr>
           <a:xfrm>
-            <a:off x="3886200" y="4334256"/>
-            <a:ext cx="7589520" cy="384048"/>
+            <a:off x="777240" y="3913632"/>
+            <a:ext cx="10424160" cy="658368"/>
           </a:xfrm>
           <a:prstGeom prst="rect">
             <a:avLst/>
@@ -7927,29 +6754,29 @@
               </a:spcAft>
             </a:pPr>
             <a:r>
-              <a:rPr sz="950" b="0" i="0">
-                <a:solidFill>
-                  <a:srgbClr val="6B7280"/>
+              <a:rPr sz="1100" b="0" i="0">
+                <a:solidFill>
+                  <a:srgbClr val="1B1B26"/>
                 </a:solidFill>
                 <a:latin typeface="Yu Gothic"/>
                 <a:ea typeface="Yu Gothic"/>
                 <a:cs typeface="Yu Gothic"/>
               </a:rPr>
-              <a:t>KGI採用・仕掛け数は参考指標へ／接点の定点数値・自社MD統合体制／承認：ゴール指標と投資方針</a:t>
-            </a:r>
-          </a:p>
-        </p:txBody>
-      </p:sp>
-      <p:sp>
-        <p:nvSpPr>
-          <p:cNvPr id="16" name="Rounded Rectangle 15"/>
+              <a:t>会員IDが何万人でいくらの営業利益を生む装置になるのか。投資額と回収の関係を数字で設計し、実験→実証→投資の順で段階判断する進め方でよいか</a:t>
+            </a:r>
+          </a:p>
+        </p:txBody>
+      </p:sp>
+      <p:sp>
+        <p:nvSpPr>
+          <p:cNvPr id="12" name="Rounded Rectangle 11"/>
           <p:cNvSpPr/>
           <p:nvPr/>
         </p:nvSpPr>
         <p:spPr>
           <a:xfrm>
-            <a:off x="502920" y="4937760"/>
-            <a:ext cx="11183112" cy="1335024"/>
+            <a:off x="502920" y="4809744"/>
+            <a:ext cx="11183112" cy="1298448"/>
           </a:xfrm>
           <a:prstGeom prst="roundRect">
             <a:avLst>
@@ -7957,7 +6784,7 @@
             </a:avLst>
           </a:prstGeom>
           <a:solidFill>
-            <a:srgbClr val="F6F8FB"/>
+            <a:srgbClr val="FFFFFF"/>
           </a:solidFill>
           <a:ln w="9525">
             <a:solidFill>
@@ -7990,73 +6817,14 @@
       </p:sp>
       <p:sp>
         <p:nvSpPr>
-          <p:cNvPr id="17" name="TextBox 16"/>
+          <p:cNvPr id="13" name="TextBox 12"/>
           <p:cNvSpPr txBox="1"/>
           <p:nvPr/>
         </p:nvSpPr>
         <p:spPr>
           <a:xfrm>
-            <a:off x="777240" y="5065776"/>
-            <a:ext cx="2926080" cy="566928"/>
-          </a:xfrm>
-          <a:prstGeom prst="rect">
-            <a:avLst/>
-          </a:prstGeom>
-          <a:noFill/>
-        </p:spPr>
-        <p:txBody>
-          <a:bodyPr wrap="square" lIns="0" rIns="0" tIns="0" bIns="0">
-            <a:spAutoFit/>
-          </a:bodyPr>
-          <a:lstStyle/>
-          <a:p>
-            <a:pPr algn="l">
-              <a:spcAft>
-                <a:spcPts val="0"/>
-              </a:spcAft>
-            </a:pPr>
-            <a:r>
-              <a:rPr sz="1300" b="1" i="0">
-                <a:solidFill>
-                  <a:srgbClr val="1B1B26"/>
-                </a:solidFill>
-                <a:latin typeface="Yu Gothic"/>
-                <a:ea typeface="Yu Gothic"/>
-                <a:cs typeface="Yu Gothic"/>
-              </a:rPr>
-              <a:t>経営基盤強化</a:t>
-            </a:r>
-          </a:p>
-          <a:p>
-            <a:pPr algn="l">
-              <a:spcAft>
-                <a:spcPts val="0"/>
-              </a:spcAft>
-            </a:pPr>
-            <a:r>
-              <a:rPr sz="1000" b="1" i="0">
-                <a:solidFill>
-                  <a:srgbClr val="2563EB"/>
-                </a:solidFill>
-                <a:latin typeface="Yu Gothic"/>
-                <a:ea typeface="Yu Gothic"/>
-                <a:cs typeface="Yu Gothic"/>
-              </a:rPr>
-              <a:t>リーダー：高橋さん</a:t>
-            </a:r>
-          </a:p>
-        </p:txBody>
-      </p:sp>
-      <p:sp>
-        <p:nvSpPr>
-          <p:cNvPr id="18" name="TextBox 17"/>
-          <p:cNvSpPr txBox="1"/>
-          <p:nvPr/>
-        </p:nvSpPr>
-        <p:spPr>
-          <a:xfrm>
-            <a:off x="3886200" y="5065776"/>
-            <a:ext cx="7589520" cy="566928"/>
+            <a:off x="777240" y="4956048"/>
+            <a:ext cx="10424160" cy="347472"/>
           </a:xfrm>
           <a:prstGeom prst="rect">
             <a:avLst/>
@@ -8075,7 +6843,7 @@
               </a:spcAft>
             </a:pPr>
             <a:r>
-              <a:rPr sz="1150" b="1" i="0">
+              <a:rPr sz="1350" b="1" i="0">
                 <a:solidFill>
                   <a:srgbClr val="1E40AF"/>
                 </a:solidFill>
@@ -8083,65 +6851,21 @@
                 <a:ea typeface="Yu Gothic"/>
                 <a:cs typeface="Yu Gothic"/>
               </a:rPr>
-              <a:t>90日後：工数が毎週見え、軽量化12件が動き、会議の総時間が減り始めている</a:t>
-            </a:r>
-          </a:p>
-        </p:txBody>
-      </p:sp>
-      <p:sp>
-        <p:nvSpPr>
-          <p:cNvPr id="19" name="Rectangle 18"/>
-          <p:cNvSpPr/>
-          <p:nvPr/>
-        </p:nvSpPr>
-        <p:spPr>
-          <a:xfrm>
-            <a:off x="3886200" y="5724144"/>
-            <a:ext cx="7543800" cy="9525"/>
-          </a:xfrm>
-          <a:prstGeom prst="rect">
-            <a:avLst/>
-          </a:prstGeom>
-          <a:solidFill>
-            <a:srgbClr val="E5E7EB"/>
-          </a:solidFill>
-          <a:ln>
-            <a:noFill/>
-          </a:ln>
-          <a:effectLst/>
-        </p:spPr>
-        <p:style>
-          <a:lnRef idx="1">
-            <a:schemeClr val="accent1"/>
-          </a:lnRef>
-          <a:fillRef idx="3">
-            <a:schemeClr val="accent1"/>
-          </a:fillRef>
-          <a:effectRef idx="2">
-            <a:schemeClr val="accent1"/>
-          </a:effectRef>
-          <a:fontRef idx="minor">
-            <a:schemeClr val="lt1"/>
-          </a:fontRef>
-        </p:style>
-        <p:txBody>
-          <a:bodyPr rtlCol="0" anchor="ctr"/>
-          <a:lstStyle/>
-          <a:p>
-            <a:pPr algn="ctr"/>
-          </a:p>
-        </p:txBody>
-      </p:sp>
-      <p:sp>
-        <p:nvSpPr>
-          <p:cNvPr id="20" name="TextBox 19"/>
+              <a:t>論点3　トップ外交のターゲット</a:t>
+            </a:r>
+          </a:p>
+        </p:txBody>
+      </p:sp>
+      <p:sp>
+        <p:nvSpPr>
+          <p:cNvPr id="14" name="TextBox 13"/>
           <p:cNvSpPr txBox="1"/>
           <p:nvPr/>
         </p:nvSpPr>
         <p:spPr>
           <a:xfrm>
-            <a:off x="3886200" y="5815584"/>
-            <a:ext cx="7589520" cy="384048"/>
+            <a:off x="777240" y="5358383"/>
+            <a:ext cx="10424160" cy="658368"/>
           </a:xfrm>
           <a:prstGeom prst="rect">
             <a:avLst/>
@@ -8160,29 +6884,29 @@
               </a:spcAft>
             </a:pPr>
             <a:r>
-              <a:rPr sz="950" b="0" i="0">
-                <a:solidFill>
-                  <a:srgbClr val="6B7280"/>
+              <a:rPr sz="1100" b="0" i="0">
+                <a:solidFill>
+                  <a:srgbClr val="1B1B26"/>
                 </a:solidFill>
                 <a:latin typeface="Yu Gothic"/>
                 <a:ea typeface="Yu Gothic"/>
                 <a:cs typeface="Yu Gothic"/>
               </a:rPr>
-              <a:t>工数様式の採用（8/3週開始）・軽量化の着手順／会議統廃合の候補／承認：原則なし</a:t>
-            </a:r>
-          </a:p>
-        </p:txBody>
-      </p:sp>
-      <p:sp>
-        <p:nvSpPr>
-          <p:cNvPr id="21" name="TextBox 20"/>
+              <a:t>重点顧客の上位から、会長・社長に登板いただきたい先の候補を次回までに絞り込む。選定の観点（アップサイド寄与・成長性）のご意見をいただきたい</a:t>
+            </a:r>
+          </a:p>
+        </p:txBody>
+      </p:sp>
+      <p:sp>
+        <p:nvSpPr>
+          <p:cNvPr id="15" name="TextBox 14"/>
           <p:cNvSpPr txBox="1"/>
           <p:nvPr/>
         </p:nvSpPr>
         <p:spPr>
           <a:xfrm>
-            <a:off x="502920" y="6327648"/>
-            <a:ext cx="10972800" cy="274320"/>
+            <a:off x="502920" y="6547104"/>
+            <a:ext cx="9144000" cy="256032"/>
           </a:xfrm>
           <a:prstGeom prst="rect">
             <a:avLst/>
@@ -8201,47 +6925,6 @@
               </a:spcAft>
             </a:pPr>
             <a:r>
-              <a:rPr sz="950" b="0" i="0">
-                <a:solidFill>
-                  <a:srgbClr val="6B7280"/>
-                </a:solidFill>
-                <a:latin typeface="Yu Gothic"/>
-                <a:ea typeface="Yu Gothic"/>
-                <a:cs typeface="Yu Gothic"/>
-              </a:rPr>
-              <a:t>※ 決議・報告・承認の件数と中身は、各分科会の提出（開催翌日）を受けて7/31に記入します</a:t>
-            </a:r>
-          </a:p>
-        </p:txBody>
-      </p:sp>
-      <p:sp>
-        <p:nvSpPr>
-          <p:cNvPr id="22" name="TextBox 21"/>
-          <p:cNvSpPr txBox="1"/>
-          <p:nvPr/>
-        </p:nvSpPr>
-        <p:spPr>
-          <a:xfrm>
-            <a:off x="502920" y="6547104"/>
-            <a:ext cx="9144000" cy="256032"/>
-          </a:xfrm>
-          <a:prstGeom prst="rect">
-            <a:avLst/>
-          </a:prstGeom>
-          <a:noFill/>
-        </p:spPr>
-        <p:txBody>
-          <a:bodyPr wrap="square" lIns="0" rIns="0" tIns="0" bIns="0">
-            <a:spAutoFit/>
-          </a:bodyPr>
-          <a:lstStyle/>
-          <a:p>
-            <a:pPr algn="l">
-              <a:spcAft>
-                <a:spcPts val="400"/>
-              </a:spcAft>
-            </a:pPr>
-            <a:r>
               <a:rPr sz="750" b="0" i="0">
                 <a:solidFill>
                   <a:srgbClr val="6B7280"/>
@@ -8257,7 +6940,7 @@
       </p:sp>
       <p:sp>
         <p:nvSpPr>
-          <p:cNvPr id="23" name="TextBox 22"/>
+          <p:cNvPr id="16" name="TextBox 15"/>
           <p:cNvSpPr txBox="1"/>
           <p:nvPr/>
         </p:nvSpPr>
@@ -8411,7 +7094,7 @@
                 <a:ea typeface="Yu Gothic"/>
                 <a:cs typeface="Yu Gothic"/>
               </a:rPr>
-              <a:t>90日の現在地と、次回までの確認</a:t>
+              <a:t>山本会長より — 講評と次回に向けて</a:t>
             </a:r>
           </a:p>
         </p:txBody>
@@ -8496,7 +7179,7 @@
                 <a:ea typeface="Yu Gothic"/>
                 <a:cs typeface="Yu Gothic"/>
               </a:rPr>
-              <a:t>動くものは3本だけ：確認会 → 財務ひも付け → 採点と力の入れ直し。この順で一直線に進めます</a:t>
+              <a:t>最後の5分は会長からの講評と、次回に向けたご指示をいただきます</a:t>
             </a:r>
           </a:p>
         </p:txBody>
@@ -8509,8 +7192,190 @@
         </p:nvSpPr>
         <p:spPr>
           <a:xfrm>
-            <a:off x="502920" y="1975104"/>
-            <a:ext cx="3602736" cy="2286000"/>
+            <a:off x="502920" y="1920240"/>
+            <a:ext cx="11183112" cy="2011680"/>
+          </a:xfrm>
+          <a:prstGeom prst="roundRect">
+            <a:avLst>
+              <a:gd name="adj" fmla="val 10000"/>
+            </a:avLst>
+          </a:prstGeom>
+          <a:solidFill>
+            <a:srgbClr val="EAF1FE"/>
+          </a:solidFill>
+          <a:ln>
+            <a:noFill/>
+          </a:ln>
+          <a:effectLst/>
+        </p:spPr>
+        <p:style>
+          <a:lnRef idx="1">
+            <a:schemeClr val="accent1"/>
+          </a:lnRef>
+          <a:fillRef idx="3">
+            <a:schemeClr val="accent1"/>
+          </a:fillRef>
+          <a:effectRef idx="2">
+            <a:schemeClr val="accent1"/>
+          </a:effectRef>
+          <a:fontRef idx="minor">
+            <a:schemeClr val="lt1"/>
+          </a:fontRef>
+        </p:style>
+        <p:txBody>
+          <a:bodyPr rtlCol="0" anchor="ctr"/>
+          <a:lstStyle/>
+          <a:p>
+            <a:pPr algn="ctr"/>
+          </a:p>
+        </p:txBody>
+      </p:sp>
+      <p:sp>
+        <p:nvSpPr>
+          <p:cNvPr id="7" name="TextBox 6"/>
+          <p:cNvSpPr txBox="1"/>
+          <p:nvPr/>
+        </p:nvSpPr>
+        <p:spPr>
+          <a:xfrm>
+            <a:off x="777240" y="2103120"/>
+            <a:ext cx="10607040" cy="1645920"/>
+          </a:xfrm>
+          <a:prstGeom prst="rect">
+            <a:avLst/>
+          </a:prstGeom>
+          <a:noFill/>
+        </p:spPr>
+        <p:txBody>
+          <a:bodyPr wrap="square" lIns="0" rIns="0" tIns="0" bIns="0">
+            <a:spAutoFit/>
+          </a:bodyPr>
+          <a:lstStyle/>
+          <a:p>
+            <a:pPr algn="l">
+              <a:spcAft>
+                <a:spcPts val="600"/>
+              </a:spcAft>
+            </a:pPr>
+            <a:r>
+              <a:rPr sz="1300" b="1" i="0">
+                <a:solidFill>
+                  <a:srgbClr val="1E40AF"/>
+                </a:solidFill>
+                <a:latin typeface="Yu Gothic"/>
+                <a:ea typeface="Yu Gothic"/>
+                <a:cs typeface="Yu Gothic"/>
+              </a:rPr>
+              <a:t>会長からの講評・ご指示（当日記入）</a:t>
+            </a:r>
+          </a:p>
+          <a:p>
+            <a:pPr algn="l">
+              <a:spcAft>
+                <a:spcPts val="400"/>
+              </a:spcAft>
+            </a:pPr>
+            <a:r>
+              <a:rPr sz="1200" b="0" i="0">
+                <a:solidFill>
+                  <a:srgbClr val="6B7280"/>
+                </a:solidFill>
+                <a:latin typeface="Yu Gothic"/>
+                <a:ea typeface="Yu Gothic"/>
+                <a:cs typeface="Yu Gothic"/>
+              </a:rPr>
+              <a:t>・</a:t>
+            </a:r>
+          </a:p>
+          <a:p>
+            <a:pPr algn="l">
+              <a:spcAft>
+                <a:spcPts val="400"/>
+              </a:spcAft>
+            </a:pPr>
+            <a:r>
+              <a:rPr sz="1200" b="0" i="0">
+                <a:solidFill>
+                  <a:srgbClr val="6B7280"/>
+                </a:solidFill>
+                <a:latin typeface="Yu Gothic"/>
+                <a:ea typeface="Yu Gothic"/>
+                <a:cs typeface="Yu Gothic"/>
+              </a:rPr>
+              <a:t>・</a:t>
+            </a:r>
+          </a:p>
+          <a:p>
+            <a:pPr algn="l">
+              <a:spcAft>
+                <a:spcPts val="0"/>
+              </a:spcAft>
+            </a:pPr>
+            <a:r>
+              <a:rPr sz="1200" b="0" i="0">
+                <a:solidFill>
+                  <a:srgbClr val="6B7280"/>
+                </a:solidFill>
+                <a:latin typeface="Yu Gothic"/>
+                <a:ea typeface="Yu Gothic"/>
+                <a:cs typeface="Yu Gothic"/>
+              </a:rPr>
+              <a:t>・</a:t>
+            </a:r>
+          </a:p>
+        </p:txBody>
+      </p:sp>
+      <p:sp>
+        <p:nvSpPr>
+          <p:cNvPr id="8" name="TextBox 7"/>
+          <p:cNvSpPr txBox="1"/>
+          <p:nvPr/>
+        </p:nvSpPr>
+        <p:spPr>
+          <a:xfrm>
+            <a:off x="502920" y="4224528"/>
+            <a:ext cx="8229600" cy="292608"/>
+          </a:xfrm>
+          <a:prstGeom prst="rect">
+            <a:avLst/>
+          </a:prstGeom>
+          <a:noFill/>
+        </p:spPr>
+        <p:txBody>
+          <a:bodyPr wrap="square" lIns="0" rIns="0" tIns="0" bIns="0">
+            <a:spAutoFit/>
+          </a:bodyPr>
+          <a:lstStyle/>
+          <a:p>
+            <a:pPr algn="l">
+              <a:spcAft>
+                <a:spcPts val="400"/>
+              </a:spcAft>
+            </a:pPr>
+            <a:r>
+              <a:rPr sz="1250" b="1" i="0">
+                <a:solidFill>
+                  <a:srgbClr val="1B1B26"/>
+                </a:solidFill>
+                <a:latin typeface="Yu Gothic"/>
+                <a:ea typeface="Yu Gothic"/>
+                <a:cs typeface="Yu Gothic"/>
+              </a:rPr>
+              <a:t>次回までの確認</a:t>
+            </a:r>
+          </a:p>
+        </p:txBody>
+      </p:sp>
+      <p:sp>
+        <p:nvSpPr>
+          <p:cNvPr id="9" name="Rounded Rectangle 8"/>
+          <p:cNvSpPr/>
+          <p:nvPr/>
+        </p:nvSpPr>
+        <p:spPr>
+          <a:xfrm>
+            <a:off x="502920" y="4572000"/>
+            <a:ext cx="11183112" cy="1517904"/>
           </a:xfrm>
           <a:prstGeom prst="roundRect">
             <a:avLst>
@@ -8551,101 +7416,14 @@
       </p:sp>
       <p:sp>
         <p:nvSpPr>
-          <p:cNvPr id="7" name="Rounded Rectangle 6"/>
-          <p:cNvSpPr/>
-          <p:nvPr/>
-        </p:nvSpPr>
-        <p:spPr>
-          <a:xfrm>
-            <a:off x="777240" y="2212848"/>
-            <a:ext cx="512064" cy="512064"/>
-          </a:xfrm>
-          <a:prstGeom prst="roundRect">
-            <a:avLst>
-              <a:gd name="adj" fmla="val 10000"/>
-            </a:avLst>
-          </a:prstGeom>
-          <a:solidFill>
-            <a:srgbClr val="2563EB"/>
-          </a:solidFill>
-          <a:ln>
-            <a:noFill/>
-          </a:ln>
-          <a:effectLst/>
-        </p:spPr>
-        <p:style>
-          <a:lnRef idx="1">
-            <a:schemeClr val="accent1"/>
-          </a:lnRef>
-          <a:fillRef idx="3">
-            <a:schemeClr val="accent1"/>
-          </a:fillRef>
-          <a:effectRef idx="2">
-            <a:schemeClr val="accent1"/>
-          </a:effectRef>
-          <a:fontRef idx="minor">
-            <a:schemeClr val="lt1"/>
-          </a:fontRef>
-        </p:style>
-        <p:txBody>
-          <a:bodyPr rtlCol="0" anchor="ctr"/>
-          <a:lstStyle/>
-          <a:p>
-            <a:pPr algn="ctr"/>
-          </a:p>
-        </p:txBody>
-      </p:sp>
-      <p:sp>
-        <p:nvSpPr>
-          <p:cNvPr id="8" name="TextBox 7"/>
+          <p:cNvPr id="10" name="TextBox 9"/>
           <p:cNvSpPr txBox="1"/>
           <p:nvPr/>
         </p:nvSpPr>
         <p:spPr>
           <a:xfrm>
-            <a:off x="777240" y="2276856"/>
-            <a:ext cx="512064" cy="402336"/>
-          </a:xfrm>
-          <a:prstGeom prst="rect">
-            <a:avLst/>
-          </a:prstGeom>
-          <a:noFill/>
-        </p:spPr>
-        <p:txBody>
-          <a:bodyPr wrap="square" lIns="0" rIns="0" tIns="0" bIns="0">
-            <a:spAutoFit/>
-          </a:bodyPr>
-          <a:lstStyle/>
-          <a:p>
-            <a:pPr algn="ctr">
-              <a:spcAft>
-                <a:spcPts val="400"/>
-              </a:spcAft>
-            </a:pPr>
-            <a:r>
-              <a:rPr sz="1800" b="1" i="0">
-                <a:solidFill>
-                  <a:srgbClr val="FFFFFF"/>
-                </a:solidFill>
-                <a:latin typeface="Yu Gothic"/>
-                <a:ea typeface="Yu Gothic"/>
-                <a:cs typeface="Yu Gothic"/>
-              </a:rPr>
-              <a:t>1</a:t>
-            </a:r>
-          </a:p>
-        </p:txBody>
-      </p:sp>
-      <p:sp>
-        <p:nvSpPr>
-          <p:cNvPr id="9" name="TextBox 8"/>
-          <p:cNvSpPr txBox="1"/>
-          <p:nvPr/>
-        </p:nvSpPr>
-        <p:spPr>
-          <a:xfrm>
-            <a:off x="1435608" y="2231136"/>
-            <a:ext cx="2560320" cy="512064"/>
+            <a:off x="777240" y="4736592"/>
+            <a:ext cx="10607040" cy="1280160"/>
           </a:xfrm>
           <a:prstGeom prst="rect">
             <a:avLst/>
@@ -8664,7 +7442,7 @@
               </a:spcAft>
             </a:pPr>
             <a:r>
-              <a:rPr sz="1250" b="1" i="0">
+              <a:rPr sz="1150" b="0" i="0">
                 <a:solidFill>
                   <a:srgbClr val="1B1B26"/>
                 </a:solidFill>
@@ -8672,119 +7450,9 @@
                 <a:ea typeface="Yu Gothic"/>
                 <a:cs typeface="Yu Gothic"/>
               </a:rPr>
-              <a:t>確認会（主担当の確定）</a:t>
-            </a:r>
-          </a:p>
-        </p:txBody>
-      </p:sp>
-      <p:sp>
-        <p:nvSpPr>
-          <p:cNvPr id="10" name="Rounded Rectangle 9"/>
-          <p:cNvSpPr/>
-          <p:nvPr/>
-        </p:nvSpPr>
-        <p:spPr>
-          <a:xfrm>
-            <a:off x="777240" y="2889504"/>
-            <a:ext cx="1188720" cy="310896"/>
-          </a:xfrm>
-          <a:prstGeom prst="roundRect">
-            <a:avLst>
-              <a:gd name="adj" fmla="val 50000"/>
-            </a:avLst>
-          </a:prstGeom>
-          <a:solidFill>
-            <a:srgbClr val="EAF1FE"/>
-          </a:solidFill>
-          <a:ln>
-            <a:noFill/>
-          </a:ln>
-          <a:effectLst/>
-        </p:spPr>
-        <p:style>
-          <a:lnRef idx="1">
-            <a:schemeClr val="accent1"/>
-          </a:lnRef>
-          <a:fillRef idx="3">
-            <a:schemeClr val="accent1"/>
-          </a:fillRef>
-          <a:effectRef idx="2">
-            <a:schemeClr val="accent1"/>
-          </a:effectRef>
-          <a:fontRef idx="minor">
-            <a:schemeClr val="lt1"/>
-          </a:fontRef>
-        </p:style>
-        <p:txBody>
-          <a:bodyPr rtlCol="0" anchor="ctr"/>
-          <a:lstStyle/>
-          <a:p>
-            <a:pPr algn="ctr"/>
-          </a:p>
-        </p:txBody>
-      </p:sp>
-      <p:sp>
-        <p:nvSpPr>
-          <p:cNvPr id="11" name="TextBox 10"/>
-          <p:cNvSpPr txBox="1"/>
-          <p:nvPr/>
-        </p:nvSpPr>
-        <p:spPr>
-          <a:xfrm>
-            <a:off x="777240" y="2935224"/>
-            <a:ext cx="1188720" cy="237744"/>
-          </a:xfrm>
-          <a:prstGeom prst="rect">
-            <a:avLst/>
-          </a:prstGeom>
-          <a:noFill/>
-        </p:spPr>
-        <p:txBody>
-          <a:bodyPr wrap="square" lIns="0" rIns="0" tIns="0" bIns="0">
-            <a:spAutoFit/>
-          </a:bodyPr>
-          <a:lstStyle/>
-          <a:p>
-            <a:pPr algn="ctr">
-              <a:spcAft>
-                <a:spcPts val="400"/>
-              </a:spcAft>
-            </a:pPr>
-            <a:r>
-              <a:rPr sz="950" b="1" i="0">
-                <a:solidFill>
-                  <a:srgbClr val="2563EB"/>
-                </a:solidFill>
-                <a:latin typeface="Yu Gothic"/>
-                <a:ea typeface="Yu Gothic"/>
-                <a:cs typeface="Yu Gothic"/>
-              </a:rPr>
-              <a:t>進行中</a:t>
-            </a:r>
-          </a:p>
-        </p:txBody>
-      </p:sp>
-      <p:sp>
-        <p:nvSpPr>
-          <p:cNvPr id="12" name="TextBox 11"/>
-          <p:cNvSpPr txBox="1"/>
-          <p:nvPr/>
-        </p:nvSpPr>
-        <p:spPr>
-          <a:xfrm>
-            <a:off x="777240" y="3328416"/>
-            <a:ext cx="3054096" cy="859536"/>
-          </a:xfrm>
-          <a:prstGeom prst="rect">
-            <a:avLst/>
-          </a:prstGeom>
-          <a:noFill/>
-        </p:spPr>
-        <p:txBody>
-          <a:bodyPr wrap="square" lIns="0" rIns="0" tIns="0" bIns="0">
-            <a:spAutoFit/>
-          </a:bodyPr>
-          <a:lstStyle/>
+              <a:t>・本日の決定は24時間以内に決定ログへ記録し、全関係者へ展開します（STO）</a:t>
+            </a:r>
+          </a:p>
           <a:p>
             <a:pPr algn="l">
               <a:spcAft>
@@ -8792,7 +7460,7 @@
               </a:spcAft>
             </a:pPr>
             <a:r>
-              <a:rPr sz="950" b="0" i="0">
+              <a:rPr sz="1150" b="0" i="0">
                 <a:solidFill>
                   <a:srgbClr val="1B1B26"/>
                 </a:solidFill>
@@ -8800,167 +7468,9 @@
                 <a:ea typeface="Yu Gothic"/>
                 <a:cs typeface="Yu Gothic"/>
               </a:rPr>
-              <a:t>7/21週から合同組成で開催中。役割別の担当列（営業窓口・監修担当）も整備</a:t>
-            </a:r>
-          </a:p>
-        </p:txBody>
-      </p:sp>
-      <p:sp>
-        <p:nvSpPr>
-          <p:cNvPr id="13" name="Rounded Rectangle 12"/>
-          <p:cNvSpPr/>
-          <p:nvPr/>
-        </p:nvSpPr>
-        <p:spPr>
-          <a:xfrm>
-            <a:off x="4297680" y="1975104"/>
-            <a:ext cx="3602736" cy="2286000"/>
-          </a:xfrm>
-          <a:prstGeom prst="roundRect">
-            <a:avLst>
-              <a:gd name="adj" fmla="val 10000"/>
-            </a:avLst>
-          </a:prstGeom>
-          <a:solidFill>
-            <a:srgbClr val="F6F8FB"/>
-          </a:solidFill>
-          <a:ln w="9525">
-            <a:solidFill>
-              <a:srgbClr val="E5E7EB"/>
-            </a:solidFill>
-          </a:ln>
-          <a:effectLst/>
-        </p:spPr>
-        <p:style>
-          <a:lnRef idx="1">
-            <a:schemeClr val="accent1"/>
-          </a:lnRef>
-          <a:fillRef idx="3">
-            <a:schemeClr val="accent1"/>
-          </a:fillRef>
-          <a:effectRef idx="2">
-            <a:schemeClr val="accent1"/>
-          </a:effectRef>
-          <a:fontRef idx="minor">
-            <a:schemeClr val="lt1"/>
-          </a:fontRef>
-        </p:style>
-        <p:txBody>
-          <a:bodyPr rtlCol="0" anchor="ctr"/>
-          <a:lstStyle/>
-          <a:p>
-            <a:pPr algn="ctr"/>
-          </a:p>
-        </p:txBody>
-      </p:sp>
-      <p:sp>
-        <p:nvSpPr>
-          <p:cNvPr id="14" name="Rounded Rectangle 13"/>
-          <p:cNvSpPr/>
-          <p:nvPr/>
-        </p:nvSpPr>
-        <p:spPr>
-          <a:xfrm>
-            <a:off x="4572000" y="2212848"/>
-            <a:ext cx="512064" cy="512064"/>
-          </a:xfrm>
-          <a:prstGeom prst="roundRect">
-            <a:avLst>
-              <a:gd name="adj" fmla="val 10000"/>
-            </a:avLst>
-          </a:prstGeom>
-          <a:solidFill>
-            <a:srgbClr val="2563EB"/>
-          </a:solidFill>
-          <a:ln>
-            <a:noFill/>
-          </a:ln>
-          <a:effectLst/>
-        </p:spPr>
-        <p:style>
-          <a:lnRef idx="1">
-            <a:schemeClr val="accent1"/>
-          </a:lnRef>
-          <a:fillRef idx="3">
-            <a:schemeClr val="accent1"/>
-          </a:fillRef>
-          <a:effectRef idx="2">
-            <a:schemeClr val="accent1"/>
-          </a:effectRef>
-          <a:fontRef idx="minor">
-            <a:schemeClr val="lt1"/>
-          </a:fontRef>
-        </p:style>
-        <p:txBody>
-          <a:bodyPr rtlCol="0" anchor="ctr"/>
-          <a:lstStyle/>
-          <a:p>
-            <a:pPr algn="ctr"/>
-          </a:p>
-        </p:txBody>
-      </p:sp>
-      <p:sp>
-        <p:nvSpPr>
-          <p:cNvPr id="15" name="TextBox 14"/>
-          <p:cNvSpPr txBox="1"/>
-          <p:nvPr/>
-        </p:nvSpPr>
-        <p:spPr>
-          <a:xfrm>
-            <a:off x="4572000" y="2276856"/>
-            <a:ext cx="512064" cy="402336"/>
-          </a:xfrm>
-          <a:prstGeom prst="rect">
-            <a:avLst/>
-          </a:prstGeom>
-          <a:noFill/>
-        </p:spPr>
-        <p:txBody>
-          <a:bodyPr wrap="square" lIns="0" rIns="0" tIns="0" bIns="0">
-            <a:spAutoFit/>
-          </a:bodyPr>
-          <a:lstStyle/>
-          <a:p>
-            <a:pPr algn="ctr">
-              <a:spcAft>
-                <a:spcPts val="400"/>
-              </a:spcAft>
-            </a:pPr>
-            <a:r>
-              <a:rPr sz="1800" b="1" i="0">
-                <a:solidFill>
-                  <a:srgbClr val="FFFFFF"/>
-                </a:solidFill>
-                <a:latin typeface="Yu Gothic"/>
-                <a:ea typeface="Yu Gothic"/>
-                <a:cs typeface="Yu Gothic"/>
-              </a:rPr>
-              <a:t>2</a:t>
-            </a:r>
-          </a:p>
-        </p:txBody>
-      </p:sp>
-      <p:sp>
-        <p:nvSpPr>
-          <p:cNvPr id="16" name="TextBox 15"/>
-          <p:cNvSpPr txBox="1"/>
-          <p:nvPr/>
-        </p:nvSpPr>
-        <p:spPr>
-          <a:xfrm>
-            <a:off x="5230368" y="2231136"/>
-            <a:ext cx="2560320" cy="512064"/>
-          </a:xfrm>
-          <a:prstGeom prst="rect">
-            <a:avLst/>
-          </a:prstGeom>
-          <a:noFill/>
-        </p:spPr>
-        <p:txBody>
-          <a:bodyPr wrap="square" lIns="0" rIns="0" tIns="0" bIns="0">
-            <a:spAutoFit/>
-          </a:bodyPr>
-          <a:lstStyle/>
+              <a:t>・アップサイド15億の事業本部別の落とし込みと、レバー別ブリッジを8月中に確定します（担当：小沢）</a:t>
+            </a:r>
+          </a:p>
           <a:p>
             <a:pPr algn="l">
               <a:spcAft>
@@ -8968,7 +7478,7 @@
               </a:spcAft>
             </a:pPr>
             <a:r>
-              <a:rPr sz="1250" b="1" i="0">
+              <a:rPr sz="1150" b="0" i="0">
                 <a:solidFill>
                   <a:srgbClr val="1B1B26"/>
                 </a:solidFill>
@@ -8976,108 +7486,39 @@
                 <a:ea typeface="Yu Gothic"/>
                 <a:cs typeface="Yu Gothic"/>
               </a:rPr>
-              <a:t>財務ひも付け</a:t>
-            </a:r>
-          </a:p>
-        </p:txBody>
-      </p:sp>
-      <p:sp>
-        <p:nvSpPr>
-          <p:cNvPr id="17" name="Rounded Rectangle 16"/>
-          <p:cNvSpPr/>
-          <p:nvPr/>
-        </p:nvSpPr>
-        <p:spPr>
-          <a:xfrm>
-            <a:off x="4572000" y="2889504"/>
-            <a:ext cx="1188720" cy="310896"/>
-          </a:xfrm>
-          <a:prstGeom prst="roundRect">
-            <a:avLst>
-              <a:gd name="adj" fmla="val 50000"/>
-            </a:avLst>
-          </a:prstGeom>
-          <a:solidFill>
-            <a:srgbClr val="EAF1FE"/>
-          </a:solidFill>
-          <a:ln>
-            <a:noFill/>
-          </a:ln>
-          <a:effectLst/>
-        </p:spPr>
-        <p:style>
-          <a:lnRef idx="1">
-            <a:schemeClr val="accent1"/>
-          </a:lnRef>
-          <a:fillRef idx="3">
-            <a:schemeClr val="accent1"/>
-          </a:fillRef>
-          <a:effectRef idx="2">
-            <a:schemeClr val="accent1"/>
-          </a:effectRef>
-          <a:fontRef idx="minor">
-            <a:schemeClr val="lt1"/>
-          </a:fontRef>
-        </p:style>
-        <p:txBody>
-          <a:bodyPr rtlCol="0" anchor="ctr"/>
-          <a:lstStyle/>
-          <a:p>
-            <a:pPr algn="ctr"/>
-          </a:p>
-        </p:txBody>
-      </p:sp>
-      <p:sp>
-        <p:nvSpPr>
-          <p:cNvPr id="18" name="TextBox 17"/>
-          <p:cNvSpPr txBox="1"/>
-          <p:nvPr/>
-        </p:nvSpPr>
-        <p:spPr>
-          <a:xfrm>
-            <a:off x="4572000" y="2935224"/>
-            <a:ext cx="1188720" cy="237744"/>
-          </a:xfrm>
-          <a:prstGeom prst="rect">
-            <a:avLst/>
-          </a:prstGeom>
-          <a:noFill/>
-        </p:spPr>
-        <p:txBody>
-          <a:bodyPr wrap="square" lIns="0" rIns="0" tIns="0" bIns="0">
-            <a:spAutoFit/>
-          </a:bodyPr>
-          <a:lstStyle/>
-          <a:p>
-            <a:pPr algn="ctr">
+              <a:t>・各分科会は90日後ゴールに向けた「今月やること」を数字で設定し、次回この場で振り返ります</a:t>
+            </a:r>
+          </a:p>
+          <a:p>
+            <a:pPr algn="l">
               <a:spcAft>
-                <a:spcPts val="400"/>
+                <a:spcPts val="0"/>
               </a:spcAft>
             </a:pPr>
             <a:r>
-              <a:rPr sz="950" b="1" i="0">
-                <a:solidFill>
-                  <a:srgbClr val="2563EB"/>
+              <a:rPr sz="1150" b="0" i="0">
+                <a:solidFill>
+                  <a:srgbClr val="1B1B26"/>
                 </a:solidFill>
                 <a:latin typeface="Yu Gothic"/>
                 <a:ea typeface="Yu Gothic"/>
                 <a:cs typeface="Yu Gothic"/>
               </a:rPr>
-              <a:t>先行着手</a:t>
-            </a:r>
-          </a:p>
-        </p:txBody>
-      </p:sp>
-      <p:sp>
-        <p:nvSpPr>
-          <p:cNvPr id="19" name="TextBox 18"/>
+              <a:t>・次回の点検会議は9月第1週（月次60分・本日と同じ型）</a:t>
+            </a:r>
+          </a:p>
+        </p:txBody>
+      </p:sp>
+      <p:sp>
+        <p:nvSpPr>
+          <p:cNvPr id="11" name="TextBox 10"/>
           <p:cNvSpPr txBox="1"/>
           <p:nvPr/>
         </p:nvSpPr>
         <p:spPr>
           <a:xfrm>
-            <a:off x="4572000" y="3328416"/>
-            <a:ext cx="3054096" cy="859536"/>
+            <a:off x="502920" y="6547104"/>
+            <a:ext cx="9144000" cy="256032"/>
           </a:xfrm>
           <a:prstGeom prst="rect">
             <a:avLst/>
@@ -9096,492 +7537,6 @@
               </a:spcAft>
             </a:pPr>
             <a:r>
-              <a:rPr sz="950" b="0" i="0">
-                <a:solidFill>
-                  <a:srgbClr val="1B1B26"/>
-                </a:solidFill>
-                <a:latin typeface="Yu Gothic"/>
-                <a:ea typeface="Yu Gothic"/>
-                <a:cs typeface="Yu Gothic"/>
-              </a:rPr>
-              <a:t>営業側データ（140社ランク・6年分の継続判断）の取り込みから先行。柳沼さんの取引先別明細で完成</a:t>
-            </a:r>
-          </a:p>
-        </p:txBody>
-      </p:sp>
-      <p:sp>
-        <p:nvSpPr>
-          <p:cNvPr id="20" name="Rounded Rectangle 19"/>
-          <p:cNvSpPr/>
-          <p:nvPr/>
-        </p:nvSpPr>
-        <p:spPr>
-          <a:xfrm>
-            <a:off x="8092440" y="1975104"/>
-            <a:ext cx="3602736" cy="2286000"/>
-          </a:xfrm>
-          <a:prstGeom prst="roundRect">
-            <a:avLst>
-              <a:gd name="adj" fmla="val 10000"/>
-            </a:avLst>
-          </a:prstGeom>
-          <a:solidFill>
-            <a:srgbClr val="F6F8FB"/>
-          </a:solidFill>
-          <a:ln w="9525">
-            <a:solidFill>
-              <a:srgbClr val="E5E7EB"/>
-            </a:solidFill>
-          </a:ln>
-          <a:effectLst/>
-        </p:spPr>
-        <p:style>
-          <a:lnRef idx="1">
-            <a:schemeClr val="accent1"/>
-          </a:lnRef>
-          <a:fillRef idx="3">
-            <a:schemeClr val="accent1"/>
-          </a:fillRef>
-          <a:effectRef idx="2">
-            <a:schemeClr val="accent1"/>
-          </a:effectRef>
-          <a:fontRef idx="minor">
-            <a:schemeClr val="lt1"/>
-          </a:fontRef>
-        </p:style>
-        <p:txBody>
-          <a:bodyPr rtlCol="0" anchor="ctr"/>
-          <a:lstStyle/>
-          <a:p>
-            <a:pPr algn="ctr"/>
-          </a:p>
-        </p:txBody>
-      </p:sp>
-      <p:sp>
-        <p:nvSpPr>
-          <p:cNvPr id="21" name="Rounded Rectangle 20"/>
-          <p:cNvSpPr/>
-          <p:nvPr/>
-        </p:nvSpPr>
-        <p:spPr>
-          <a:xfrm>
-            <a:off x="8366760" y="2212848"/>
-            <a:ext cx="512064" cy="512064"/>
-          </a:xfrm>
-          <a:prstGeom prst="roundRect">
-            <a:avLst>
-              <a:gd name="adj" fmla="val 10000"/>
-            </a:avLst>
-          </a:prstGeom>
-          <a:solidFill>
-            <a:srgbClr val="2563EB"/>
-          </a:solidFill>
-          <a:ln>
-            <a:noFill/>
-          </a:ln>
-          <a:effectLst/>
-        </p:spPr>
-        <p:style>
-          <a:lnRef idx="1">
-            <a:schemeClr val="accent1"/>
-          </a:lnRef>
-          <a:fillRef idx="3">
-            <a:schemeClr val="accent1"/>
-          </a:fillRef>
-          <a:effectRef idx="2">
-            <a:schemeClr val="accent1"/>
-          </a:effectRef>
-          <a:fontRef idx="minor">
-            <a:schemeClr val="lt1"/>
-          </a:fontRef>
-        </p:style>
-        <p:txBody>
-          <a:bodyPr rtlCol="0" anchor="ctr"/>
-          <a:lstStyle/>
-          <a:p>
-            <a:pPr algn="ctr"/>
-          </a:p>
-        </p:txBody>
-      </p:sp>
-      <p:sp>
-        <p:nvSpPr>
-          <p:cNvPr id="22" name="TextBox 21"/>
-          <p:cNvSpPr txBox="1"/>
-          <p:nvPr/>
-        </p:nvSpPr>
-        <p:spPr>
-          <a:xfrm>
-            <a:off x="8366760" y="2276856"/>
-            <a:ext cx="512064" cy="402336"/>
-          </a:xfrm>
-          <a:prstGeom prst="rect">
-            <a:avLst/>
-          </a:prstGeom>
-          <a:noFill/>
-        </p:spPr>
-        <p:txBody>
-          <a:bodyPr wrap="square" lIns="0" rIns="0" tIns="0" bIns="0">
-            <a:spAutoFit/>
-          </a:bodyPr>
-          <a:lstStyle/>
-          <a:p>
-            <a:pPr algn="ctr">
-              <a:spcAft>
-                <a:spcPts val="400"/>
-              </a:spcAft>
-            </a:pPr>
-            <a:r>
-              <a:rPr sz="1800" b="1" i="0">
-                <a:solidFill>
-                  <a:srgbClr val="FFFFFF"/>
-                </a:solidFill>
-                <a:latin typeface="Yu Gothic"/>
-                <a:ea typeface="Yu Gothic"/>
-                <a:cs typeface="Yu Gothic"/>
-              </a:rPr>
-              <a:t>3</a:t>
-            </a:r>
-          </a:p>
-        </p:txBody>
-      </p:sp>
-      <p:sp>
-        <p:nvSpPr>
-          <p:cNvPr id="23" name="TextBox 22"/>
-          <p:cNvSpPr txBox="1"/>
-          <p:nvPr/>
-        </p:nvSpPr>
-        <p:spPr>
-          <a:xfrm>
-            <a:off x="9025128" y="2231136"/>
-            <a:ext cx="2560320" cy="512064"/>
-          </a:xfrm>
-          <a:prstGeom prst="rect">
-            <a:avLst/>
-          </a:prstGeom>
-          <a:noFill/>
-        </p:spPr>
-        <p:txBody>
-          <a:bodyPr wrap="square" lIns="0" rIns="0" tIns="0" bIns="0">
-            <a:spAutoFit/>
-          </a:bodyPr>
-          <a:lstStyle/>
-          <a:p>
-            <a:pPr algn="l">
-              <a:spcAft>
-                <a:spcPts val="400"/>
-              </a:spcAft>
-            </a:pPr>
-            <a:r>
-              <a:rPr sz="1250" b="1" i="0">
-                <a:solidFill>
-                  <a:srgbClr val="1B1B26"/>
-                </a:solidFill>
-                <a:latin typeface="Yu Gothic"/>
-                <a:ea typeface="Yu Gothic"/>
-                <a:cs typeface="Yu Gothic"/>
-              </a:rPr>
-              <a:t>採点と力の入れ直し</a:t>
-            </a:r>
-          </a:p>
-        </p:txBody>
-      </p:sp>
-      <p:sp>
-        <p:nvSpPr>
-          <p:cNvPr id="24" name="Rounded Rectangle 23"/>
-          <p:cNvSpPr/>
-          <p:nvPr/>
-        </p:nvSpPr>
-        <p:spPr>
-          <a:xfrm>
-            <a:off x="8366760" y="2889504"/>
-            <a:ext cx="1188720" cy="310896"/>
-          </a:xfrm>
-          <a:prstGeom prst="roundRect">
-            <a:avLst>
-              <a:gd name="adj" fmla="val 50000"/>
-            </a:avLst>
-          </a:prstGeom>
-          <a:solidFill>
-            <a:srgbClr val="EAF1FE"/>
-          </a:solidFill>
-          <a:ln>
-            <a:noFill/>
-          </a:ln>
-          <a:effectLst/>
-        </p:spPr>
-        <p:style>
-          <a:lnRef idx="1">
-            <a:schemeClr val="accent1"/>
-          </a:lnRef>
-          <a:fillRef idx="3">
-            <a:schemeClr val="accent1"/>
-          </a:fillRef>
-          <a:effectRef idx="2">
-            <a:schemeClr val="accent1"/>
-          </a:effectRef>
-          <a:fontRef idx="minor">
-            <a:schemeClr val="lt1"/>
-          </a:fontRef>
-        </p:style>
-        <p:txBody>
-          <a:bodyPr rtlCol="0" anchor="ctr"/>
-          <a:lstStyle/>
-          <a:p>
-            <a:pPr algn="ctr"/>
-          </a:p>
-        </p:txBody>
-      </p:sp>
-      <p:sp>
-        <p:nvSpPr>
-          <p:cNvPr id="25" name="TextBox 24"/>
-          <p:cNvSpPr txBox="1"/>
-          <p:nvPr/>
-        </p:nvSpPr>
-        <p:spPr>
-          <a:xfrm>
-            <a:off x="8366760" y="2935224"/>
-            <a:ext cx="1188720" cy="237744"/>
-          </a:xfrm>
-          <a:prstGeom prst="rect">
-            <a:avLst/>
-          </a:prstGeom>
-          <a:noFill/>
-        </p:spPr>
-        <p:txBody>
-          <a:bodyPr wrap="square" lIns="0" rIns="0" tIns="0" bIns="0">
-            <a:spAutoFit/>
-          </a:bodyPr>
-          <a:lstStyle/>
-          <a:p>
-            <a:pPr algn="ctr">
-              <a:spcAft>
-                <a:spcPts val="400"/>
-              </a:spcAft>
-            </a:pPr>
-            <a:r>
-              <a:rPr sz="950" b="1" i="0">
-                <a:solidFill>
-                  <a:srgbClr val="2563EB"/>
-                </a:solidFill>
-                <a:latin typeface="Yu Gothic"/>
-                <a:ea typeface="Yu Gothic"/>
-                <a:cs typeface="Yu Gothic"/>
-              </a:rPr>
-              <a:t>様式確定</a:t>
-            </a:r>
-          </a:p>
-        </p:txBody>
-      </p:sp>
-      <p:sp>
-        <p:nvSpPr>
-          <p:cNvPr id="26" name="TextBox 25"/>
-          <p:cNvSpPr txBox="1"/>
-          <p:nvPr/>
-        </p:nvSpPr>
-        <p:spPr>
-          <a:xfrm>
-            <a:off x="8366760" y="3328416"/>
-            <a:ext cx="3054096" cy="859536"/>
-          </a:xfrm>
-          <a:prstGeom prst="rect">
-            <a:avLst/>
-          </a:prstGeom>
-          <a:noFill/>
-        </p:spPr>
-        <p:txBody>
-          <a:bodyPr wrap="square" lIns="0" rIns="0" tIns="0" bIns="0">
-            <a:spAutoFit/>
-          </a:bodyPr>
-          <a:lstStyle/>
-          <a:p>
-            <a:pPr algn="l">
-              <a:spcAft>
-                <a:spcPts val="400"/>
-              </a:spcAft>
-            </a:pPr>
-            <a:r>
-              <a:rPr sz="950" b="0" i="0">
-                <a:solidFill>
-                  <a:srgbClr val="1B1B26"/>
-                </a:solidFill>
-                <a:latin typeface="Yu Gothic"/>
-                <a:ea typeface="Yu Gothic"/>
-                <a:cs typeface="Yu Gothic"/>
-              </a:rPr>
-              <a:t>顧客採点→ランク確定→重点顧客台帳の3様式が完成。基準（重み・線引き）は分科会で確定へ</a:t>
-            </a:r>
-          </a:p>
-        </p:txBody>
-      </p:sp>
-      <p:sp>
-        <p:nvSpPr>
-          <p:cNvPr id="27" name="Rounded Rectangle 26"/>
-          <p:cNvSpPr/>
-          <p:nvPr/>
-        </p:nvSpPr>
-        <p:spPr>
-          <a:xfrm>
-            <a:off x="502920" y="4626864"/>
-            <a:ext cx="11183112" cy="1463040"/>
-          </a:xfrm>
-          <a:prstGeom prst="roundRect">
-            <a:avLst>
-              <a:gd name="adj" fmla="val 10000"/>
-            </a:avLst>
-          </a:prstGeom>
-          <a:solidFill>
-            <a:srgbClr val="EAF1FE"/>
-          </a:solidFill>
-          <a:ln>
-            <a:noFill/>
-          </a:ln>
-          <a:effectLst/>
-        </p:spPr>
-        <p:style>
-          <a:lnRef idx="1">
-            <a:schemeClr val="accent1"/>
-          </a:lnRef>
-          <a:fillRef idx="3">
-            <a:schemeClr val="accent1"/>
-          </a:fillRef>
-          <a:effectRef idx="2">
-            <a:schemeClr val="accent1"/>
-          </a:effectRef>
-          <a:fontRef idx="minor">
-            <a:schemeClr val="lt1"/>
-          </a:fontRef>
-        </p:style>
-        <p:txBody>
-          <a:bodyPr rtlCol="0" anchor="ctr"/>
-          <a:lstStyle/>
-          <a:p>
-            <a:pPr algn="ctr"/>
-          </a:p>
-        </p:txBody>
-      </p:sp>
-      <p:sp>
-        <p:nvSpPr>
-          <p:cNvPr id="28" name="TextBox 27"/>
-          <p:cNvSpPr txBox="1"/>
-          <p:nvPr/>
-        </p:nvSpPr>
-        <p:spPr>
-          <a:xfrm>
-            <a:off x="777240" y="4791456"/>
-            <a:ext cx="10607040" cy="1188720"/>
-          </a:xfrm>
-          <a:prstGeom prst="rect">
-            <a:avLst/>
-          </a:prstGeom>
-          <a:noFill/>
-        </p:spPr>
-        <p:txBody>
-          <a:bodyPr wrap="square" lIns="0" rIns="0" tIns="0" bIns="0">
-            <a:spAutoFit/>
-          </a:bodyPr>
-          <a:lstStyle/>
-          <a:p>
-            <a:pPr algn="l">
-              <a:spcAft>
-                <a:spcPts val="600"/>
-              </a:spcAft>
-            </a:pPr>
-            <a:r>
-              <a:rPr sz="1200" b="1" i="0">
-                <a:solidFill>
-                  <a:srgbClr val="1E40AF"/>
-                </a:solidFill>
-                <a:latin typeface="Yu Gothic"/>
-                <a:ea typeface="Yu Gothic"/>
-                <a:cs typeface="Yu Gothic"/>
-              </a:rPr>
-              <a:t>次回までの確認</a:t>
-            </a:r>
-          </a:p>
-          <a:p>
-            <a:pPr algn="l">
-              <a:spcAft>
-                <a:spcPts val="300"/>
-              </a:spcAft>
-            </a:pPr>
-            <a:r>
-              <a:rPr sz="1100" b="0" i="0">
-                <a:solidFill>
-                  <a:srgbClr val="1B1B26"/>
-                </a:solidFill>
-                <a:latin typeface="Yu Gothic"/>
-                <a:ea typeface="Yu Gothic"/>
-                <a:cs typeface="Yu Gothic"/>
-              </a:rPr>
-              <a:t>・本日の決定は24時間以内に決定ログへ記録し、全関係者へ展開します</a:t>
-            </a:r>
-          </a:p>
-          <a:p>
-            <a:pPr algn="l">
-              <a:spcAft>
-                <a:spcPts val="300"/>
-              </a:spcAft>
-            </a:pPr>
-            <a:r>
-              <a:rPr sz="1100" b="0" i="0">
-                <a:solidFill>
-                  <a:srgbClr val="1B1B26"/>
-                </a:solidFill>
-                <a:latin typeface="Yu Gothic"/>
-                <a:ea typeface="Yu Gothic"/>
-                <a:cs typeface="Yu Gothic"/>
-              </a:rPr>
-              <a:t>・レバー別の責任者と目標額（ブリッジ第1版）をDay30までに確定します（担当：小沢さん）</a:t>
-            </a:r>
-          </a:p>
-          <a:p>
-            <a:pPr algn="l">
-              <a:spcAft>
-                <a:spcPts val="0"/>
-              </a:spcAft>
-            </a:pPr>
-            <a:r>
-              <a:rPr sz="1100" b="0" i="0">
-                <a:solidFill>
-                  <a:srgbClr val="1B1B26"/>
-                </a:solidFill>
-                <a:latin typeface="Yu Gothic"/>
-                <a:ea typeface="Yu Gothic"/>
-                <a:cs typeface="Yu Gothic"/>
-              </a:rPr>
-              <a:t>・次回の点検会議は9月第1週（月次60分・本日と同じ型）</a:t>
-            </a:r>
-          </a:p>
-        </p:txBody>
-      </p:sp>
-      <p:sp>
-        <p:nvSpPr>
-          <p:cNvPr id="29" name="TextBox 28"/>
-          <p:cNvSpPr txBox="1"/>
-          <p:nvPr/>
-        </p:nvSpPr>
-        <p:spPr>
-          <a:xfrm>
-            <a:off x="502920" y="6547104"/>
-            <a:ext cx="9144000" cy="256032"/>
-          </a:xfrm>
-          <a:prstGeom prst="rect">
-            <a:avLst/>
-          </a:prstGeom>
-          <a:noFill/>
-        </p:spPr>
-        <p:txBody>
-          <a:bodyPr wrap="square" lIns="0" rIns="0" tIns="0" bIns="0">
-            <a:spAutoFit/>
-          </a:bodyPr>
-          <a:lstStyle/>
-          <a:p>
-            <a:pPr algn="l">
-              <a:spcAft>
-                <a:spcPts val="400"/>
-              </a:spcAft>
-            </a:pPr>
-            <a:r>
               <a:rPr sz="750" b="0" i="0">
                 <a:solidFill>
                   <a:srgbClr val="6B7280"/>
@@ -9597,7 +7552,7 @@
       </p:sp>
       <p:sp>
         <p:nvSpPr>
-          <p:cNvPr id="30" name="TextBox 29"/>
+          <p:cNvPr id="12" name="TextBox 11"/>
           <p:cNvSpPr txBox="1"/>
           <p:nvPr/>
         </p:nvSpPr>
